--- a/Document_Files/Presentation_Slides_v2.pptx
+++ b/Document_Files/Presentation_Slides_v2.pptx
@@ -5,7 +5,7 @@
     <p:sldMasterId id="2147483648" r:id="rId1"/>
   </p:sldMasterIdLst>
   <p:notesMasterIdLst>
-    <p:notesMasterId r:id="rId16"/>
+    <p:notesMasterId r:id="rId15"/>
   </p:notesMasterIdLst>
   <p:sldIdLst>
     <p:sldId id="256" r:id="rId2"/>
@@ -19,9 +19,8 @@
     <p:sldId id="270" r:id="rId10"/>
     <p:sldId id="272" r:id="rId11"/>
     <p:sldId id="273" r:id="rId12"/>
-    <p:sldId id="277" r:id="rId13"/>
-    <p:sldId id="274" r:id="rId14"/>
-    <p:sldId id="275" r:id="rId15"/>
+    <p:sldId id="274" r:id="rId13"/>
+    <p:sldId id="275" r:id="rId14"/>
   </p:sldIdLst>
   <p:sldSz cx="12192000" cy="6858000"/>
   <p:notesSz cx="6858000" cy="9144000"/>
@@ -123,7 +122,7 @@
   <p:extLst>
     <p:ext uri="{EFAFB233-063F-42B5-8137-9DF3F51BA10A}">
       <p15:sldGuideLst xmlns:p15="http://schemas.microsoft.com/office/powerpoint/2012/main">
-        <p15:guide id="1" orient="horz" pos="595" userDrawn="1">
+        <p15:guide id="1" orient="horz" pos="572" userDrawn="1">
           <p15:clr>
             <a:srgbClr val="A4A3A4"/>
           </p15:clr>
@@ -1891,7 +1890,7 @@
           <a:p>
             <a:fld id="{99AE9003-360B-4E18-8AA9-F1BCDFEE0A17}" type="slidenum">
               <a:rPr lang="en-US" smtClean="0"/>
-              <a:t>13</a:t>
+              <a:t>12</a:t>
             </a:fld>
             <a:endParaRPr lang="en-US"/>
           </a:p>
@@ -5602,7 +5601,7 @@
         <p:spPr>
           <a:xfrm>
             <a:off x="695325" y="1125538"/>
-            <a:ext cx="10515600" cy="5580062"/>
+            <a:ext cx="10515600" cy="411597"/>
           </a:xfrm>
         </p:spPr>
         <p:txBody>
@@ -5617,28 +5616,9 @@
             </a:r>
           </a:p>
           <a:p>
-            <a:pPr lvl="1"/>
-            <a:r>
-              <a:rPr lang="en-US" dirty="0">
-                <a:solidFill>
-                  <a:srgbClr val="1E8449"/>
-                </a:solidFill>
-              </a:rPr>
-              <a:t>✅ At or above 80% power</a:t>
-            </a:r>
-          </a:p>
-          <a:p>
-            <a:pPr lvl="1"/>
-            <a:r>
-              <a:rPr lang="en-US" dirty="0">
-                <a:solidFill>
-                  <a:srgbClr val="922B21"/>
-                </a:solidFill>
-              </a:rPr>
-              <a:t>❌ Below 80% power (subgroup cannot support reliable inference)</a:t>
-            </a:r>
-          </a:p>
-          <a:p>
+            <a:pPr marL="0" indent="0">
+              <a:buNone/>
+            </a:pPr>
             <a:endParaRPr lang="en-US" sz="2400" dirty="0">
               <a:solidFill>
                 <a:srgbClr val="922B21"/>
@@ -5646,120 +5626,3210 @@
             </a:endParaRPr>
           </a:p>
           <a:p>
-            <a:r>
-              <a:rPr lang="en-US" sz="2400" b="1" dirty="0"/>
-              <a:t>Subgroup 	n  	Events Obs. 	HR Event 	Rate 	Obs. Power</a:t>
-            </a:r>
-          </a:p>
-          <a:p>
-            <a:pPr marL="457200" lvl="1" indent="0">
-              <a:buNone/>
-            </a:pPr>
-            <a:r>
-              <a:rPr lang="en-US" dirty="0">
-                <a:solidFill>
-                  <a:srgbClr val="1E8449"/>
-                </a:solidFill>
-              </a:rPr>
-              <a:t>Overall   	1151  	96  		0.517  		8.3%   	83.9% ✅</a:t>
-            </a:r>
-          </a:p>
-          <a:p>
-            <a:pPr marL="457200" lvl="1" indent="0">
-              <a:buNone/>
-            </a:pPr>
-            <a:r>
-              <a:rPr lang="en-US" dirty="0">
-                <a:solidFill>
-                  <a:srgbClr val="1E8449"/>
-                </a:solidFill>
-              </a:rPr>
-              <a:t>Female   	951  	81  		0.459  		8.5%   	89.7% ✅</a:t>
-            </a:r>
-          </a:p>
-          <a:p>
-            <a:pPr marL="457200" lvl="1" indent="0">
-              <a:buNone/>
-            </a:pPr>
-            <a:r>
-              <a:rPr lang="en-US" dirty="0">
-                <a:solidFill>
-                  <a:srgbClr val="922B21"/>
-                </a:solidFill>
-              </a:rPr>
-              <a:t>Male    	200  	15  		1.101  		7.5%   	2.0% ❌</a:t>
-            </a:r>
-          </a:p>
-          <a:p>
-            <a:pPr marL="457200" lvl="1" indent="0">
-              <a:buNone/>
-            </a:pPr>
-            <a:r>
-              <a:rPr lang="en-US" dirty="0">
-                <a:solidFill>
-                  <a:srgbClr val="C0392B"/>
-                </a:solidFill>
-              </a:rPr>
-              <a:t>White    	596  	51  		0.539  		8.6%   	48.6% ❌</a:t>
-            </a:r>
-          </a:p>
-          <a:p>
-            <a:pPr marL="457200" lvl="1" indent="0">
-              <a:buNone/>
-            </a:pPr>
-            <a:r>
-              <a:rPr lang="en-US" dirty="0">
-                <a:solidFill>
-                  <a:srgbClr val="C0392B"/>
-                </a:solidFill>
-              </a:rPr>
-              <a:t>Black    	327  	21  		0.287  		6.4%   	73.2% ❌</a:t>
-            </a:r>
-          </a:p>
-          <a:p>
-            <a:pPr marL="457200" lvl="1" indent="0">
-              <a:buNone/>
-            </a:pPr>
-            <a:r>
-              <a:rPr lang="en-US" dirty="0">
-                <a:solidFill>
-                  <a:srgbClr val="922B21"/>
-                </a:solidFill>
-              </a:rPr>
-              <a:t>Hispanic   	203  	20  		0.628  		9.9%   	11.5% ❌</a:t>
-            </a:r>
-          </a:p>
-          <a:p>
-            <a:pPr marL="457200" lvl="1" indent="0">
-              <a:buNone/>
-            </a:pPr>
-            <a:r>
-              <a:rPr lang="en-US" dirty="0">
-                <a:solidFill>
-                  <a:srgbClr val="922B21"/>
-                </a:solidFill>
-              </a:rPr>
-              <a:t>Asian/PI   	14   	3  		0.068  		21.4%	53.5% ❌</a:t>
-            </a:r>
-          </a:p>
-          <a:p>
-            <a:pPr marL="457200" lvl="1" indent="0">
-              <a:buNone/>
-            </a:pPr>
-            <a:r>
-              <a:rPr lang="en-US" dirty="0">
-                <a:solidFill>
-                  <a:srgbClr val="922B21"/>
-                </a:solidFill>
-              </a:rPr>
-              <a:t>Other    	11   	1  		237.3  		9.1%   	68.9% ❌</a:t>
-            </a:r>
-          </a:p>
-          <a:p>
             <a:endParaRPr lang="en-US" sz="2400" dirty="0"/>
           </a:p>
         </p:txBody>
       </p:sp>
+      <p:graphicFrame>
+        <p:nvGraphicFramePr>
+          <p:cNvPr id="5" name="Table 4">
+            <a:extLst>
+              <a:ext uri="{FF2B5EF4-FFF2-40B4-BE49-F238E27FC236}">
+                <a16:creationId xmlns:a16="http://schemas.microsoft.com/office/drawing/2014/main" id="{1139060A-91A2-8F7B-3E34-7FE281D27BD0}"/>
+              </a:ext>
+            </a:extLst>
+          </p:cNvPr>
+          <p:cNvGraphicFramePr>
+            <a:graphicFrameLocks noGrp="1"/>
+          </p:cNvGraphicFramePr>
+          <p:nvPr>
+            <p:extLst>
+              <p:ext uri="{D42A27DB-BD31-4B8C-83A1-F6EECF244321}">
+                <p14:modId xmlns:p14="http://schemas.microsoft.com/office/powerpoint/2010/main" val="4174116399"/>
+              </p:ext>
+            </p:extLst>
+          </p:nvPr>
+        </p:nvGraphicFramePr>
+        <p:xfrm>
+          <a:off x="969808" y="1718110"/>
+          <a:ext cx="10241117" cy="3566160"/>
+        </p:xfrm>
+        <a:graphic>
+          <a:graphicData uri="http://schemas.openxmlformats.org/drawingml/2006/table">
+            <a:tbl>
+              <a:tblPr firstRow="1" bandRow="1">
+                <a:tableStyleId>{5C22544A-7EE6-4342-B048-85BDC9FD1C3A}</a:tableStyleId>
+              </a:tblPr>
+              <a:tblGrid>
+                <a:gridCol w="1883478">
+                  <a:extLst>
+                    <a:ext uri="{9D8B030D-6E8A-4147-A177-3AD203B41FA5}">
+                      <a16:colId xmlns:a16="http://schemas.microsoft.com/office/drawing/2014/main" val="772587959"/>
+                    </a:ext>
+                  </a:extLst>
+                </a:gridCol>
+                <a:gridCol w="1519872">
+                  <a:extLst>
+                    <a:ext uri="{9D8B030D-6E8A-4147-A177-3AD203B41FA5}">
+                      <a16:colId xmlns:a16="http://schemas.microsoft.com/office/drawing/2014/main" val="1333839601"/>
+                    </a:ext>
+                  </a:extLst>
+                </a:gridCol>
+                <a:gridCol w="1582750">
+                  <a:extLst>
+                    <a:ext uri="{9D8B030D-6E8A-4147-A177-3AD203B41FA5}">
+                      <a16:colId xmlns:a16="http://schemas.microsoft.com/office/drawing/2014/main" val="2467871587"/>
+                    </a:ext>
+                  </a:extLst>
+                </a:gridCol>
+                <a:gridCol w="1716743">
+                  <a:extLst>
+                    <a:ext uri="{9D8B030D-6E8A-4147-A177-3AD203B41FA5}">
+                      <a16:colId xmlns:a16="http://schemas.microsoft.com/office/drawing/2014/main" val="2117588414"/>
+                    </a:ext>
+                  </a:extLst>
+                </a:gridCol>
+                <a:gridCol w="1461032">
+                  <a:extLst>
+                    <a:ext uri="{9D8B030D-6E8A-4147-A177-3AD203B41FA5}">
+                      <a16:colId xmlns:a16="http://schemas.microsoft.com/office/drawing/2014/main" val="532067782"/>
+                    </a:ext>
+                  </a:extLst>
+                </a:gridCol>
+                <a:gridCol w="2077242">
+                  <a:extLst>
+                    <a:ext uri="{9D8B030D-6E8A-4147-A177-3AD203B41FA5}">
+                      <a16:colId xmlns:a16="http://schemas.microsoft.com/office/drawing/2014/main" val="1472557716"/>
+                    </a:ext>
+                  </a:extLst>
+                </a:gridCol>
+              </a:tblGrid>
+              <a:tr h="241000">
+                <a:tc>
+                  <a:txBody>
+                    <a:bodyPr/>
+                    <a:lstStyle/>
+                    <a:p>
+                      <a:r>
+                        <a:rPr lang="en-US" sz="2000" dirty="0"/>
+                        <a:t>Subgroup</a:t>
+                      </a:r>
+                    </a:p>
+                  </a:txBody>
+                  <a:tcPr>
+                    <a:lnL w="12700" cmpd="sng">
+                      <a:noFill/>
+                    </a:lnL>
+                    <a:lnR w="9525" cap="flat" cmpd="sng" algn="ctr">
+                      <a:solidFill>
+                        <a:schemeClr val="bg1"/>
+                      </a:solidFill>
+                      <a:prstDash val="solid"/>
+                      <a:round/>
+                      <a:headEnd type="none" w="med" len="med"/>
+                      <a:tailEnd type="none" w="med" len="med"/>
+                    </a:lnR>
+                    <a:lnT w="12700" cmpd="sng">
+                      <a:noFill/>
+                    </a:lnT>
+                    <a:lnB w="9525" cap="flat" cmpd="sng" algn="ctr">
+                      <a:solidFill>
+                        <a:schemeClr val="bg1"/>
+                      </a:solidFill>
+                      <a:prstDash val="solid"/>
+                      <a:round/>
+                      <a:headEnd type="none" w="med" len="med"/>
+                      <a:tailEnd type="none" w="med" len="med"/>
+                    </a:lnB>
+                    <a:lnTlToBr w="12700" cmpd="sng">
+                      <a:noFill/>
+                      <a:prstDash val="solid"/>
+                    </a:lnTlToBr>
+                    <a:lnBlToTr w="12700" cmpd="sng">
+                      <a:noFill/>
+                      <a:prstDash val="solid"/>
+                    </a:lnBlToTr>
+                    <a:solidFill>
+                      <a:schemeClr val="accent1">
+                        <a:lumMod val="75000"/>
+                      </a:schemeClr>
+                    </a:solidFill>
+                  </a:tcPr>
+                </a:tc>
+                <a:tc>
+                  <a:txBody>
+                    <a:bodyPr/>
+                    <a:lstStyle/>
+                    <a:p>
+                      <a:pPr algn="ctr"/>
+                      <a:r>
+                        <a:rPr lang="en-US" sz="2000" dirty="0"/>
+                        <a:t>Enrollment</a:t>
+                      </a:r>
+                    </a:p>
+                  </a:txBody>
+                  <a:tcPr>
+                    <a:lnL w="9525" cap="flat" cmpd="sng" algn="ctr">
+                      <a:solidFill>
+                        <a:schemeClr val="bg1"/>
+                      </a:solidFill>
+                      <a:prstDash val="solid"/>
+                      <a:round/>
+                      <a:headEnd type="none" w="med" len="med"/>
+                      <a:tailEnd type="none" w="med" len="med"/>
+                    </a:lnL>
+                    <a:lnR w="9525" cap="flat" cmpd="sng" algn="ctr">
+                      <a:solidFill>
+                        <a:schemeClr val="bg1"/>
+                      </a:solidFill>
+                      <a:prstDash val="solid"/>
+                      <a:round/>
+                      <a:headEnd type="none" w="med" len="med"/>
+                      <a:tailEnd type="none" w="med" len="med"/>
+                    </a:lnR>
+                    <a:lnT w="12700" cmpd="sng">
+                      <a:noFill/>
+                    </a:lnT>
+                    <a:lnB w="9525" cap="flat" cmpd="sng" algn="ctr">
+                      <a:solidFill>
+                        <a:schemeClr val="bg1"/>
+                      </a:solidFill>
+                      <a:prstDash val="solid"/>
+                      <a:round/>
+                      <a:headEnd type="none" w="med" len="med"/>
+                      <a:tailEnd type="none" w="med" len="med"/>
+                    </a:lnB>
+                    <a:lnTlToBr w="12700" cmpd="sng">
+                      <a:noFill/>
+                      <a:prstDash val="solid"/>
+                    </a:lnTlToBr>
+                    <a:lnBlToTr w="12700" cmpd="sng">
+                      <a:noFill/>
+                      <a:prstDash val="solid"/>
+                    </a:lnBlToTr>
+                    <a:solidFill>
+                      <a:schemeClr val="accent1">
+                        <a:lumMod val="75000"/>
+                      </a:schemeClr>
+                    </a:solidFill>
+                  </a:tcPr>
+                </a:tc>
+                <a:tc>
+                  <a:txBody>
+                    <a:bodyPr/>
+                    <a:lstStyle/>
+                    <a:p>
+                      <a:pPr algn="ctr"/>
+                      <a:r>
+                        <a:rPr lang="en-US" sz="2000" dirty="0"/>
+                        <a:t>Events</a:t>
+                      </a:r>
+                    </a:p>
+                  </a:txBody>
+                  <a:tcPr>
+                    <a:lnL w="9525" cap="flat" cmpd="sng" algn="ctr">
+                      <a:solidFill>
+                        <a:schemeClr val="bg1"/>
+                      </a:solidFill>
+                      <a:prstDash val="solid"/>
+                      <a:round/>
+                      <a:headEnd type="none" w="med" len="med"/>
+                      <a:tailEnd type="none" w="med" len="med"/>
+                    </a:lnL>
+                    <a:lnR w="9525" cap="flat" cmpd="sng" algn="ctr">
+                      <a:solidFill>
+                        <a:schemeClr val="bg1"/>
+                      </a:solidFill>
+                      <a:prstDash val="solid"/>
+                      <a:round/>
+                      <a:headEnd type="none" w="med" len="med"/>
+                      <a:tailEnd type="none" w="med" len="med"/>
+                    </a:lnR>
+                    <a:lnT w="12700" cmpd="sng">
+                      <a:noFill/>
+                    </a:lnT>
+                    <a:lnB w="9525" cap="flat" cmpd="sng" algn="ctr">
+                      <a:solidFill>
+                        <a:schemeClr val="bg1"/>
+                      </a:solidFill>
+                      <a:prstDash val="solid"/>
+                      <a:round/>
+                      <a:headEnd type="none" w="med" len="med"/>
+                      <a:tailEnd type="none" w="med" len="med"/>
+                    </a:lnB>
+                    <a:lnTlToBr w="12700" cmpd="sng">
+                      <a:noFill/>
+                      <a:prstDash val="solid"/>
+                    </a:lnTlToBr>
+                    <a:lnBlToTr w="12700" cmpd="sng">
+                      <a:noFill/>
+                      <a:prstDash val="solid"/>
+                    </a:lnBlToTr>
+                    <a:solidFill>
+                      <a:schemeClr val="accent1">
+                        <a:lumMod val="75000"/>
+                      </a:schemeClr>
+                    </a:solidFill>
+                  </a:tcPr>
+                </a:tc>
+                <a:tc>
+                  <a:txBody>
+                    <a:bodyPr/>
+                    <a:lstStyle/>
+                    <a:p>
+                      <a:pPr algn="ctr"/>
+                      <a:r>
+                        <a:rPr lang="en-US" sz="2000" dirty="0"/>
+                        <a:t>Observed HR</a:t>
+                      </a:r>
+                    </a:p>
+                  </a:txBody>
+                  <a:tcPr>
+                    <a:lnL w="9525" cap="flat" cmpd="sng" algn="ctr">
+                      <a:solidFill>
+                        <a:schemeClr val="bg1"/>
+                      </a:solidFill>
+                      <a:prstDash val="solid"/>
+                      <a:round/>
+                      <a:headEnd type="none" w="med" len="med"/>
+                      <a:tailEnd type="none" w="med" len="med"/>
+                    </a:lnL>
+                    <a:lnR w="9525" cap="flat" cmpd="sng" algn="ctr">
+                      <a:solidFill>
+                        <a:schemeClr val="bg1"/>
+                      </a:solidFill>
+                      <a:prstDash val="solid"/>
+                      <a:round/>
+                      <a:headEnd type="none" w="med" len="med"/>
+                      <a:tailEnd type="none" w="med" len="med"/>
+                    </a:lnR>
+                    <a:lnT w="12700" cmpd="sng">
+                      <a:noFill/>
+                    </a:lnT>
+                    <a:lnB w="9525" cap="flat" cmpd="sng" algn="ctr">
+                      <a:solidFill>
+                        <a:schemeClr val="bg1"/>
+                      </a:solidFill>
+                      <a:prstDash val="solid"/>
+                      <a:round/>
+                      <a:headEnd type="none" w="med" len="med"/>
+                      <a:tailEnd type="none" w="med" len="med"/>
+                    </a:lnB>
+                    <a:lnTlToBr w="12700" cmpd="sng">
+                      <a:noFill/>
+                      <a:prstDash val="solid"/>
+                    </a:lnTlToBr>
+                    <a:lnBlToTr w="12700" cmpd="sng">
+                      <a:noFill/>
+                      <a:prstDash val="solid"/>
+                    </a:lnBlToTr>
+                    <a:solidFill>
+                      <a:schemeClr val="accent1">
+                        <a:lumMod val="75000"/>
+                      </a:schemeClr>
+                    </a:solidFill>
+                  </a:tcPr>
+                </a:tc>
+                <a:tc>
+                  <a:txBody>
+                    <a:bodyPr/>
+                    <a:lstStyle/>
+                    <a:p>
+                      <a:pPr algn="ctr"/>
+                      <a:r>
+                        <a:rPr lang="en-US" sz="2000" dirty="0"/>
+                        <a:t>Event Rate</a:t>
+                      </a:r>
+                    </a:p>
+                  </a:txBody>
+                  <a:tcPr>
+                    <a:lnL w="9525" cap="flat" cmpd="sng" algn="ctr">
+                      <a:solidFill>
+                        <a:schemeClr val="bg1"/>
+                      </a:solidFill>
+                      <a:prstDash val="solid"/>
+                      <a:round/>
+                      <a:headEnd type="none" w="med" len="med"/>
+                      <a:tailEnd type="none" w="med" len="med"/>
+                    </a:lnL>
+                    <a:lnR w="9525" cap="flat" cmpd="sng" algn="ctr">
+                      <a:solidFill>
+                        <a:schemeClr val="bg1"/>
+                      </a:solidFill>
+                      <a:prstDash val="solid"/>
+                      <a:round/>
+                      <a:headEnd type="none" w="med" len="med"/>
+                      <a:tailEnd type="none" w="med" len="med"/>
+                    </a:lnR>
+                    <a:lnT w="12700" cmpd="sng">
+                      <a:noFill/>
+                    </a:lnT>
+                    <a:lnB w="9525" cap="flat" cmpd="sng" algn="ctr">
+                      <a:solidFill>
+                        <a:schemeClr val="bg1"/>
+                      </a:solidFill>
+                      <a:prstDash val="solid"/>
+                      <a:round/>
+                      <a:headEnd type="none" w="med" len="med"/>
+                      <a:tailEnd type="none" w="med" len="med"/>
+                    </a:lnB>
+                    <a:lnTlToBr w="12700" cmpd="sng">
+                      <a:noFill/>
+                      <a:prstDash val="solid"/>
+                    </a:lnTlToBr>
+                    <a:lnBlToTr w="12700" cmpd="sng">
+                      <a:noFill/>
+                      <a:prstDash val="solid"/>
+                    </a:lnBlToTr>
+                    <a:solidFill>
+                      <a:schemeClr val="accent1">
+                        <a:lumMod val="75000"/>
+                      </a:schemeClr>
+                    </a:solidFill>
+                  </a:tcPr>
+                </a:tc>
+                <a:tc>
+                  <a:txBody>
+                    <a:bodyPr/>
+                    <a:lstStyle/>
+                    <a:p>
+                      <a:pPr algn="ctr"/>
+                      <a:r>
+                        <a:rPr lang="en-US" sz="2000" dirty="0"/>
+                        <a:t>Observed Power</a:t>
+                      </a:r>
+                    </a:p>
+                  </a:txBody>
+                  <a:tcPr>
+                    <a:lnL w="9525" cap="flat" cmpd="sng" algn="ctr">
+                      <a:solidFill>
+                        <a:schemeClr val="bg1"/>
+                      </a:solidFill>
+                      <a:prstDash val="solid"/>
+                      <a:round/>
+                      <a:headEnd type="none" w="med" len="med"/>
+                      <a:tailEnd type="none" w="med" len="med"/>
+                    </a:lnL>
+                    <a:lnR w="12700" cmpd="sng">
+                      <a:noFill/>
+                    </a:lnR>
+                    <a:lnT w="12700" cmpd="sng">
+                      <a:noFill/>
+                    </a:lnT>
+                    <a:lnB w="9525" cap="flat" cmpd="sng" algn="ctr">
+                      <a:solidFill>
+                        <a:schemeClr val="bg1"/>
+                      </a:solidFill>
+                      <a:prstDash val="solid"/>
+                      <a:round/>
+                      <a:headEnd type="none" w="med" len="med"/>
+                      <a:tailEnd type="none" w="med" len="med"/>
+                    </a:lnB>
+                    <a:lnTlToBr w="12700" cmpd="sng">
+                      <a:noFill/>
+                      <a:prstDash val="solid"/>
+                    </a:lnTlToBr>
+                    <a:lnBlToTr w="12700" cmpd="sng">
+                      <a:noFill/>
+                      <a:prstDash val="solid"/>
+                    </a:lnBlToTr>
+                    <a:solidFill>
+                      <a:schemeClr val="accent1">
+                        <a:lumMod val="75000"/>
+                      </a:schemeClr>
+                    </a:solidFill>
+                  </a:tcPr>
+                </a:tc>
+                <a:extLst>
+                  <a:ext uri="{0D108BD9-81ED-4DB2-BD59-A6C34878D82A}">
+                    <a16:rowId xmlns:a16="http://schemas.microsoft.com/office/drawing/2014/main" val="303315955"/>
+                  </a:ext>
+                </a:extLst>
+              </a:tr>
+              <a:tr h="241000">
+                <a:tc>
+                  <a:txBody>
+                    <a:bodyPr/>
+                    <a:lstStyle/>
+                    <a:p>
+                      <a:r>
+                        <a:rPr lang="en-US" sz="2000" dirty="0"/>
+                        <a:t>Overall</a:t>
+                      </a:r>
+                    </a:p>
+                  </a:txBody>
+                  <a:tcPr>
+                    <a:lnL w="12700" cmpd="sng">
+                      <a:noFill/>
+                    </a:lnL>
+                    <a:lnR w="9525" cap="flat" cmpd="sng" algn="ctr">
+                      <a:solidFill>
+                        <a:schemeClr val="bg1"/>
+                      </a:solidFill>
+                      <a:prstDash val="solid"/>
+                      <a:round/>
+                      <a:headEnd type="none" w="med" len="med"/>
+                      <a:tailEnd type="none" w="med" len="med"/>
+                    </a:lnR>
+                    <a:lnT w="9525" cap="flat" cmpd="sng" algn="ctr">
+                      <a:solidFill>
+                        <a:schemeClr val="bg1"/>
+                      </a:solidFill>
+                      <a:prstDash val="solid"/>
+                      <a:round/>
+                      <a:headEnd type="none" w="med" len="med"/>
+                      <a:tailEnd type="none" w="med" len="med"/>
+                    </a:lnT>
+                    <a:lnB w="9525" cap="flat" cmpd="sng" algn="ctr">
+                      <a:solidFill>
+                        <a:schemeClr val="bg1"/>
+                      </a:solidFill>
+                      <a:prstDash val="solid"/>
+                      <a:round/>
+                      <a:headEnd type="none" w="med" len="med"/>
+                      <a:tailEnd type="none" w="med" len="med"/>
+                    </a:lnB>
+                    <a:lnTlToBr w="12700" cmpd="sng">
+                      <a:noFill/>
+                      <a:prstDash val="solid"/>
+                    </a:lnTlToBr>
+                    <a:lnBlToTr w="12700" cmpd="sng">
+                      <a:noFill/>
+                      <a:prstDash val="solid"/>
+                    </a:lnBlToTr>
+                  </a:tcPr>
+                </a:tc>
+                <a:tc>
+                  <a:txBody>
+                    <a:bodyPr/>
+                    <a:lstStyle/>
+                    <a:p>
+                      <a:pPr algn="ctr"/>
+                      <a:r>
+                        <a:rPr lang="en-US" sz="2000" dirty="0"/>
+                        <a:t>1151</a:t>
+                      </a:r>
+                    </a:p>
+                  </a:txBody>
+                  <a:tcPr>
+                    <a:lnL w="9525" cap="flat" cmpd="sng" algn="ctr">
+                      <a:solidFill>
+                        <a:schemeClr val="bg1"/>
+                      </a:solidFill>
+                      <a:prstDash val="solid"/>
+                      <a:round/>
+                      <a:headEnd type="none" w="med" len="med"/>
+                      <a:tailEnd type="none" w="med" len="med"/>
+                    </a:lnL>
+                    <a:lnR w="9525" cap="flat" cmpd="sng" algn="ctr">
+                      <a:solidFill>
+                        <a:schemeClr val="bg1"/>
+                      </a:solidFill>
+                      <a:prstDash val="solid"/>
+                      <a:round/>
+                      <a:headEnd type="none" w="med" len="med"/>
+                      <a:tailEnd type="none" w="med" len="med"/>
+                    </a:lnR>
+                    <a:lnT w="9525" cap="flat" cmpd="sng" algn="ctr">
+                      <a:solidFill>
+                        <a:schemeClr val="bg1"/>
+                      </a:solidFill>
+                      <a:prstDash val="solid"/>
+                      <a:round/>
+                      <a:headEnd type="none" w="med" len="med"/>
+                      <a:tailEnd type="none" w="med" len="med"/>
+                    </a:lnT>
+                    <a:lnB w="9525" cap="flat" cmpd="sng" algn="ctr">
+                      <a:solidFill>
+                        <a:schemeClr val="bg1"/>
+                      </a:solidFill>
+                      <a:prstDash val="solid"/>
+                      <a:round/>
+                      <a:headEnd type="none" w="med" len="med"/>
+                      <a:tailEnd type="none" w="med" len="med"/>
+                    </a:lnB>
+                    <a:lnTlToBr w="12700" cmpd="sng">
+                      <a:noFill/>
+                      <a:prstDash val="solid"/>
+                    </a:lnTlToBr>
+                    <a:lnBlToTr w="12700" cmpd="sng">
+                      <a:noFill/>
+                      <a:prstDash val="solid"/>
+                    </a:lnBlToTr>
+                  </a:tcPr>
+                </a:tc>
+                <a:tc>
+                  <a:txBody>
+                    <a:bodyPr/>
+                    <a:lstStyle/>
+                    <a:p>
+                      <a:pPr algn="ctr"/>
+                      <a:r>
+                        <a:rPr lang="en-US" sz="2000" dirty="0"/>
+                        <a:t>96</a:t>
+                      </a:r>
+                    </a:p>
+                  </a:txBody>
+                  <a:tcPr>
+                    <a:lnL w="9525" cap="flat" cmpd="sng" algn="ctr">
+                      <a:solidFill>
+                        <a:schemeClr val="bg1"/>
+                      </a:solidFill>
+                      <a:prstDash val="solid"/>
+                      <a:round/>
+                      <a:headEnd type="none" w="med" len="med"/>
+                      <a:tailEnd type="none" w="med" len="med"/>
+                    </a:lnL>
+                    <a:lnR w="9525" cap="flat" cmpd="sng" algn="ctr">
+                      <a:solidFill>
+                        <a:schemeClr val="bg1"/>
+                      </a:solidFill>
+                      <a:prstDash val="solid"/>
+                      <a:round/>
+                      <a:headEnd type="none" w="med" len="med"/>
+                      <a:tailEnd type="none" w="med" len="med"/>
+                    </a:lnR>
+                    <a:lnT w="9525" cap="flat" cmpd="sng" algn="ctr">
+                      <a:solidFill>
+                        <a:schemeClr val="bg1"/>
+                      </a:solidFill>
+                      <a:prstDash val="solid"/>
+                      <a:round/>
+                      <a:headEnd type="none" w="med" len="med"/>
+                      <a:tailEnd type="none" w="med" len="med"/>
+                    </a:lnT>
+                    <a:lnB w="9525" cap="flat" cmpd="sng" algn="ctr">
+                      <a:solidFill>
+                        <a:schemeClr val="bg1"/>
+                      </a:solidFill>
+                      <a:prstDash val="solid"/>
+                      <a:round/>
+                      <a:headEnd type="none" w="med" len="med"/>
+                      <a:tailEnd type="none" w="med" len="med"/>
+                    </a:lnB>
+                    <a:lnTlToBr w="12700" cmpd="sng">
+                      <a:noFill/>
+                      <a:prstDash val="solid"/>
+                    </a:lnTlToBr>
+                    <a:lnBlToTr w="12700" cmpd="sng">
+                      <a:noFill/>
+                      <a:prstDash val="solid"/>
+                    </a:lnBlToTr>
+                  </a:tcPr>
+                </a:tc>
+                <a:tc>
+                  <a:txBody>
+                    <a:bodyPr/>
+                    <a:lstStyle/>
+                    <a:p>
+                      <a:pPr algn="ctr"/>
+                      <a:r>
+                        <a:rPr lang="en-US" sz="2000" dirty="0"/>
+                        <a:t>0.517</a:t>
+                      </a:r>
+                    </a:p>
+                  </a:txBody>
+                  <a:tcPr>
+                    <a:lnL w="9525" cap="flat" cmpd="sng" algn="ctr">
+                      <a:solidFill>
+                        <a:schemeClr val="bg1"/>
+                      </a:solidFill>
+                      <a:prstDash val="solid"/>
+                      <a:round/>
+                      <a:headEnd type="none" w="med" len="med"/>
+                      <a:tailEnd type="none" w="med" len="med"/>
+                    </a:lnL>
+                    <a:lnR w="9525" cap="flat" cmpd="sng" algn="ctr">
+                      <a:solidFill>
+                        <a:schemeClr val="bg1"/>
+                      </a:solidFill>
+                      <a:prstDash val="solid"/>
+                      <a:round/>
+                      <a:headEnd type="none" w="med" len="med"/>
+                      <a:tailEnd type="none" w="med" len="med"/>
+                    </a:lnR>
+                    <a:lnT w="9525" cap="flat" cmpd="sng" algn="ctr">
+                      <a:solidFill>
+                        <a:schemeClr val="bg1"/>
+                      </a:solidFill>
+                      <a:prstDash val="solid"/>
+                      <a:round/>
+                      <a:headEnd type="none" w="med" len="med"/>
+                      <a:tailEnd type="none" w="med" len="med"/>
+                    </a:lnT>
+                    <a:lnB w="9525" cap="flat" cmpd="sng" algn="ctr">
+                      <a:solidFill>
+                        <a:schemeClr val="bg1"/>
+                      </a:solidFill>
+                      <a:prstDash val="solid"/>
+                      <a:round/>
+                      <a:headEnd type="none" w="med" len="med"/>
+                      <a:tailEnd type="none" w="med" len="med"/>
+                    </a:lnB>
+                    <a:lnTlToBr w="12700" cmpd="sng">
+                      <a:noFill/>
+                      <a:prstDash val="solid"/>
+                    </a:lnTlToBr>
+                    <a:lnBlToTr w="12700" cmpd="sng">
+                      <a:noFill/>
+                      <a:prstDash val="solid"/>
+                    </a:lnBlToTr>
+                  </a:tcPr>
+                </a:tc>
+                <a:tc>
+                  <a:txBody>
+                    <a:bodyPr/>
+                    <a:lstStyle/>
+                    <a:p>
+                      <a:pPr algn="ctr"/>
+                      <a:r>
+                        <a:rPr lang="en-US" sz="2000" dirty="0"/>
+                        <a:t>8.3%</a:t>
+                      </a:r>
+                    </a:p>
+                  </a:txBody>
+                  <a:tcPr>
+                    <a:lnL w="9525" cap="flat" cmpd="sng" algn="ctr">
+                      <a:solidFill>
+                        <a:schemeClr val="bg1"/>
+                      </a:solidFill>
+                      <a:prstDash val="solid"/>
+                      <a:round/>
+                      <a:headEnd type="none" w="med" len="med"/>
+                      <a:tailEnd type="none" w="med" len="med"/>
+                    </a:lnL>
+                    <a:lnR w="9525" cap="flat" cmpd="sng" algn="ctr">
+                      <a:solidFill>
+                        <a:schemeClr val="bg1"/>
+                      </a:solidFill>
+                      <a:prstDash val="solid"/>
+                      <a:round/>
+                      <a:headEnd type="none" w="med" len="med"/>
+                      <a:tailEnd type="none" w="med" len="med"/>
+                    </a:lnR>
+                    <a:lnT w="9525" cap="flat" cmpd="sng" algn="ctr">
+                      <a:solidFill>
+                        <a:schemeClr val="bg1"/>
+                      </a:solidFill>
+                      <a:prstDash val="solid"/>
+                      <a:round/>
+                      <a:headEnd type="none" w="med" len="med"/>
+                      <a:tailEnd type="none" w="med" len="med"/>
+                    </a:lnT>
+                    <a:lnB w="9525" cap="flat" cmpd="sng" algn="ctr">
+                      <a:solidFill>
+                        <a:schemeClr val="bg1"/>
+                      </a:solidFill>
+                      <a:prstDash val="solid"/>
+                      <a:round/>
+                      <a:headEnd type="none" w="med" len="med"/>
+                      <a:tailEnd type="none" w="med" len="med"/>
+                    </a:lnB>
+                    <a:lnTlToBr w="12700" cmpd="sng">
+                      <a:noFill/>
+                      <a:prstDash val="solid"/>
+                    </a:lnTlToBr>
+                    <a:lnBlToTr w="12700" cmpd="sng">
+                      <a:noFill/>
+                      <a:prstDash val="solid"/>
+                    </a:lnBlToTr>
+                  </a:tcPr>
+                </a:tc>
+                <a:tc>
+                  <a:txBody>
+                    <a:bodyPr/>
+                    <a:lstStyle/>
+                    <a:p>
+                      <a:pPr algn="ctr"/>
+                      <a:r>
+                        <a:rPr lang="en-US" sz="2000" dirty="0">
+                          <a:solidFill>
+                            <a:srgbClr val="00B050"/>
+                          </a:solidFill>
+                        </a:rPr>
+                        <a:t>84.9%</a:t>
+                      </a:r>
+                    </a:p>
+                  </a:txBody>
+                  <a:tcPr>
+                    <a:lnL w="9525" cap="flat" cmpd="sng" algn="ctr">
+                      <a:solidFill>
+                        <a:schemeClr val="bg1"/>
+                      </a:solidFill>
+                      <a:prstDash val="solid"/>
+                      <a:round/>
+                      <a:headEnd type="none" w="med" len="med"/>
+                      <a:tailEnd type="none" w="med" len="med"/>
+                    </a:lnL>
+                    <a:lnR w="12700" cmpd="sng">
+                      <a:noFill/>
+                    </a:lnR>
+                    <a:lnT w="9525" cap="flat" cmpd="sng" algn="ctr">
+                      <a:solidFill>
+                        <a:schemeClr val="bg1"/>
+                      </a:solidFill>
+                      <a:prstDash val="solid"/>
+                      <a:round/>
+                      <a:headEnd type="none" w="med" len="med"/>
+                      <a:tailEnd type="none" w="med" len="med"/>
+                    </a:lnT>
+                    <a:lnB w="9525" cap="flat" cmpd="sng" algn="ctr">
+                      <a:solidFill>
+                        <a:schemeClr val="bg1"/>
+                      </a:solidFill>
+                      <a:prstDash val="solid"/>
+                      <a:round/>
+                      <a:headEnd type="none" w="med" len="med"/>
+                      <a:tailEnd type="none" w="med" len="med"/>
+                    </a:lnB>
+                    <a:lnTlToBr w="12700" cmpd="sng">
+                      <a:noFill/>
+                      <a:prstDash val="solid"/>
+                    </a:lnTlToBr>
+                    <a:lnBlToTr w="12700" cmpd="sng">
+                      <a:noFill/>
+                      <a:prstDash val="solid"/>
+                    </a:lnBlToTr>
+                  </a:tcPr>
+                </a:tc>
+                <a:extLst>
+                  <a:ext uri="{0D108BD9-81ED-4DB2-BD59-A6C34878D82A}">
+                    <a16:rowId xmlns:a16="http://schemas.microsoft.com/office/drawing/2014/main" val="1980096817"/>
+                  </a:ext>
+                </a:extLst>
+              </a:tr>
+              <a:tr h="241000">
+                <a:tc>
+                  <a:txBody>
+                    <a:bodyPr/>
+                    <a:lstStyle/>
+                    <a:p>
+                      <a:r>
+                        <a:rPr lang="en-US" sz="2000" dirty="0"/>
+                        <a:t>Female</a:t>
+                      </a:r>
+                    </a:p>
+                  </a:txBody>
+                  <a:tcPr>
+                    <a:lnL w="12700" cmpd="sng">
+                      <a:noFill/>
+                    </a:lnL>
+                    <a:lnR w="9525" cap="flat" cmpd="sng" algn="ctr">
+                      <a:solidFill>
+                        <a:schemeClr val="bg1"/>
+                      </a:solidFill>
+                      <a:prstDash val="solid"/>
+                      <a:round/>
+                      <a:headEnd type="none" w="med" len="med"/>
+                      <a:tailEnd type="none" w="med" len="med"/>
+                    </a:lnR>
+                    <a:lnT w="9525" cap="flat" cmpd="sng" algn="ctr">
+                      <a:solidFill>
+                        <a:schemeClr val="bg1"/>
+                      </a:solidFill>
+                      <a:prstDash val="solid"/>
+                      <a:round/>
+                      <a:headEnd type="none" w="med" len="med"/>
+                      <a:tailEnd type="none" w="med" len="med"/>
+                    </a:lnT>
+                    <a:lnB w="9525" cap="flat" cmpd="sng" algn="ctr">
+                      <a:solidFill>
+                        <a:schemeClr val="bg1"/>
+                      </a:solidFill>
+                      <a:prstDash val="solid"/>
+                      <a:round/>
+                      <a:headEnd type="none" w="med" len="med"/>
+                      <a:tailEnd type="none" w="med" len="med"/>
+                    </a:lnB>
+                    <a:lnTlToBr w="12700" cmpd="sng">
+                      <a:noFill/>
+                      <a:prstDash val="solid"/>
+                    </a:lnTlToBr>
+                    <a:lnBlToTr w="12700" cmpd="sng">
+                      <a:noFill/>
+                      <a:prstDash val="solid"/>
+                    </a:lnBlToTr>
+                  </a:tcPr>
+                </a:tc>
+                <a:tc>
+                  <a:txBody>
+                    <a:bodyPr/>
+                    <a:lstStyle/>
+                    <a:p>
+                      <a:pPr algn="ctr"/>
+                      <a:r>
+                        <a:rPr lang="en-US" sz="2000" dirty="0"/>
+                        <a:t>951</a:t>
+                      </a:r>
+                    </a:p>
+                  </a:txBody>
+                  <a:tcPr>
+                    <a:lnL w="9525" cap="flat" cmpd="sng" algn="ctr">
+                      <a:solidFill>
+                        <a:schemeClr val="bg1"/>
+                      </a:solidFill>
+                      <a:prstDash val="solid"/>
+                      <a:round/>
+                      <a:headEnd type="none" w="med" len="med"/>
+                      <a:tailEnd type="none" w="med" len="med"/>
+                    </a:lnL>
+                    <a:lnR w="9525" cap="flat" cmpd="sng" algn="ctr">
+                      <a:solidFill>
+                        <a:schemeClr val="bg1"/>
+                      </a:solidFill>
+                      <a:prstDash val="solid"/>
+                      <a:round/>
+                      <a:headEnd type="none" w="med" len="med"/>
+                      <a:tailEnd type="none" w="med" len="med"/>
+                    </a:lnR>
+                    <a:lnT w="9525" cap="flat" cmpd="sng" algn="ctr">
+                      <a:solidFill>
+                        <a:schemeClr val="bg1"/>
+                      </a:solidFill>
+                      <a:prstDash val="solid"/>
+                      <a:round/>
+                      <a:headEnd type="none" w="med" len="med"/>
+                      <a:tailEnd type="none" w="med" len="med"/>
+                    </a:lnT>
+                    <a:lnB w="9525" cap="flat" cmpd="sng" algn="ctr">
+                      <a:solidFill>
+                        <a:schemeClr val="bg1"/>
+                      </a:solidFill>
+                      <a:prstDash val="solid"/>
+                      <a:round/>
+                      <a:headEnd type="none" w="med" len="med"/>
+                      <a:tailEnd type="none" w="med" len="med"/>
+                    </a:lnB>
+                    <a:lnTlToBr w="12700" cmpd="sng">
+                      <a:noFill/>
+                      <a:prstDash val="solid"/>
+                    </a:lnTlToBr>
+                    <a:lnBlToTr w="12700" cmpd="sng">
+                      <a:noFill/>
+                      <a:prstDash val="solid"/>
+                    </a:lnBlToTr>
+                  </a:tcPr>
+                </a:tc>
+                <a:tc>
+                  <a:txBody>
+                    <a:bodyPr/>
+                    <a:lstStyle/>
+                    <a:p>
+                      <a:pPr algn="ctr"/>
+                      <a:r>
+                        <a:rPr lang="en-US" sz="2000" dirty="0"/>
+                        <a:t>81</a:t>
+                      </a:r>
+                    </a:p>
+                  </a:txBody>
+                  <a:tcPr>
+                    <a:lnL w="9525" cap="flat" cmpd="sng" algn="ctr">
+                      <a:solidFill>
+                        <a:schemeClr val="bg1"/>
+                      </a:solidFill>
+                      <a:prstDash val="solid"/>
+                      <a:round/>
+                      <a:headEnd type="none" w="med" len="med"/>
+                      <a:tailEnd type="none" w="med" len="med"/>
+                    </a:lnL>
+                    <a:lnR w="9525" cap="flat" cmpd="sng" algn="ctr">
+                      <a:solidFill>
+                        <a:schemeClr val="bg1"/>
+                      </a:solidFill>
+                      <a:prstDash val="solid"/>
+                      <a:round/>
+                      <a:headEnd type="none" w="med" len="med"/>
+                      <a:tailEnd type="none" w="med" len="med"/>
+                    </a:lnR>
+                    <a:lnT w="9525" cap="flat" cmpd="sng" algn="ctr">
+                      <a:solidFill>
+                        <a:schemeClr val="bg1"/>
+                      </a:solidFill>
+                      <a:prstDash val="solid"/>
+                      <a:round/>
+                      <a:headEnd type="none" w="med" len="med"/>
+                      <a:tailEnd type="none" w="med" len="med"/>
+                    </a:lnT>
+                    <a:lnB w="9525" cap="flat" cmpd="sng" algn="ctr">
+                      <a:solidFill>
+                        <a:schemeClr val="bg1"/>
+                      </a:solidFill>
+                      <a:prstDash val="solid"/>
+                      <a:round/>
+                      <a:headEnd type="none" w="med" len="med"/>
+                      <a:tailEnd type="none" w="med" len="med"/>
+                    </a:lnB>
+                    <a:lnTlToBr w="12700" cmpd="sng">
+                      <a:noFill/>
+                      <a:prstDash val="solid"/>
+                    </a:lnTlToBr>
+                    <a:lnBlToTr w="12700" cmpd="sng">
+                      <a:noFill/>
+                      <a:prstDash val="solid"/>
+                    </a:lnBlToTr>
+                  </a:tcPr>
+                </a:tc>
+                <a:tc>
+                  <a:txBody>
+                    <a:bodyPr/>
+                    <a:lstStyle/>
+                    <a:p>
+                      <a:pPr algn="ctr"/>
+                      <a:r>
+                        <a:rPr lang="en-US" sz="2000" dirty="0"/>
+                        <a:t>0.459</a:t>
+                      </a:r>
+                    </a:p>
+                  </a:txBody>
+                  <a:tcPr>
+                    <a:lnL w="9525" cap="flat" cmpd="sng" algn="ctr">
+                      <a:solidFill>
+                        <a:schemeClr val="bg1"/>
+                      </a:solidFill>
+                      <a:prstDash val="solid"/>
+                      <a:round/>
+                      <a:headEnd type="none" w="med" len="med"/>
+                      <a:tailEnd type="none" w="med" len="med"/>
+                    </a:lnL>
+                    <a:lnR w="9525" cap="flat" cmpd="sng" algn="ctr">
+                      <a:solidFill>
+                        <a:schemeClr val="bg1"/>
+                      </a:solidFill>
+                      <a:prstDash val="solid"/>
+                      <a:round/>
+                      <a:headEnd type="none" w="med" len="med"/>
+                      <a:tailEnd type="none" w="med" len="med"/>
+                    </a:lnR>
+                    <a:lnT w="9525" cap="flat" cmpd="sng" algn="ctr">
+                      <a:solidFill>
+                        <a:schemeClr val="bg1"/>
+                      </a:solidFill>
+                      <a:prstDash val="solid"/>
+                      <a:round/>
+                      <a:headEnd type="none" w="med" len="med"/>
+                      <a:tailEnd type="none" w="med" len="med"/>
+                    </a:lnT>
+                    <a:lnB w="9525" cap="flat" cmpd="sng" algn="ctr">
+                      <a:solidFill>
+                        <a:schemeClr val="bg1"/>
+                      </a:solidFill>
+                      <a:prstDash val="solid"/>
+                      <a:round/>
+                      <a:headEnd type="none" w="med" len="med"/>
+                      <a:tailEnd type="none" w="med" len="med"/>
+                    </a:lnB>
+                    <a:lnTlToBr w="12700" cmpd="sng">
+                      <a:noFill/>
+                      <a:prstDash val="solid"/>
+                    </a:lnTlToBr>
+                    <a:lnBlToTr w="12700" cmpd="sng">
+                      <a:noFill/>
+                      <a:prstDash val="solid"/>
+                    </a:lnBlToTr>
+                  </a:tcPr>
+                </a:tc>
+                <a:tc>
+                  <a:txBody>
+                    <a:bodyPr/>
+                    <a:lstStyle/>
+                    <a:p>
+                      <a:pPr algn="ctr"/>
+                      <a:r>
+                        <a:rPr lang="en-US" sz="2000" dirty="0"/>
+                        <a:t>8.5%</a:t>
+                      </a:r>
+                    </a:p>
+                  </a:txBody>
+                  <a:tcPr>
+                    <a:lnL w="9525" cap="flat" cmpd="sng" algn="ctr">
+                      <a:solidFill>
+                        <a:schemeClr val="bg1"/>
+                      </a:solidFill>
+                      <a:prstDash val="solid"/>
+                      <a:round/>
+                      <a:headEnd type="none" w="med" len="med"/>
+                      <a:tailEnd type="none" w="med" len="med"/>
+                    </a:lnL>
+                    <a:lnR w="9525" cap="flat" cmpd="sng" algn="ctr">
+                      <a:solidFill>
+                        <a:schemeClr val="bg1"/>
+                      </a:solidFill>
+                      <a:prstDash val="solid"/>
+                      <a:round/>
+                      <a:headEnd type="none" w="med" len="med"/>
+                      <a:tailEnd type="none" w="med" len="med"/>
+                    </a:lnR>
+                    <a:lnT w="9525" cap="flat" cmpd="sng" algn="ctr">
+                      <a:solidFill>
+                        <a:schemeClr val="bg1"/>
+                      </a:solidFill>
+                      <a:prstDash val="solid"/>
+                      <a:round/>
+                      <a:headEnd type="none" w="med" len="med"/>
+                      <a:tailEnd type="none" w="med" len="med"/>
+                    </a:lnT>
+                    <a:lnB w="9525" cap="flat" cmpd="sng" algn="ctr">
+                      <a:solidFill>
+                        <a:schemeClr val="bg1"/>
+                      </a:solidFill>
+                      <a:prstDash val="solid"/>
+                      <a:round/>
+                      <a:headEnd type="none" w="med" len="med"/>
+                      <a:tailEnd type="none" w="med" len="med"/>
+                    </a:lnB>
+                    <a:lnTlToBr w="12700" cmpd="sng">
+                      <a:noFill/>
+                      <a:prstDash val="solid"/>
+                    </a:lnTlToBr>
+                    <a:lnBlToTr w="12700" cmpd="sng">
+                      <a:noFill/>
+                      <a:prstDash val="solid"/>
+                    </a:lnBlToTr>
+                  </a:tcPr>
+                </a:tc>
+                <a:tc>
+                  <a:txBody>
+                    <a:bodyPr/>
+                    <a:lstStyle/>
+                    <a:p>
+                      <a:pPr algn="ctr"/>
+                      <a:r>
+                        <a:rPr lang="en-US" sz="2000" dirty="0">
+                          <a:solidFill>
+                            <a:srgbClr val="00B050"/>
+                          </a:solidFill>
+                        </a:rPr>
+                        <a:t>89.7%</a:t>
+                      </a:r>
+                    </a:p>
+                  </a:txBody>
+                  <a:tcPr>
+                    <a:lnL w="9525" cap="flat" cmpd="sng" algn="ctr">
+                      <a:solidFill>
+                        <a:schemeClr val="bg1"/>
+                      </a:solidFill>
+                      <a:prstDash val="solid"/>
+                      <a:round/>
+                      <a:headEnd type="none" w="med" len="med"/>
+                      <a:tailEnd type="none" w="med" len="med"/>
+                    </a:lnL>
+                    <a:lnR w="12700" cmpd="sng">
+                      <a:noFill/>
+                    </a:lnR>
+                    <a:lnT w="9525" cap="flat" cmpd="sng" algn="ctr">
+                      <a:solidFill>
+                        <a:schemeClr val="bg1"/>
+                      </a:solidFill>
+                      <a:prstDash val="solid"/>
+                      <a:round/>
+                      <a:headEnd type="none" w="med" len="med"/>
+                      <a:tailEnd type="none" w="med" len="med"/>
+                    </a:lnT>
+                    <a:lnB w="9525" cap="flat" cmpd="sng" algn="ctr">
+                      <a:solidFill>
+                        <a:schemeClr val="bg1"/>
+                      </a:solidFill>
+                      <a:prstDash val="solid"/>
+                      <a:round/>
+                      <a:headEnd type="none" w="med" len="med"/>
+                      <a:tailEnd type="none" w="med" len="med"/>
+                    </a:lnB>
+                    <a:lnTlToBr w="12700" cmpd="sng">
+                      <a:noFill/>
+                      <a:prstDash val="solid"/>
+                    </a:lnTlToBr>
+                    <a:lnBlToTr w="12700" cmpd="sng">
+                      <a:noFill/>
+                      <a:prstDash val="solid"/>
+                    </a:lnBlToTr>
+                  </a:tcPr>
+                </a:tc>
+                <a:extLst>
+                  <a:ext uri="{0D108BD9-81ED-4DB2-BD59-A6C34878D82A}">
+                    <a16:rowId xmlns:a16="http://schemas.microsoft.com/office/drawing/2014/main" val="1793263226"/>
+                  </a:ext>
+                </a:extLst>
+              </a:tr>
+              <a:tr h="241000">
+                <a:tc>
+                  <a:txBody>
+                    <a:bodyPr/>
+                    <a:lstStyle/>
+                    <a:p>
+                      <a:r>
+                        <a:rPr lang="en-US" sz="2000" dirty="0"/>
+                        <a:t>Male</a:t>
+                      </a:r>
+                    </a:p>
+                  </a:txBody>
+                  <a:tcPr>
+                    <a:lnL w="12700" cmpd="sng">
+                      <a:noFill/>
+                    </a:lnL>
+                    <a:lnR w="9525" cap="flat" cmpd="sng" algn="ctr">
+                      <a:solidFill>
+                        <a:schemeClr val="bg1"/>
+                      </a:solidFill>
+                      <a:prstDash val="solid"/>
+                      <a:round/>
+                      <a:headEnd type="none" w="med" len="med"/>
+                      <a:tailEnd type="none" w="med" len="med"/>
+                    </a:lnR>
+                    <a:lnT w="9525" cap="flat" cmpd="sng" algn="ctr">
+                      <a:solidFill>
+                        <a:schemeClr val="bg1"/>
+                      </a:solidFill>
+                      <a:prstDash val="solid"/>
+                      <a:round/>
+                      <a:headEnd type="none" w="med" len="med"/>
+                      <a:tailEnd type="none" w="med" len="med"/>
+                    </a:lnT>
+                    <a:lnB w="9525" cap="flat" cmpd="sng" algn="ctr">
+                      <a:solidFill>
+                        <a:schemeClr val="bg1"/>
+                      </a:solidFill>
+                      <a:prstDash val="solid"/>
+                      <a:round/>
+                      <a:headEnd type="none" w="med" len="med"/>
+                      <a:tailEnd type="none" w="med" len="med"/>
+                    </a:lnB>
+                    <a:lnTlToBr w="12700" cmpd="sng">
+                      <a:noFill/>
+                      <a:prstDash val="solid"/>
+                    </a:lnTlToBr>
+                    <a:lnBlToTr w="12700" cmpd="sng">
+                      <a:noFill/>
+                      <a:prstDash val="solid"/>
+                    </a:lnBlToTr>
+                  </a:tcPr>
+                </a:tc>
+                <a:tc>
+                  <a:txBody>
+                    <a:bodyPr/>
+                    <a:lstStyle/>
+                    <a:p>
+                      <a:pPr algn="ctr"/>
+                      <a:r>
+                        <a:rPr lang="en-US" sz="2000" dirty="0"/>
+                        <a:t>200</a:t>
+                      </a:r>
+                    </a:p>
+                  </a:txBody>
+                  <a:tcPr>
+                    <a:lnL w="9525" cap="flat" cmpd="sng" algn="ctr">
+                      <a:solidFill>
+                        <a:schemeClr val="bg1"/>
+                      </a:solidFill>
+                      <a:prstDash val="solid"/>
+                      <a:round/>
+                      <a:headEnd type="none" w="med" len="med"/>
+                      <a:tailEnd type="none" w="med" len="med"/>
+                    </a:lnL>
+                    <a:lnR w="9525" cap="flat" cmpd="sng" algn="ctr">
+                      <a:solidFill>
+                        <a:schemeClr val="bg1"/>
+                      </a:solidFill>
+                      <a:prstDash val="solid"/>
+                      <a:round/>
+                      <a:headEnd type="none" w="med" len="med"/>
+                      <a:tailEnd type="none" w="med" len="med"/>
+                    </a:lnR>
+                    <a:lnT w="9525" cap="flat" cmpd="sng" algn="ctr">
+                      <a:solidFill>
+                        <a:schemeClr val="bg1"/>
+                      </a:solidFill>
+                      <a:prstDash val="solid"/>
+                      <a:round/>
+                      <a:headEnd type="none" w="med" len="med"/>
+                      <a:tailEnd type="none" w="med" len="med"/>
+                    </a:lnT>
+                    <a:lnB w="9525" cap="flat" cmpd="sng" algn="ctr">
+                      <a:solidFill>
+                        <a:schemeClr val="bg1"/>
+                      </a:solidFill>
+                      <a:prstDash val="solid"/>
+                      <a:round/>
+                      <a:headEnd type="none" w="med" len="med"/>
+                      <a:tailEnd type="none" w="med" len="med"/>
+                    </a:lnB>
+                    <a:lnTlToBr w="12700" cmpd="sng">
+                      <a:noFill/>
+                      <a:prstDash val="solid"/>
+                    </a:lnTlToBr>
+                    <a:lnBlToTr w="12700" cmpd="sng">
+                      <a:noFill/>
+                      <a:prstDash val="solid"/>
+                    </a:lnBlToTr>
+                  </a:tcPr>
+                </a:tc>
+                <a:tc>
+                  <a:txBody>
+                    <a:bodyPr/>
+                    <a:lstStyle/>
+                    <a:p>
+                      <a:pPr algn="ctr"/>
+                      <a:r>
+                        <a:rPr lang="en-US" sz="2000" dirty="0"/>
+                        <a:t>15</a:t>
+                      </a:r>
+                    </a:p>
+                  </a:txBody>
+                  <a:tcPr>
+                    <a:lnL w="9525" cap="flat" cmpd="sng" algn="ctr">
+                      <a:solidFill>
+                        <a:schemeClr val="bg1"/>
+                      </a:solidFill>
+                      <a:prstDash val="solid"/>
+                      <a:round/>
+                      <a:headEnd type="none" w="med" len="med"/>
+                      <a:tailEnd type="none" w="med" len="med"/>
+                    </a:lnL>
+                    <a:lnR w="9525" cap="flat" cmpd="sng" algn="ctr">
+                      <a:solidFill>
+                        <a:schemeClr val="bg1"/>
+                      </a:solidFill>
+                      <a:prstDash val="solid"/>
+                      <a:round/>
+                      <a:headEnd type="none" w="med" len="med"/>
+                      <a:tailEnd type="none" w="med" len="med"/>
+                    </a:lnR>
+                    <a:lnT w="9525" cap="flat" cmpd="sng" algn="ctr">
+                      <a:solidFill>
+                        <a:schemeClr val="bg1"/>
+                      </a:solidFill>
+                      <a:prstDash val="solid"/>
+                      <a:round/>
+                      <a:headEnd type="none" w="med" len="med"/>
+                      <a:tailEnd type="none" w="med" len="med"/>
+                    </a:lnT>
+                    <a:lnB w="9525" cap="flat" cmpd="sng" algn="ctr">
+                      <a:solidFill>
+                        <a:schemeClr val="bg1"/>
+                      </a:solidFill>
+                      <a:prstDash val="solid"/>
+                      <a:round/>
+                      <a:headEnd type="none" w="med" len="med"/>
+                      <a:tailEnd type="none" w="med" len="med"/>
+                    </a:lnB>
+                    <a:lnTlToBr w="12700" cmpd="sng">
+                      <a:noFill/>
+                      <a:prstDash val="solid"/>
+                    </a:lnTlToBr>
+                    <a:lnBlToTr w="12700" cmpd="sng">
+                      <a:noFill/>
+                      <a:prstDash val="solid"/>
+                    </a:lnBlToTr>
+                  </a:tcPr>
+                </a:tc>
+                <a:tc>
+                  <a:txBody>
+                    <a:bodyPr/>
+                    <a:lstStyle/>
+                    <a:p>
+                      <a:pPr algn="ctr"/>
+                      <a:r>
+                        <a:rPr lang="en-US" sz="2000" dirty="0"/>
+                        <a:t>1.101</a:t>
+                      </a:r>
+                    </a:p>
+                  </a:txBody>
+                  <a:tcPr>
+                    <a:lnL w="9525" cap="flat" cmpd="sng" algn="ctr">
+                      <a:solidFill>
+                        <a:schemeClr val="bg1"/>
+                      </a:solidFill>
+                      <a:prstDash val="solid"/>
+                      <a:round/>
+                      <a:headEnd type="none" w="med" len="med"/>
+                      <a:tailEnd type="none" w="med" len="med"/>
+                    </a:lnL>
+                    <a:lnR w="9525" cap="flat" cmpd="sng" algn="ctr">
+                      <a:solidFill>
+                        <a:schemeClr val="bg1"/>
+                      </a:solidFill>
+                      <a:prstDash val="solid"/>
+                      <a:round/>
+                      <a:headEnd type="none" w="med" len="med"/>
+                      <a:tailEnd type="none" w="med" len="med"/>
+                    </a:lnR>
+                    <a:lnT w="9525" cap="flat" cmpd="sng" algn="ctr">
+                      <a:solidFill>
+                        <a:schemeClr val="bg1"/>
+                      </a:solidFill>
+                      <a:prstDash val="solid"/>
+                      <a:round/>
+                      <a:headEnd type="none" w="med" len="med"/>
+                      <a:tailEnd type="none" w="med" len="med"/>
+                    </a:lnT>
+                    <a:lnB w="9525" cap="flat" cmpd="sng" algn="ctr">
+                      <a:solidFill>
+                        <a:schemeClr val="bg1"/>
+                      </a:solidFill>
+                      <a:prstDash val="solid"/>
+                      <a:round/>
+                      <a:headEnd type="none" w="med" len="med"/>
+                      <a:tailEnd type="none" w="med" len="med"/>
+                    </a:lnB>
+                    <a:lnTlToBr w="12700" cmpd="sng">
+                      <a:noFill/>
+                      <a:prstDash val="solid"/>
+                    </a:lnTlToBr>
+                    <a:lnBlToTr w="12700" cmpd="sng">
+                      <a:noFill/>
+                      <a:prstDash val="solid"/>
+                    </a:lnBlToTr>
+                  </a:tcPr>
+                </a:tc>
+                <a:tc>
+                  <a:txBody>
+                    <a:bodyPr/>
+                    <a:lstStyle/>
+                    <a:p>
+                      <a:pPr algn="ctr"/>
+                      <a:r>
+                        <a:rPr lang="en-US" sz="2000" dirty="0"/>
+                        <a:t>7.5%</a:t>
+                      </a:r>
+                    </a:p>
+                  </a:txBody>
+                  <a:tcPr>
+                    <a:lnL w="9525" cap="flat" cmpd="sng" algn="ctr">
+                      <a:solidFill>
+                        <a:schemeClr val="bg1"/>
+                      </a:solidFill>
+                      <a:prstDash val="solid"/>
+                      <a:round/>
+                      <a:headEnd type="none" w="med" len="med"/>
+                      <a:tailEnd type="none" w="med" len="med"/>
+                    </a:lnL>
+                    <a:lnR w="9525" cap="flat" cmpd="sng" algn="ctr">
+                      <a:solidFill>
+                        <a:schemeClr val="bg1"/>
+                      </a:solidFill>
+                      <a:prstDash val="solid"/>
+                      <a:round/>
+                      <a:headEnd type="none" w="med" len="med"/>
+                      <a:tailEnd type="none" w="med" len="med"/>
+                    </a:lnR>
+                    <a:lnT w="9525" cap="flat" cmpd="sng" algn="ctr">
+                      <a:solidFill>
+                        <a:schemeClr val="bg1"/>
+                      </a:solidFill>
+                      <a:prstDash val="solid"/>
+                      <a:round/>
+                      <a:headEnd type="none" w="med" len="med"/>
+                      <a:tailEnd type="none" w="med" len="med"/>
+                    </a:lnT>
+                    <a:lnB w="9525" cap="flat" cmpd="sng" algn="ctr">
+                      <a:solidFill>
+                        <a:schemeClr val="bg1"/>
+                      </a:solidFill>
+                      <a:prstDash val="solid"/>
+                      <a:round/>
+                      <a:headEnd type="none" w="med" len="med"/>
+                      <a:tailEnd type="none" w="med" len="med"/>
+                    </a:lnB>
+                    <a:lnTlToBr w="12700" cmpd="sng">
+                      <a:noFill/>
+                      <a:prstDash val="solid"/>
+                    </a:lnTlToBr>
+                    <a:lnBlToTr w="12700" cmpd="sng">
+                      <a:noFill/>
+                      <a:prstDash val="solid"/>
+                    </a:lnBlToTr>
+                  </a:tcPr>
+                </a:tc>
+                <a:tc>
+                  <a:txBody>
+                    <a:bodyPr/>
+                    <a:lstStyle/>
+                    <a:p>
+                      <a:pPr algn="ctr"/>
+                      <a:r>
+                        <a:rPr lang="en-US" sz="2000" dirty="0">
+                          <a:solidFill>
+                            <a:srgbClr val="FF0000"/>
+                          </a:solidFill>
+                        </a:rPr>
+                        <a:t>2.0%</a:t>
+                      </a:r>
+                    </a:p>
+                  </a:txBody>
+                  <a:tcPr>
+                    <a:lnL w="9525" cap="flat" cmpd="sng" algn="ctr">
+                      <a:solidFill>
+                        <a:schemeClr val="bg1"/>
+                      </a:solidFill>
+                      <a:prstDash val="solid"/>
+                      <a:round/>
+                      <a:headEnd type="none" w="med" len="med"/>
+                      <a:tailEnd type="none" w="med" len="med"/>
+                    </a:lnL>
+                    <a:lnR w="12700" cmpd="sng">
+                      <a:noFill/>
+                    </a:lnR>
+                    <a:lnT w="9525" cap="flat" cmpd="sng" algn="ctr">
+                      <a:solidFill>
+                        <a:schemeClr val="bg1"/>
+                      </a:solidFill>
+                      <a:prstDash val="solid"/>
+                      <a:round/>
+                      <a:headEnd type="none" w="med" len="med"/>
+                      <a:tailEnd type="none" w="med" len="med"/>
+                    </a:lnT>
+                    <a:lnB w="9525" cap="flat" cmpd="sng" algn="ctr">
+                      <a:solidFill>
+                        <a:schemeClr val="bg1"/>
+                      </a:solidFill>
+                      <a:prstDash val="solid"/>
+                      <a:round/>
+                      <a:headEnd type="none" w="med" len="med"/>
+                      <a:tailEnd type="none" w="med" len="med"/>
+                    </a:lnB>
+                    <a:lnTlToBr w="12700" cmpd="sng">
+                      <a:noFill/>
+                      <a:prstDash val="solid"/>
+                    </a:lnTlToBr>
+                    <a:lnBlToTr w="12700" cmpd="sng">
+                      <a:noFill/>
+                      <a:prstDash val="solid"/>
+                    </a:lnBlToTr>
+                  </a:tcPr>
+                </a:tc>
+                <a:extLst>
+                  <a:ext uri="{0D108BD9-81ED-4DB2-BD59-A6C34878D82A}">
+                    <a16:rowId xmlns:a16="http://schemas.microsoft.com/office/drawing/2014/main" val="1768873396"/>
+                  </a:ext>
+                </a:extLst>
+              </a:tr>
+              <a:tr h="241000">
+                <a:tc>
+                  <a:txBody>
+                    <a:bodyPr/>
+                    <a:lstStyle/>
+                    <a:p>
+                      <a:r>
+                        <a:rPr lang="en-US" sz="2000" dirty="0"/>
+                        <a:t>White</a:t>
+                      </a:r>
+                    </a:p>
+                  </a:txBody>
+                  <a:tcPr>
+                    <a:lnL w="12700" cmpd="sng">
+                      <a:noFill/>
+                    </a:lnL>
+                    <a:lnR w="9525" cap="flat" cmpd="sng" algn="ctr">
+                      <a:solidFill>
+                        <a:schemeClr val="bg1"/>
+                      </a:solidFill>
+                      <a:prstDash val="solid"/>
+                      <a:round/>
+                      <a:headEnd type="none" w="med" len="med"/>
+                      <a:tailEnd type="none" w="med" len="med"/>
+                    </a:lnR>
+                    <a:lnT w="9525" cap="flat" cmpd="sng" algn="ctr">
+                      <a:solidFill>
+                        <a:schemeClr val="bg1"/>
+                      </a:solidFill>
+                      <a:prstDash val="solid"/>
+                      <a:round/>
+                      <a:headEnd type="none" w="med" len="med"/>
+                      <a:tailEnd type="none" w="med" len="med"/>
+                    </a:lnT>
+                    <a:lnB w="9525" cap="flat" cmpd="sng" algn="ctr">
+                      <a:solidFill>
+                        <a:schemeClr val="bg1"/>
+                      </a:solidFill>
+                      <a:prstDash val="solid"/>
+                      <a:round/>
+                      <a:headEnd type="none" w="med" len="med"/>
+                      <a:tailEnd type="none" w="med" len="med"/>
+                    </a:lnB>
+                    <a:lnTlToBr w="12700" cmpd="sng">
+                      <a:noFill/>
+                      <a:prstDash val="solid"/>
+                    </a:lnTlToBr>
+                    <a:lnBlToTr w="12700" cmpd="sng">
+                      <a:noFill/>
+                      <a:prstDash val="solid"/>
+                    </a:lnBlToTr>
+                  </a:tcPr>
+                </a:tc>
+                <a:tc>
+                  <a:txBody>
+                    <a:bodyPr/>
+                    <a:lstStyle/>
+                    <a:p>
+                      <a:pPr algn="ctr"/>
+                      <a:r>
+                        <a:rPr lang="en-US" sz="2000" dirty="0"/>
+                        <a:t>596</a:t>
+                      </a:r>
+                    </a:p>
+                  </a:txBody>
+                  <a:tcPr>
+                    <a:lnL w="9525" cap="flat" cmpd="sng" algn="ctr">
+                      <a:solidFill>
+                        <a:schemeClr val="bg1"/>
+                      </a:solidFill>
+                      <a:prstDash val="solid"/>
+                      <a:round/>
+                      <a:headEnd type="none" w="med" len="med"/>
+                      <a:tailEnd type="none" w="med" len="med"/>
+                    </a:lnL>
+                    <a:lnR w="9525" cap="flat" cmpd="sng" algn="ctr">
+                      <a:solidFill>
+                        <a:schemeClr val="bg1"/>
+                      </a:solidFill>
+                      <a:prstDash val="solid"/>
+                      <a:round/>
+                      <a:headEnd type="none" w="med" len="med"/>
+                      <a:tailEnd type="none" w="med" len="med"/>
+                    </a:lnR>
+                    <a:lnT w="9525" cap="flat" cmpd="sng" algn="ctr">
+                      <a:solidFill>
+                        <a:schemeClr val="bg1"/>
+                      </a:solidFill>
+                      <a:prstDash val="solid"/>
+                      <a:round/>
+                      <a:headEnd type="none" w="med" len="med"/>
+                      <a:tailEnd type="none" w="med" len="med"/>
+                    </a:lnT>
+                    <a:lnB w="9525" cap="flat" cmpd="sng" algn="ctr">
+                      <a:solidFill>
+                        <a:schemeClr val="bg1"/>
+                      </a:solidFill>
+                      <a:prstDash val="solid"/>
+                      <a:round/>
+                      <a:headEnd type="none" w="med" len="med"/>
+                      <a:tailEnd type="none" w="med" len="med"/>
+                    </a:lnB>
+                    <a:lnTlToBr w="12700" cmpd="sng">
+                      <a:noFill/>
+                      <a:prstDash val="solid"/>
+                    </a:lnTlToBr>
+                    <a:lnBlToTr w="12700" cmpd="sng">
+                      <a:noFill/>
+                      <a:prstDash val="solid"/>
+                    </a:lnBlToTr>
+                  </a:tcPr>
+                </a:tc>
+                <a:tc>
+                  <a:txBody>
+                    <a:bodyPr/>
+                    <a:lstStyle/>
+                    <a:p>
+                      <a:pPr algn="ctr"/>
+                      <a:r>
+                        <a:rPr lang="en-US" sz="2000" dirty="0"/>
+                        <a:t>51</a:t>
+                      </a:r>
+                    </a:p>
+                  </a:txBody>
+                  <a:tcPr>
+                    <a:lnL w="9525" cap="flat" cmpd="sng" algn="ctr">
+                      <a:solidFill>
+                        <a:schemeClr val="bg1"/>
+                      </a:solidFill>
+                      <a:prstDash val="solid"/>
+                      <a:round/>
+                      <a:headEnd type="none" w="med" len="med"/>
+                      <a:tailEnd type="none" w="med" len="med"/>
+                    </a:lnL>
+                    <a:lnR w="9525" cap="flat" cmpd="sng" algn="ctr">
+                      <a:solidFill>
+                        <a:schemeClr val="bg1"/>
+                      </a:solidFill>
+                      <a:prstDash val="solid"/>
+                      <a:round/>
+                      <a:headEnd type="none" w="med" len="med"/>
+                      <a:tailEnd type="none" w="med" len="med"/>
+                    </a:lnR>
+                    <a:lnT w="9525" cap="flat" cmpd="sng" algn="ctr">
+                      <a:solidFill>
+                        <a:schemeClr val="bg1"/>
+                      </a:solidFill>
+                      <a:prstDash val="solid"/>
+                      <a:round/>
+                      <a:headEnd type="none" w="med" len="med"/>
+                      <a:tailEnd type="none" w="med" len="med"/>
+                    </a:lnT>
+                    <a:lnB w="9525" cap="flat" cmpd="sng" algn="ctr">
+                      <a:solidFill>
+                        <a:schemeClr val="bg1"/>
+                      </a:solidFill>
+                      <a:prstDash val="solid"/>
+                      <a:round/>
+                      <a:headEnd type="none" w="med" len="med"/>
+                      <a:tailEnd type="none" w="med" len="med"/>
+                    </a:lnB>
+                    <a:lnTlToBr w="12700" cmpd="sng">
+                      <a:noFill/>
+                      <a:prstDash val="solid"/>
+                    </a:lnTlToBr>
+                    <a:lnBlToTr w="12700" cmpd="sng">
+                      <a:noFill/>
+                      <a:prstDash val="solid"/>
+                    </a:lnBlToTr>
+                  </a:tcPr>
+                </a:tc>
+                <a:tc>
+                  <a:txBody>
+                    <a:bodyPr/>
+                    <a:lstStyle/>
+                    <a:p>
+                      <a:pPr algn="ctr"/>
+                      <a:r>
+                        <a:rPr lang="en-US" sz="2000" dirty="0"/>
+                        <a:t>0.539</a:t>
+                      </a:r>
+                    </a:p>
+                  </a:txBody>
+                  <a:tcPr>
+                    <a:lnL w="9525" cap="flat" cmpd="sng" algn="ctr">
+                      <a:solidFill>
+                        <a:schemeClr val="bg1"/>
+                      </a:solidFill>
+                      <a:prstDash val="solid"/>
+                      <a:round/>
+                      <a:headEnd type="none" w="med" len="med"/>
+                      <a:tailEnd type="none" w="med" len="med"/>
+                    </a:lnL>
+                    <a:lnR w="9525" cap="flat" cmpd="sng" algn="ctr">
+                      <a:solidFill>
+                        <a:schemeClr val="bg1"/>
+                      </a:solidFill>
+                      <a:prstDash val="solid"/>
+                      <a:round/>
+                      <a:headEnd type="none" w="med" len="med"/>
+                      <a:tailEnd type="none" w="med" len="med"/>
+                    </a:lnR>
+                    <a:lnT w="9525" cap="flat" cmpd="sng" algn="ctr">
+                      <a:solidFill>
+                        <a:schemeClr val="bg1"/>
+                      </a:solidFill>
+                      <a:prstDash val="solid"/>
+                      <a:round/>
+                      <a:headEnd type="none" w="med" len="med"/>
+                      <a:tailEnd type="none" w="med" len="med"/>
+                    </a:lnT>
+                    <a:lnB w="9525" cap="flat" cmpd="sng" algn="ctr">
+                      <a:solidFill>
+                        <a:schemeClr val="bg1"/>
+                      </a:solidFill>
+                      <a:prstDash val="solid"/>
+                      <a:round/>
+                      <a:headEnd type="none" w="med" len="med"/>
+                      <a:tailEnd type="none" w="med" len="med"/>
+                    </a:lnB>
+                    <a:lnTlToBr w="12700" cmpd="sng">
+                      <a:noFill/>
+                      <a:prstDash val="solid"/>
+                    </a:lnTlToBr>
+                    <a:lnBlToTr w="12700" cmpd="sng">
+                      <a:noFill/>
+                      <a:prstDash val="solid"/>
+                    </a:lnBlToTr>
+                  </a:tcPr>
+                </a:tc>
+                <a:tc>
+                  <a:txBody>
+                    <a:bodyPr/>
+                    <a:lstStyle/>
+                    <a:p>
+                      <a:pPr algn="ctr"/>
+                      <a:r>
+                        <a:rPr lang="en-US" sz="2000" dirty="0"/>
+                        <a:t>8.6%</a:t>
+                      </a:r>
+                    </a:p>
+                  </a:txBody>
+                  <a:tcPr>
+                    <a:lnL w="9525" cap="flat" cmpd="sng" algn="ctr">
+                      <a:solidFill>
+                        <a:schemeClr val="bg1"/>
+                      </a:solidFill>
+                      <a:prstDash val="solid"/>
+                      <a:round/>
+                      <a:headEnd type="none" w="med" len="med"/>
+                      <a:tailEnd type="none" w="med" len="med"/>
+                    </a:lnL>
+                    <a:lnR w="9525" cap="flat" cmpd="sng" algn="ctr">
+                      <a:solidFill>
+                        <a:schemeClr val="bg1"/>
+                      </a:solidFill>
+                      <a:prstDash val="solid"/>
+                      <a:round/>
+                      <a:headEnd type="none" w="med" len="med"/>
+                      <a:tailEnd type="none" w="med" len="med"/>
+                    </a:lnR>
+                    <a:lnT w="9525" cap="flat" cmpd="sng" algn="ctr">
+                      <a:solidFill>
+                        <a:schemeClr val="bg1"/>
+                      </a:solidFill>
+                      <a:prstDash val="solid"/>
+                      <a:round/>
+                      <a:headEnd type="none" w="med" len="med"/>
+                      <a:tailEnd type="none" w="med" len="med"/>
+                    </a:lnT>
+                    <a:lnB w="9525" cap="flat" cmpd="sng" algn="ctr">
+                      <a:solidFill>
+                        <a:schemeClr val="bg1"/>
+                      </a:solidFill>
+                      <a:prstDash val="solid"/>
+                      <a:round/>
+                      <a:headEnd type="none" w="med" len="med"/>
+                      <a:tailEnd type="none" w="med" len="med"/>
+                    </a:lnB>
+                    <a:lnTlToBr w="12700" cmpd="sng">
+                      <a:noFill/>
+                      <a:prstDash val="solid"/>
+                    </a:lnTlToBr>
+                    <a:lnBlToTr w="12700" cmpd="sng">
+                      <a:noFill/>
+                      <a:prstDash val="solid"/>
+                    </a:lnBlToTr>
+                  </a:tcPr>
+                </a:tc>
+                <a:tc>
+                  <a:txBody>
+                    <a:bodyPr/>
+                    <a:lstStyle/>
+                    <a:p>
+                      <a:pPr algn="ctr"/>
+                      <a:r>
+                        <a:rPr lang="en-US" sz="2000" dirty="0">
+                          <a:solidFill>
+                            <a:srgbClr val="FF0000"/>
+                          </a:solidFill>
+                        </a:rPr>
+                        <a:t>48.6%</a:t>
+                      </a:r>
+                    </a:p>
+                  </a:txBody>
+                  <a:tcPr>
+                    <a:lnL w="9525" cap="flat" cmpd="sng" algn="ctr">
+                      <a:solidFill>
+                        <a:schemeClr val="bg1"/>
+                      </a:solidFill>
+                      <a:prstDash val="solid"/>
+                      <a:round/>
+                      <a:headEnd type="none" w="med" len="med"/>
+                      <a:tailEnd type="none" w="med" len="med"/>
+                    </a:lnL>
+                    <a:lnR w="12700" cmpd="sng">
+                      <a:noFill/>
+                    </a:lnR>
+                    <a:lnT w="9525" cap="flat" cmpd="sng" algn="ctr">
+                      <a:solidFill>
+                        <a:schemeClr val="bg1"/>
+                      </a:solidFill>
+                      <a:prstDash val="solid"/>
+                      <a:round/>
+                      <a:headEnd type="none" w="med" len="med"/>
+                      <a:tailEnd type="none" w="med" len="med"/>
+                    </a:lnT>
+                    <a:lnB w="9525" cap="flat" cmpd="sng" algn="ctr">
+                      <a:solidFill>
+                        <a:schemeClr val="bg1"/>
+                      </a:solidFill>
+                      <a:prstDash val="solid"/>
+                      <a:round/>
+                      <a:headEnd type="none" w="med" len="med"/>
+                      <a:tailEnd type="none" w="med" len="med"/>
+                    </a:lnB>
+                    <a:lnTlToBr w="12700" cmpd="sng">
+                      <a:noFill/>
+                      <a:prstDash val="solid"/>
+                    </a:lnTlToBr>
+                    <a:lnBlToTr w="12700" cmpd="sng">
+                      <a:noFill/>
+                      <a:prstDash val="solid"/>
+                    </a:lnBlToTr>
+                  </a:tcPr>
+                </a:tc>
+                <a:extLst>
+                  <a:ext uri="{0D108BD9-81ED-4DB2-BD59-A6C34878D82A}">
+                    <a16:rowId xmlns:a16="http://schemas.microsoft.com/office/drawing/2014/main" val="3608515526"/>
+                  </a:ext>
+                </a:extLst>
+              </a:tr>
+              <a:tr h="241000">
+                <a:tc>
+                  <a:txBody>
+                    <a:bodyPr/>
+                    <a:lstStyle/>
+                    <a:p>
+                      <a:r>
+                        <a:rPr lang="en-US" sz="2000" dirty="0"/>
+                        <a:t>Black</a:t>
+                      </a:r>
+                    </a:p>
+                  </a:txBody>
+                  <a:tcPr>
+                    <a:lnL w="12700" cmpd="sng">
+                      <a:noFill/>
+                    </a:lnL>
+                    <a:lnR w="9525" cap="flat" cmpd="sng" algn="ctr">
+                      <a:solidFill>
+                        <a:schemeClr val="bg1"/>
+                      </a:solidFill>
+                      <a:prstDash val="solid"/>
+                      <a:round/>
+                      <a:headEnd type="none" w="med" len="med"/>
+                      <a:tailEnd type="none" w="med" len="med"/>
+                    </a:lnR>
+                    <a:lnT w="9525" cap="flat" cmpd="sng" algn="ctr">
+                      <a:solidFill>
+                        <a:schemeClr val="bg1"/>
+                      </a:solidFill>
+                      <a:prstDash val="solid"/>
+                      <a:round/>
+                      <a:headEnd type="none" w="med" len="med"/>
+                      <a:tailEnd type="none" w="med" len="med"/>
+                    </a:lnT>
+                    <a:lnB w="9525" cap="flat" cmpd="sng" algn="ctr">
+                      <a:solidFill>
+                        <a:schemeClr val="bg1"/>
+                      </a:solidFill>
+                      <a:prstDash val="solid"/>
+                      <a:round/>
+                      <a:headEnd type="none" w="med" len="med"/>
+                      <a:tailEnd type="none" w="med" len="med"/>
+                    </a:lnB>
+                    <a:lnTlToBr w="12700" cmpd="sng">
+                      <a:noFill/>
+                      <a:prstDash val="solid"/>
+                    </a:lnTlToBr>
+                    <a:lnBlToTr w="12700" cmpd="sng">
+                      <a:noFill/>
+                      <a:prstDash val="solid"/>
+                    </a:lnBlToTr>
+                  </a:tcPr>
+                </a:tc>
+                <a:tc>
+                  <a:txBody>
+                    <a:bodyPr/>
+                    <a:lstStyle/>
+                    <a:p>
+                      <a:pPr algn="ctr"/>
+                      <a:r>
+                        <a:rPr lang="en-US" sz="2000" dirty="0"/>
+                        <a:t>327</a:t>
+                      </a:r>
+                    </a:p>
+                  </a:txBody>
+                  <a:tcPr>
+                    <a:lnL w="9525" cap="flat" cmpd="sng" algn="ctr">
+                      <a:solidFill>
+                        <a:schemeClr val="bg1"/>
+                      </a:solidFill>
+                      <a:prstDash val="solid"/>
+                      <a:round/>
+                      <a:headEnd type="none" w="med" len="med"/>
+                      <a:tailEnd type="none" w="med" len="med"/>
+                    </a:lnL>
+                    <a:lnR w="9525" cap="flat" cmpd="sng" algn="ctr">
+                      <a:solidFill>
+                        <a:schemeClr val="bg1"/>
+                      </a:solidFill>
+                      <a:prstDash val="solid"/>
+                      <a:round/>
+                      <a:headEnd type="none" w="med" len="med"/>
+                      <a:tailEnd type="none" w="med" len="med"/>
+                    </a:lnR>
+                    <a:lnT w="9525" cap="flat" cmpd="sng" algn="ctr">
+                      <a:solidFill>
+                        <a:schemeClr val="bg1"/>
+                      </a:solidFill>
+                      <a:prstDash val="solid"/>
+                      <a:round/>
+                      <a:headEnd type="none" w="med" len="med"/>
+                      <a:tailEnd type="none" w="med" len="med"/>
+                    </a:lnT>
+                    <a:lnB w="9525" cap="flat" cmpd="sng" algn="ctr">
+                      <a:solidFill>
+                        <a:schemeClr val="bg1"/>
+                      </a:solidFill>
+                      <a:prstDash val="solid"/>
+                      <a:round/>
+                      <a:headEnd type="none" w="med" len="med"/>
+                      <a:tailEnd type="none" w="med" len="med"/>
+                    </a:lnB>
+                    <a:lnTlToBr w="12700" cmpd="sng">
+                      <a:noFill/>
+                      <a:prstDash val="solid"/>
+                    </a:lnTlToBr>
+                    <a:lnBlToTr w="12700" cmpd="sng">
+                      <a:noFill/>
+                      <a:prstDash val="solid"/>
+                    </a:lnBlToTr>
+                  </a:tcPr>
+                </a:tc>
+                <a:tc>
+                  <a:txBody>
+                    <a:bodyPr/>
+                    <a:lstStyle/>
+                    <a:p>
+                      <a:pPr algn="ctr"/>
+                      <a:r>
+                        <a:rPr lang="en-US" sz="2000" dirty="0"/>
+                        <a:t>21</a:t>
+                      </a:r>
+                    </a:p>
+                  </a:txBody>
+                  <a:tcPr>
+                    <a:lnL w="9525" cap="flat" cmpd="sng" algn="ctr">
+                      <a:solidFill>
+                        <a:schemeClr val="bg1"/>
+                      </a:solidFill>
+                      <a:prstDash val="solid"/>
+                      <a:round/>
+                      <a:headEnd type="none" w="med" len="med"/>
+                      <a:tailEnd type="none" w="med" len="med"/>
+                    </a:lnL>
+                    <a:lnR w="9525" cap="flat" cmpd="sng" algn="ctr">
+                      <a:solidFill>
+                        <a:schemeClr val="bg1"/>
+                      </a:solidFill>
+                      <a:prstDash val="solid"/>
+                      <a:round/>
+                      <a:headEnd type="none" w="med" len="med"/>
+                      <a:tailEnd type="none" w="med" len="med"/>
+                    </a:lnR>
+                    <a:lnT w="9525" cap="flat" cmpd="sng" algn="ctr">
+                      <a:solidFill>
+                        <a:schemeClr val="bg1"/>
+                      </a:solidFill>
+                      <a:prstDash val="solid"/>
+                      <a:round/>
+                      <a:headEnd type="none" w="med" len="med"/>
+                      <a:tailEnd type="none" w="med" len="med"/>
+                    </a:lnT>
+                    <a:lnB w="9525" cap="flat" cmpd="sng" algn="ctr">
+                      <a:solidFill>
+                        <a:schemeClr val="bg1"/>
+                      </a:solidFill>
+                      <a:prstDash val="solid"/>
+                      <a:round/>
+                      <a:headEnd type="none" w="med" len="med"/>
+                      <a:tailEnd type="none" w="med" len="med"/>
+                    </a:lnB>
+                    <a:lnTlToBr w="12700" cmpd="sng">
+                      <a:noFill/>
+                      <a:prstDash val="solid"/>
+                    </a:lnTlToBr>
+                    <a:lnBlToTr w="12700" cmpd="sng">
+                      <a:noFill/>
+                      <a:prstDash val="solid"/>
+                    </a:lnBlToTr>
+                  </a:tcPr>
+                </a:tc>
+                <a:tc>
+                  <a:txBody>
+                    <a:bodyPr/>
+                    <a:lstStyle/>
+                    <a:p>
+                      <a:pPr algn="ctr"/>
+                      <a:r>
+                        <a:rPr lang="en-US" sz="2000" dirty="0"/>
+                        <a:t>0.287</a:t>
+                      </a:r>
+                    </a:p>
+                  </a:txBody>
+                  <a:tcPr>
+                    <a:lnL w="9525" cap="flat" cmpd="sng" algn="ctr">
+                      <a:solidFill>
+                        <a:schemeClr val="bg1"/>
+                      </a:solidFill>
+                      <a:prstDash val="solid"/>
+                      <a:round/>
+                      <a:headEnd type="none" w="med" len="med"/>
+                      <a:tailEnd type="none" w="med" len="med"/>
+                    </a:lnL>
+                    <a:lnR w="9525" cap="flat" cmpd="sng" algn="ctr">
+                      <a:solidFill>
+                        <a:schemeClr val="bg1"/>
+                      </a:solidFill>
+                      <a:prstDash val="solid"/>
+                      <a:round/>
+                      <a:headEnd type="none" w="med" len="med"/>
+                      <a:tailEnd type="none" w="med" len="med"/>
+                    </a:lnR>
+                    <a:lnT w="9525" cap="flat" cmpd="sng" algn="ctr">
+                      <a:solidFill>
+                        <a:schemeClr val="bg1"/>
+                      </a:solidFill>
+                      <a:prstDash val="solid"/>
+                      <a:round/>
+                      <a:headEnd type="none" w="med" len="med"/>
+                      <a:tailEnd type="none" w="med" len="med"/>
+                    </a:lnT>
+                    <a:lnB w="9525" cap="flat" cmpd="sng" algn="ctr">
+                      <a:solidFill>
+                        <a:schemeClr val="bg1"/>
+                      </a:solidFill>
+                      <a:prstDash val="solid"/>
+                      <a:round/>
+                      <a:headEnd type="none" w="med" len="med"/>
+                      <a:tailEnd type="none" w="med" len="med"/>
+                    </a:lnB>
+                    <a:lnTlToBr w="12700" cmpd="sng">
+                      <a:noFill/>
+                      <a:prstDash val="solid"/>
+                    </a:lnTlToBr>
+                    <a:lnBlToTr w="12700" cmpd="sng">
+                      <a:noFill/>
+                      <a:prstDash val="solid"/>
+                    </a:lnBlToTr>
+                  </a:tcPr>
+                </a:tc>
+                <a:tc>
+                  <a:txBody>
+                    <a:bodyPr/>
+                    <a:lstStyle/>
+                    <a:p>
+                      <a:pPr algn="ctr"/>
+                      <a:r>
+                        <a:rPr lang="en-US" sz="2000" dirty="0"/>
+                        <a:t>6.4%</a:t>
+                      </a:r>
+                    </a:p>
+                  </a:txBody>
+                  <a:tcPr>
+                    <a:lnL w="9525" cap="flat" cmpd="sng" algn="ctr">
+                      <a:solidFill>
+                        <a:schemeClr val="bg1"/>
+                      </a:solidFill>
+                      <a:prstDash val="solid"/>
+                      <a:round/>
+                      <a:headEnd type="none" w="med" len="med"/>
+                      <a:tailEnd type="none" w="med" len="med"/>
+                    </a:lnL>
+                    <a:lnR w="9525" cap="flat" cmpd="sng" algn="ctr">
+                      <a:solidFill>
+                        <a:schemeClr val="bg1"/>
+                      </a:solidFill>
+                      <a:prstDash val="solid"/>
+                      <a:round/>
+                      <a:headEnd type="none" w="med" len="med"/>
+                      <a:tailEnd type="none" w="med" len="med"/>
+                    </a:lnR>
+                    <a:lnT w="9525" cap="flat" cmpd="sng" algn="ctr">
+                      <a:solidFill>
+                        <a:schemeClr val="bg1"/>
+                      </a:solidFill>
+                      <a:prstDash val="solid"/>
+                      <a:round/>
+                      <a:headEnd type="none" w="med" len="med"/>
+                      <a:tailEnd type="none" w="med" len="med"/>
+                    </a:lnT>
+                    <a:lnB w="9525" cap="flat" cmpd="sng" algn="ctr">
+                      <a:solidFill>
+                        <a:schemeClr val="bg1"/>
+                      </a:solidFill>
+                      <a:prstDash val="solid"/>
+                      <a:round/>
+                      <a:headEnd type="none" w="med" len="med"/>
+                      <a:tailEnd type="none" w="med" len="med"/>
+                    </a:lnB>
+                    <a:lnTlToBr w="12700" cmpd="sng">
+                      <a:noFill/>
+                      <a:prstDash val="solid"/>
+                    </a:lnTlToBr>
+                    <a:lnBlToTr w="12700" cmpd="sng">
+                      <a:noFill/>
+                      <a:prstDash val="solid"/>
+                    </a:lnBlToTr>
+                  </a:tcPr>
+                </a:tc>
+                <a:tc>
+                  <a:txBody>
+                    <a:bodyPr/>
+                    <a:lstStyle/>
+                    <a:p>
+                      <a:pPr algn="ctr"/>
+                      <a:r>
+                        <a:rPr lang="en-US" sz="2000" dirty="0">
+                          <a:solidFill>
+                            <a:srgbClr val="FF0000"/>
+                          </a:solidFill>
+                        </a:rPr>
+                        <a:t>73.2%</a:t>
+                      </a:r>
+                    </a:p>
+                  </a:txBody>
+                  <a:tcPr>
+                    <a:lnL w="9525" cap="flat" cmpd="sng" algn="ctr">
+                      <a:solidFill>
+                        <a:schemeClr val="bg1"/>
+                      </a:solidFill>
+                      <a:prstDash val="solid"/>
+                      <a:round/>
+                      <a:headEnd type="none" w="med" len="med"/>
+                      <a:tailEnd type="none" w="med" len="med"/>
+                    </a:lnL>
+                    <a:lnR w="12700" cmpd="sng">
+                      <a:noFill/>
+                    </a:lnR>
+                    <a:lnT w="9525" cap="flat" cmpd="sng" algn="ctr">
+                      <a:solidFill>
+                        <a:schemeClr val="bg1"/>
+                      </a:solidFill>
+                      <a:prstDash val="solid"/>
+                      <a:round/>
+                      <a:headEnd type="none" w="med" len="med"/>
+                      <a:tailEnd type="none" w="med" len="med"/>
+                    </a:lnT>
+                    <a:lnB w="9525" cap="flat" cmpd="sng" algn="ctr">
+                      <a:solidFill>
+                        <a:schemeClr val="bg1"/>
+                      </a:solidFill>
+                      <a:prstDash val="solid"/>
+                      <a:round/>
+                      <a:headEnd type="none" w="med" len="med"/>
+                      <a:tailEnd type="none" w="med" len="med"/>
+                    </a:lnB>
+                    <a:lnTlToBr w="12700" cmpd="sng">
+                      <a:noFill/>
+                      <a:prstDash val="solid"/>
+                    </a:lnTlToBr>
+                    <a:lnBlToTr w="12700" cmpd="sng">
+                      <a:noFill/>
+                      <a:prstDash val="solid"/>
+                    </a:lnBlToTr>
+                  </a:tcPr>
+                </a:tc>
+                <a:extLst>
+                  <a:ext uri="{0D108BD9-81ED-4DB2-BD59-A6C34878D82A}">
+                    <a16:rowId xmlns:a16="http://schemas.microsoft.com/office/drawing/2014/main" val="1772470211"/>
+                  </a:ext>
+                </a:extLst>
+              </a:tr>
+              <a:tr h="241000">
+                <a:tc>
+                  <a:txBody>
+                    <a:bodyPr/>
+                    <a:lstStyle/>
+                    <a:p>
+                      <a:r>
+                        <a:rPr lang="en-US" sz="2000" dirty="0"/>
+                        <a:t>Hispanic</a:t>
+                      </a:r>
+                    </a:p>
+                  </a:txBody>
+                  <a:tcPr>
+                    <a:lnL w="12700" cmpd="sng">
+                      <a:noFill/>
+                    </a:lnL>
+                    <a:lnR w="9525" cap="flat" cmpd="sng" algn="ctr">
+                      <a:solidFill>
+                        <a:schemeClr val="bg1"/>
+                      </a:solidFill>
+                      <a:prstDash val="solid"/>
+                      <a:round/>
+                      <a:headEnd type="none" w="med" len="med"/>
+                      <a:tailEnd type="none" w="med" len="med"/>
+                    </a:lnR>
+                    <a:lnT w="9525" cap="flat" cmpd="sng" algn="ctr">
+                      <a:solidFill>
+                        <a:schemeClr val="bg1"/>
+                      </a:solidFill>
+                      <a:prstDash val="solid"/>
+                      <a:round/>
+                      <a:headEnd type="none" w="med" len="med"/>
+                      <a:tailEnd type="none" w="med" len="med"/>
+                    </a:lnT>
+                    <a:lnB w="9525" cap="flat" cmpd="sng" algn="ctr">
+                      <a:solidFill>
+                        <a:schemeClr val="bg1"/>
+                      </a:solidFill>
+                      <a:prstDash val="solid"/>
+                      <a:round/>
+                      <a:headEnd type="none" w="med" len="med"/>
+                      <a:tailEnd type="none" w="med" len="med"/>
+                    </a:lnB>
+                    <a:lnTlToBr w="12700" cmpd="sng">
+                      <a:noFill/>
+                      <a:prstDash val="solid"/>
+                    </a:lnTlToBr>
+                    <a:lnBlToTr w="12700" cmpd="sng">
+                      <a:noFill/>
+                      <a:prstDash val="solid"/>
+                    </a:lnBlToTr>
+                  </a:tcPr>
+                </a:tc>
+                <a:tc>
+                  <a:txBody>
+                    <a:bodyPr/>
+                    <a:lstStyle/>
+                    <a:p>
+                      <a:pPr algn="ctr"/>
+                      <a:r>
+                        <a:rPr lang="en-US" sz="2000" dirty="0"/>
+                        <a:t>203</a:t>
+                      </a:r>
+                    </a:p>
+                  </a:txBody>
+                  <a:tcPr>
+                    <a:lnL w="9525" cap="flat" cmpd="sng" algn="ctr">
+                      <a:solidFill>
+                        <a:schemeClr val="bg1"/>
+                      </a:solidFill>
+                      <a:prstDash val="solid"/>
+                      <a:round/>
+                      <a:headEnd type="none" w="med" len="med"/>
+                      <a:tailEnd type="none" w="med" len="med"/>
+                    </a:lnL>
+                    <a:lnR w="9525" cap="flat" cmpd="sng" algn="ctr">
+                      <a:solidFill>
+                        <a:schemeClr val="bg1"/>
+                      </a:solidFill>
+                      <a:prstDash val="solid"/>
+                      <a:round/>
+                      <a:headEnd type="none" w="med" len="med"/>
+                      <a:tailEnd type="none" w="med" len="med"/>
+                    </a:lnR>
+                    <a:lnT w="9525" cap="flat" cmpd="sng" algn="ctr">
+                      <a:solidFill>
+                        <a:schemeClr val="bg1"/>
+                      </a:solidFill>
+                      <a:prstDash val="solid"/>
+                      <a:round/>
+                      <a:headEnd type="none" w="med" len="med"/>
+                      <a:tailEnd type="none" w="med" len="med"/>
+                    </a:lnT>
+                    <a:lnB w="9525" cap="flat" cmpd="sng" algn="ctr">
+                      <a:solidFill>
+                        <a:schemeClr val="bg1"/>
+                      </a:solidFill>
+                      <a:prstDash val="solid"/>
+                      <a:round/>
+                      <a:headEnd type="none" w="med" len="med"/>
+                      <a:tailEnd type="none" w="med" len="med"/>
+                    </a:lnB>
+                    <a:lnTlToBr w="12700" cmpd="sng">
+                      <a:noFill/>
+                      <a:prstDash val="solid"/>
+                    </a:lnTlToBr>
+                    <a:lnBlToTr w="12700" cmpd="sng">
+                      <a:noFill/>
+                      <a:prstDash val="solid"/>
+                    </a:lnBlToTr>
+                  </a:tcPr>
+                </a:tc>
+                <a:tc>
+                  <a:txBody>
+                    <a:bodyPr/>
+                    <a:lstStyle/>
+                    <a:p>
+                      <a:pPr algn="ctr"/>
+                      <a:r>
+                        <a:rPr lang="en-US" sz="2000" dirty="0"/>
+                        <a:t>20</a:t>
+                      </a:r>
+                    </a:p>
+                  </a:txBody>
+                  <a:tcPr>
+                    <a:lnL w="9525" cap="flat" cmpd="sng" algn="ctr">
+                      <a:solidFill>
+                        <a:schemeClr val="bg1"/>
+                      </a:solidFill>
+                      <a:prstDash val="solid"/>
+                      <a:round/>
+                      <a:headEnd type="none" w="med" len="med"/>
+                      <a:tailEnd type="none" w="med" len="med"/>
+                    </a:lnL>
+                    <a:lnR w="9525" cap="flat" cmpd="sng" algn="ctr">
+                      <a:solidFill>
+                        <a:schemeClr val="bg1"/>
+                      </a:solidFill>
+                      <a:prstDash val="solid"/>
+                      <a:round/>
+                      <a:headEnd type="none" w="med" len="med"/>
+                      <a:tailEnd type="none" w="med" len="med"/>
+                    </a:lnR>
+                    <a:lnT w="9525" cap="flat" cmpd="sng" algn="ctr">
+                      <a:solidFill>
+                        <a:schemeClr val="bg1"/>
+                      </a:solidFill>
+                      <a:prstDash val="solid"/>
+                      <a:round/>
+                      <a:headEnd type="none" w="med" len="med"/>
+                      <a:tailEnd type="none" w="med" len="med"/>
+                    </a:lnT>
+                    <a:lnB w="9525" cap="flat" cmpd="sng" algn="ctr">
+                      <a:solidFill>
+                        <a:schemeClr val="bg1"/>
+                      </a:solidFill>
+                      <a:prstDash val="solid"/>
+                      <a:round/>
+                      <a:headEnd type="none" w="med" len="med"/>
+                      <a:tailEnd type="none" w="med" len="med"/>
+                    </a:lnB>
+                    <a:lnTlToBr w="12700" cmpd="sng">
+                      <a:noFill/>
+                      <a:prstDash val="solid"/>
+                    </a:lnTlToBr>
+                    <a:lnBlToTr w="12700" cmpd="sng">
+                      <a:noFill/>
+                      <a:prstDash val="solid"/>
+                    </a:lnBlToTr>
+                  </a:tcPr>
+                </a:tc>
+                <a:tc>
+                  <a:txBody>
+                    <a:bodyPr/>
+                    <a:lstStyle/>
+                    <a:p>
+                      <a:pPr algn="ctr"/>
+                      <a:r>
+                        <a:rPr lang="en-US" sz="2000" dirty="0"/>
+                        <a:t>0.628</a:t>
+                      </a:r>
+                    </a:p>
+                  </a:txBody>
+                  <a:tcPr>
+                    <a:lnL w="9525" cap="flat" cmpd="sng" algn="ctr">
+                      <a:solidFill>
+                        <a:schemeClr val="bg1"/>
+                      </a:solidFill>
+                      <a:prstDash val="solid"/>
+                      <a:round/>
+                      <a:headEnd type="none" w="med" len="med"/>
+                      <a:tailEnd type="none" w="med" len="med"/>
+                    </a:lnL>
+                    <a:lnR w="9525" cap="flat" cmpd="sng" algn="ctr">
+                      <a:solidFill>
+                        <a:schemeClr val="bg1"/>
+                      </a:solidFill>
+                      <a:prstDash val="solid"/>
+                      <a:round/>
+                      <a:headEnd type="none" w="med" len="med"/>
+                      <a:tailEnd type="none" w="med" len="med"/>
+                    </a:lnR>
+                    <a:lnT w="9525" cap="flat" cmpd="sng" algn="ctr">
+                      <a:solidFill>
+                        <a:schemeClr val="bg1"/>
+                      </a:solidFill>
+                      <a:prstDash val="solid"/>
+                      <a:round/>
+                      <a:headEnd type="none" w="med" len="med"/>
+                      <a:tailEnd type="none" w="med" len="med"/>
+                    </a:lnT>
+                    <a:lnB w="9525" cap="flat" cmpd="sng" algn="ctr">
+                      <a:solidFill>
+                        <a:schemeClr val="bg1"/>
+                      </a:solidFill>
+                      <a:prstDash val="solid"/>
+                      <a:round/>
+                      <a:headEnd type="none" w="med" len="med"/>
+                      <a:tailEnd type="none" w="med" len="med"/>
+                    </a:lnB>
+                    <a:lnTlToBr w="12700" cmpd="sng">
+                      <a:noFill/>
+                      <a:prstDash val="solid"/>
+                    </a:lnTlToBr>
+                    <a:lnBlToTr w="12700" cmpd="sng">
+                      <a:noFill/>
+                      <a:prstDash val="solid"/>
+                    </a:lnBlToTr>
+                  </a:tcPr>
+                </a:tc>
+                <a:tc>
+                  <a:txBody>
+                    <a:bodyPr/>
+                    <a:lstStyle/>
+                    <a:p>
+                      <a:pPr algn="ctr"/>
+                      <a:r>
+                        <a:rPr lang="en-US" sz="2000" dirty="0"/>
+                        <a:t>9.9%</a:t>
+                      </a:r>
+                    </a:p>
+                  </a:txBody>
+                  <a:tcPr>
+                    <a:lnL w="9525" cap="flat" cmpd="sng" algn="ctr">
+                      <a:solidFill>
+                        <a:schemeClr val="bg1"/>
+                      </a:solidFill>
+                      <a:prstDash val="solid"/>
+                      <a:round/>
+                      <a:headEnd type="none" w="med" len="med"/>
+                      <a:tailEnd type="none" w="med" len="med"/>
+                    </a:lnL>
+                    <a:lnR w="9525" cap="flat" cmpd="sng" algn="ctr">
+                      <a:solidFill>
+                        <a:schemeClr val="bg1"/>
+                      </a:solidFill>
+                      <a:prstDash val="solid"/>
+                      <a:round/>
+                      <a:headEnd type="none" w="med" len="med"/>
+                      <a:tailEnd type="none" w="med" len="med"/>
+                    </a:lnR>
+                    <a:lnT w="9525" cap="flat" cmpd="sng" algn="ctr">
+                      <a:solidFill>
+                        <a:schemeClr val="bg1"/>
+                      </a:solidFill>
+                      <a:prstDash val="solid"/>
+                      <a:round/>
+                      <a:headEnd type="none" w="med" len="med"/>
+                      <a:tailEnd type="none" w="med" len="med"/>
+                    </a:lnT>
+                    <a:lnB w="9525" cap="flat" cmpd="sng" algn="ctr">
+                      <a:solidFill>
+                        <a:schemeClr val="bg1"/>
+                      </a:solidFill>
+                      <a:prstDash val="solid"/>
+                      <a:round/>
+                      <a:headEnd type="none" w="med" len="med"/>
+                      <a:tailEnd type="none" w="med" len="med"/>
+                    </a:lnB>
+                    <a:lnTlToBr w="12700" cmpd="sng">
+                      <a:noFill/>
+                      <a:prstDash val="solid"/>
+                    </a:lnTlToBr>
+                    <a:lnBlToTr w="12700" cmpd="sng">
+                      <a:noFill/>
+                      <a:prstDash val="solid"/>
+                    </a:lnBlToTr>
+                  </a:tcPr>
+                </a:tc>
+                <a:tc>
+                  <a:txBody>
+                    <a:bodyPr/>
+                    <a:lstStyle/>
+                    <a:p>
+                      <a:pPr algn="ctr"/>
+                      <a:r>
+                        <a:rPr lang="en-US" sz="2000" dirty="0">
+                          <a:solidFill>
+                            <a:srgbClr val="FF0000"/>
+                          </a:solidFill>
+                        </a:rPr>
+                        <a:t>11.5%</a:t>
+                      </a:r>
+                    </a:p>
+                  </a:txBody>
+                  <a:tcPr>
+                    <a:lnL w="9525" cap="flat" cmpd="sng" algn="ctr">
+                      <a:solidFill>
+                        <a:schemeClr val="bg1"/>
+                      </a:solidFill>
+                      <a:prstDash val="solid"/>
+                      <a:round/>
+                      <a:headEnd type="none" w="med" len="med"/>
+                      <a:tailEnd type="none" w="med" len="med"/>
+                    </a:lnL>
+                    <a:lnR w="12700" cmpd="sng">
+                      <a:noFill/>
+                    </a:lnR>
+                    <a:lnT w="9525" cap="flat" cmpd="sng" algn="ctr">
+                      <a:solidFill>
+                        <a:schemeClr val="bg1"/>
+                      </a:solidFill>
+                      <a:prstDash val="solid"/>
+                      <a:round/>
+                      <a:headEnd type="none" w="med" len="med"/>
+                      <a:tailEnd type="none" w="med" len="med"/>
+                    </a:lnT>
+                    <a:lnB w="9525" cap="flat" cmpd="sng" algn="ctr">
+                      <a:solidFill>
+                        <a:schemeClr val="bg1"/>
+                      </a:solidFill>
+                      <a:prstDash val="solid"/>
+                      <a:round/>
+                      <a:headEnd type="none" w="med" len="med"/>
+                      <a:tailEnd type="none" w="med" len="med"/>
+                    </a:lnB>
+                    <a:lnTlToBr w="12700" cmpd="sng">
+                      <a:noFill/>
+                      <a:prstDash val="solid"/>
+                    </a:lnTlToBr>
+                    <a:lnBlToTr w="12700" cmpd="sng">
+                      <a:noFill/>
+                      <a:prstDash val="solid"/>
+                    </a:lnBlToTr>
+                  </a:tcPr>
+                </a:tc>
+                <a:extLst>
+                  <a:ext uri="{0D108BD9-81ED-4DB2-BD59-A6C34878D82A}">
+                    <a16:rowId xmlns:a16="http://schemas.microsoft.com/office/drawing/2014/main" val="793727366"/>
+                  </a:ext>
+                </a:extLst>
+              </a:tr>
+              <a:tr h="241000">
+                <a:tc>
+                  <a:txBody>
+                    <a:bodyPr/>
+                    <a:lstStyle/>
+                    <a:p>
+                      <a:r>
+                        <a:rPr lang="en-US" sz="2000" dirty="0"/>
+                        <a:t>Asian/PI</a:t>
+                      </a:r>
+                    </a:p>
+                  </a:txBody>
+                  <a:tcPr>
+                    <a:lnL w="12700" cmpd="sng">
+                      <a:noFill/>
+                    </a:lnL>
+                    <a:lnR w="9525" cap="flat" cmpd="sng" algn="ctr">
+                      <a:solidFill>
+                        <a:schemeClr val="bg1"/>
+                      </a:solidFill>
+                      <a:prstDash val="solid"/>
+                      <a:round/>
+                      <a:headEnd type="none" w="med" len="med"/>
+                      <a:tailEnd type="none" w="med" len="med"/>
+                    </a:lnR>
+                    <a:lnT w="9525" cap="flat" cmpd="sng" algn="ctr">
+                      <a:solidFill>
+                        <a:schemeClr val="bg1"/>
+                      </a:solidFill>
+                      <a:prstDash val="solid"/>
+                      <a:round/>
+                      <a:headEnd type="none" w="med" len="med"/>
+                      <a:tailEnd type="none" w="med" len="med"/>
+                    </a:lnT>
+                    <a:lnB w="9525" cap="flat" cmpd="sng" algn="ctr">
+                      <a:solidFill>
+                        <a:schemeClr val="bg1"/>
+                      </a:solidFill>
+                      <a:prstDash val="solid"/>
+                      <a:round/>
+                      <a:headEnd type="none" w="med" len="med"/>
+                      <a:tailEnd type="none" w="med" len="med"/>
+                    </a:lnB>
+                    <a:lnTlToBr w="12700" cmpd="sng">
+                      <a:noFill/>
+                      <a:prstDash val="solid"/>
+                    </a:lnTlToBr>
+                    <a:lnBlToTr w="12700" cmpd="sng">
+                      <a:noFill/>
+                      <a:prstDash val="solid"/>
+                    </a:lnBlToTr>
+                  </a:tcPr>
+                </a:tc>
+                <a:tc>
+                  <a:txBody>
+                    <a:bodyPr/>
+                    <a:lstStyle/>
+                    <a:p>
+                      <a:pPr algn="ctr"/>
+                      <a:r>
+                        <a:rPr lang="en-US" sz="2000" dirty="0"/>
+                        <a:t>14</a:t>
+                      </a:r>
+                    </a:p>
+                  </a:txBody>
+                  <a:tcPr>
+                    <a:lnL w="9525" cap="flat" cmpd="sng" algn="ctr">
+                      <a:solidFill>
+                        <a:schemeClr val="bg1"/>
+                      </a:solidFill>
+                      <a:prstDash val="solid"/>
+                      <a:round/>
+                      <a:headEnd type="none" w="med" len="med"/>
+                      <a:tailEnd type="none" w="med" len="med"/>
+                    </a:lnL>
+                    <a:lnR w="9525" cap="flat" cmpd="sng" algn="ctr">
+                      <a:solidFill>
+                        <a:schemeClr val="bg1"/>
+                      </a:solidFill>
+                      <a:prstDash val="solid"/>
+                      <a:round/>
+                      <a:headEnd type="none" w="med" len="med"/>
+                      <a:tailEnd type="none" w="med" len="med"/>
+                    </a:lnR>
+                    <a:lnT w="9525" cap="flat" cmpd="sng" algn="ctr">
+                      <a:solidFill>
+                        <a:schemeClr val="bg1"/>
+                      </a:solidFill>
+                      <a:prstDash val="solid"/>
+                      <a:round/>
+                      <a:headEnd type="none" w="med" len="med"/>
+                      <a:tailEnd type="none" w="med" len="med"/>
+                    </a:lnT>
+                    <a:lnB w="9525" cap="flat" cmpd="sng" algn="ctr">
+                      <a:solidFill>
+                        <a:schemeClr val="bg1"/>
+                      </a:solidFill>
+                      <a:prstDash val="solid"/>
+                      <a:round/>
+                      <a:headEnd type="none" w="med" len="med"/>
+                      <a:tailEnd type="none" w="med" len="med"/>
+                    </a:lnB>
+                    <a:lnTlToBr w="12700" cmpd="sng">
+                      <a:noFill/>
+                      <a:prstDash val="solid"/>
+                    </a:lnTlToBr>
+                    <a:lnBlToTr w="12700" cmpd="sng">
+                      <a:noFill/>
+                      <a:prstDash val="solid"/>
+                    </a:lnBlToTr>
+                  </a:tcPr>
+                </a:tc>
+                <a:tc>
+                  <a:txBody>
+                    <a:bodyPr/>
+                    <a:lstStyle/>
+                    <a:p>
+                      <a:pPr algn="ctr"/>
+                      <a:r>
+                        <a:rPr lang="en-US" sz="2000" dirty="0"/>
+                        <a:t>3</a:t>
+                      </a:r>
+                    </a:p>
+                  </a:txBody>
+                  <a:tcPr>
+                    <a:lnL w="9525" cap="flat" cmpd="sng" algn="ctr">
+                      <a:solidFill>
+                        <a:schemeClr val="bg1"/>
+                      </a:solidFill>
+                      <a:prstDash val="solid"/>
+                      <a:round/>
+                      <a:headEnd type="none" w="med" len="med"/>
+                      <a:tailEnd type="none" w="med" len="med"/>
+                    </a:lnL>
+                    <a:lnR w="9525" cap="flat" cmpd="sng" algn="ctr">
+                      <a:solidFill>
+                        <a:schemeClr val="bg1"/>
+                      </a:solidFill>
+                      <a:prstDash val="solid"/>
+                      <a:round/>
+                      <a:headEnd type="none" w="med" len="med"/>
+                      <a:tailEnd type="none" w="med" len="med"/>
+                    </a:lnR>
+                    <a:lnT w="9525" cap="flat" cmpd="sng" algn="ctr">
+                      <a:solidFill>
+                        <a:schemeClr val="bg1"/>
+                      </a:solidFill>
+                      <a:prstDash val="solid"/>
+                      <a:round/>
+                      <a:headEnd type="none" w="med" len="med"/>
+                      <a:tailEnd type="none" w="med" len="med"/>
+                    </a:lnT>
+                    <a:lnB w="9525" cap="flat" cmpd="sng" algn="ctr">
+                      <a:solidFill>
+                        <a:schemeClr val="bg1"/>
+                      </a:solidFill>
+                      <a:prstDash val="solid"/>
+                      <a:round/>
+                      <a:headEnd type="none" w="med" len="med"/>
+                      <a:tailEnd type="none" w="med" len="med"/>
+                    </a:lnB>
+                    <a:lnTlToBr w="12700" cmpd="sng">
+                      <a:noFill/>
+                      <a:prstDash val="solid"/>
+                    </a:lnTlToBr>
+                    <a:lnBlToTr w="12700" cmpd="sng">
+                      <a:noFill/>
+                      <a:prstDash val="solid"/>
+                    </a:lnBlToTr>
+                  </a:tcPr>
+                </a:tc>
+                <a:tc>
+                  <a:txBody>
+                    <a:bodyPr/>
+                    <a:lstStyle/>
+                    <a:p>
+                      <a:pPr algn="ctr"/>
+                      <a:r>
+                        <a:rPr lang="en-US" sz="2000" dirty="0"/>
+                        <a:t>0.068</a:t>
+                      </a:r>
+                    </a:p>
+                  </a:txBody>
+                  <a:tcPr>
+                    <a:lnL w="9525" cap="flat" cmpd="sng" algn="ctr">
+                      <a:solidFill>
+                        <a:schemeClr val="bg1"/>
+                      </a:solidFill>
+                      <a:prstDash val="solid"/>
+                      <a:round/>
+                      <a:headEnd type="none" w="med" len="med"/>
+                      <a:tailEnd type="none" w="med" len="med"/>
+                    </a:lnL>
+                    <a:lnR w="9525" cap="flat" cmpd="sng" algn="ctr">
+                      <a:solidFill>
+                        <a:schemeClr val="bg1"/>
+                      </a:solidFill>
+                      <a:prstDash val="solid"/>
+                      <a:round/>
+                      <a:headEnd type="none" w="med" len="med"/>
+                      <a:tailEnd type="none" w="med" len="med"/>
+                    </a:lnR>
+                    <a:lnT w="9525" cap="flat" cmpd="sng" algn="ctr">
+                      <a:solidFill>
+                        <a:schemeClr val="bg1"/>
+                      </a:solidFill>
+                      <a:prstDash val="solid"/>
+                      <a:round/>
+                      <a:headEnd type="none" w="med" len="med"/>
+                      <a:tailEnd type="none" w="med" len="med"/>
+                    </a:lnT>
+                    <a:lnB w="9525" cap="flat" cmpd="sng" algn="ctr">
+                      <a:solidFill>
+                        <a:schemeClr val="bg1"/>
+                      </a:solidFill>
+                      <a:prstDash val="solid"/>
+                      <a:round/>
+                      <a:headEnd type="none" w="med" len="med"/>
+                      <a:tailEnd type="none" w="med" len="med"/>
+                    </a:lnB>
+                    <a:lnTlToBr w="12700" cmpd="sng">
+                      <a:noFill/>
+                      <a:prstDash val="solid"/>
+                    </a:lnTlToBr>
+                    <a:lnBlToTr w="12700" cmpd="sng">
+                      <a:noFill/>
+                      <a:prstDash val="solid"/>
+                    </a:lnBlToTr>
+                  </a:tcPr>
+                </a:tc>
+                <a:tc>
+                  <a:txBody>
+                    <a:bodyPr/>
+                    <a:lstStyle/>
+                    <a:p>
+                      <a:pPr algn="ctr"/>
+                      <a:r>
+                        <a:rPr lang="en-US" sz="2000" dirty="0"/>
+                        <a:t>21.4%</a:t>
+                      </a:r>
+                    </a:p>
+                  </a:txBody>
+                  <a:tcPr>
+                    <a:lnL w="9525" cap="flat" cmpd="sng" algn="ctr">
+                      <a:solidFill>
+                        <a:schemeClr val="bg1"/>
+                      </a:solidFill>
+                      <a:prstDash val="solid"/>
+                      <a:round/>
+                      <a:headEnd type="none" w="med" len="med"/>
+                      <a:tailEnd type="none" w="med" len="med"/>
+                    </a:lnL>
+                    <a:lnR w="9525" cap="flat" cmpd="sng" algn="ctr">
+                      <a:solidFill>
+                        <a:schemeClr val="bg1"/>
+                      </a:solidFill>
+                      <a:prstDash val="solid"/>
+                      <a:round/>
+                      <a:headEnd type="none" w="med" len="med"/>
+                      <a:tailEnd type="none" w="med" len="med"/>
+                    </a:lnR>
+                    <a:lnT w="9525" cap="flat" cmpd="sng" algn="ctr">
+                      <a:solidFill>
+                        <a:schemeClr val="bg1"/>
+                      </a:solidFill>
+                      <a:prstDash val="solid"/>
+                      <a:round/>
+                      <a:headEnd type="none" w="med" len="med"/>
+                      <a:tailEnd type="none" w="med" len="med"/>
+                    </a:lnT>
+                    <a:lnB w="9525" cap="flat" cmpd="sng" algn="ctr">
+                      <a:solidFill>
+                        <a:schemeClr val="bg1"/>
+                      </a:solidFill>
+                      <a:prstDash val="solid"/>
+                      <a:round/>
+                      <a:headEnd type="none" w="med" len="med"/>
+                      <a:tailEnd type="none" w="med" len="med"/>
+                    </a:lnB>
+                    <a:lnTlToBr w="12700" cmpd="sng">
+                      <a:noFill/>
+                      <a:prstDash val="solid"/>
+                    </a:lnTlToBr>
+                    <a:lnBlToTr w="12700" cmpd="sng">
+                      <a:noFill/>
+                      <a:prstDash val="solid"/>
+                    </a:lnBlToTr>
+                  </a:tcPr>
+                </a:tc>
+                <a:tc>
+                  <a:txBody>
+                    <a:bodyPr/>
+                    <a:lstStyle/>
+                    <a:p>
+                      <a:pPr algn="ctr"/>
+                      <a:r>
+                        <a:rPr lang="en-US" sz="2000" dirty="0">
+                          <a:solidFill>
+                            <a:srgbClr val="FF0000"/>
+                          </a:solidFill>
+                        </a:rPr>
+                        <a:t>53.5%</a:t>
+                      </a:r>
+                    </a:p>
+                  </a:txBody>
+                  <a:tcPr>
+                    <a:lnL w="9525" cap="flat" cmpd="sng" algn="ctr">
+                      <a:solidFill>
+                        <a:schemeClr val="bg1"/>
+                      </a:solidFill>
+                      <a:prstDash val="solid"/>
+                      <a:round/>
+                      <a:headEnd type="none" w="med" len="med"/>
+                      <a:tailEnd type="none" w="med" len="med"/>
+                    </a:lnL>
+                    <a:lnR w="12700" cmpd="sng">
+                      <a:noFill/>
+                    </a:lnR>
+                    <a:lnT w="9525" cap="flat" cmpd="sng" algn="ctr">
+                      <a:solidFill>
+                        <a:schemeClr val="bg1"/>
+                      </a:solidFill>
+                      <a:prstDash val="solid"/>
+                      <a:round/>
+                      <a:headEnd type="none" w="med" len="med"/>
+                      <a:tailEnd type="none" w="med" len="med"/>
+                    </a:lnT>
+                    <a:lnB w="9525" cap="flat" cmpd="sng" algn="ctr">
+                      <a:solidFill>
+                        <a:schemeClr val="bg1"/>
+                      </a:solidFill>
+                      <a:prstDash val="solid"/>
+                      <a:round/>
+                      <a:headEnd type="none" w="med" len="med"/>
+                      <a:tailEnd type="none" w="med" len="med"/>
+                    </a:lnB>
+                    <a:lnTlToBr w="12700" cmpd="sng">
+                      <a:noFill/>
+                      <a:prstDash val="solid"/>
+                    </a:lnTlToBr>
+                    <a:lnBlToTr w="12700" cmpd="sng">
+                      <a:noFill/>
+                      <a:prstDash val="solid"/>
+                    </a:lnBlToTr>
+                  </a:tcPr>
+                </a:tc>
+                <a:extLst>
+                  <a:ext uri="{0D108BD9-81ED-4DB2-BD59-A6C34878D82A}">
+                    <a16:rowId xmlns:a16="http://schemas.microsoft.com/office/drawing/2014/main" val="145476638"/>
+                  </a:ext>
+                </a:extLst>
+              </a:tr>
+              <a:tr h="241000">
+                <a:tc>
+                  <a:txBody>
+                    <a:bodyPr/>
+                    <a:lstStyle/>
+                    <a:p>
+                      <a:r>
+                        <a:rPr lang="en-US" sz="2000" dirty="0"/>
+                        <a:t>Other</a:t>
+                      </a:r>
+                    </a:p>
+                  </a:txBody>
+                  <a:tcPr>
+                    <a:lnL w="12700" cmpd="sng">
+                      <a:noFill/>
+                    </a:lnL>
+                    <a:lnR w="9525" cap="flat" cmpd="sng" algn="ctr">
+                      <a:solidFill>
+                        <a:schemeClr val="bg1"/>
+                      </a:solidFill>
+                      <a:prstDash val="solid"/>
+                      <a:round/>
+                      <a:headEnd type="none" w="med" len="med"/>
+                      <a:tailEnd type="none" w="med" len="med"/>
+                    </a:lnR>
+                    <a:lnT w="9525" cap="flat" cmpd="sng" algn="ctr">
+                      <a:solidFill>
+                        <a:schemeClr val="bg1"/>
+                      </a:solidFill>
+                      <a:prstDash val="solid"/>
+                      <a:round/>
+                      <a:headEnd type="none" w="med" len="med"/>
+                      <a:tailEnd type="none" w="med" len="med"/>
+                    </a:lnT>
+                    <a:lnB w="12700" cmpd="sng">
+                      <a:noFill/>
+                    </a:lnB>
+                    <a:lnTlToBr w="12700" cmpd="sng">
+                      <a:noFill/>
+                      <a:prstDash val="solid"/>
+                    </a:lnTlToBr>
+                    <a:lnBlToTr w="12700" cmpd="sng">
+                      <a:noFill/>
+                      <a:prstDash val="solid"/>
+                    </a:lnBlToTr>
+                  </a:tcPr>
+                </a:tc>
+                <a:tc>
+                  <a:txBody>
+                    <a:bodyPr/>
+                    <a:lstStyle/>
+                    <a:p>
+                      <a:pPr algn="ctr"/>
+                      <a:r>
+                        <a:rPr lang="en-US" sz="2000" dirty="0"/>
+                        <a:t>11</a:t>
+                      </a:r>
+                    </a:p>
+                  </a:txBody>
+                  <a:tcPr>
+                    <a:lnL w="9525" cap="flat" cmpd="sng" algn="ctr">
+                      <a:solidFill>
+                        <a:schemeClr val="bg1"/>
+                      </a:solidFill>
+                      <a:prstDash val="solid"/>
+                      <a:round/>
+                      <a:headEnd type="none" w="med" len="med"/>
+                      <a:tailEnd type="none" w="med" len="med"/>
+                    </a:lnL>
+                    <a:lnR w="9525" cap="flat" cmpd="sng" algn="ctr">
+                      <a:solidFill>
+                        <a:schemeClr val="bg1"/>
+                      </a:solidFill>
+                      <a:prstDash val="solid"/>
+                      <a:round/>
+                      <a:headEnd type="none" w="med" len="med"/>
+                      <a:tailEnd type="none" w="med" len="med"/>
+                    </a:lnR>
+                    <a:lnT w="9525" cap="flat" cmpd="sng" algn="ctr">
+                      <a:solidFill>
+                        <a:schemeClr val="bg1"/>
+                      </a:solidFill>
+                      <a:prstDash val="solid"/>
+                      <a:round/>
+                      <a:headEnd type="none" w="med" len="med"/>
+                      <a:tailEnd type="none" w="med" len="med"/>
+                    </a:lnT>
+                    <a:lnB w="12700" cmpd="sng">
+                      <a:noFill/>
+                    </a:lnB>
+                    <a:lnTlToBr w="12700" cmpd="sng">
+                      <a:noFill/>
+                      <a:prstDash val="solid"/>
+                    </a:lnTlToBr>
+                    <a:lnBlToTr w="12700" cmpd="sng">
+                      <a:noFill/>
+                      <a:prstDash val="solid"/>
+                    </a:lnBlToTr>
+                  </a:tcPr>
+                </a:tc>
+                <a:tc>
+                  <a:txBody>
+                    <a:bodyPr/>
+                    <a:lstStyle/>
+                    <a:p>
+                      <a:pPr algn="ctr"/>
+                      <a:r>
+                        <a:rPr lang="en-US" sz="2000" dirty="0"/>
+                        <a:t>1</a:t>
+                      </a:r>
+                    </a:p>
+                  </a:txBody>
+                  <a:tcPr>
+                    <a:lnL w="9525" cap="flat" cmpd="sng" algn="ctr">
+                      <a:solidFill>
+                        <a:schemeClr val="bg1"/>
+                      </a:solidFill>
+                      <a:prstDash val="solid"/>
+                      <a:round/>
+                      <a:headEnd type="none" w="med" len="med"/>
+                      <a:tailEnd type="none" w="med" len="med"/>
+                    </a:lnL>
+                    <a:lnR w="9525" cap="flat" cmpd="sng" algn="ctr">
+                      <a:solidFill>
+                        <a:schemeClr val="bg1"/>
+                      </a:solidFill>
+                      <a:prstDash val="solid"/>
+                      <a:round/>
+                      <a:headEnd type="none" w="med" len="med"/>
+                      <a:tailEnd type="none" w="med" len="med"/>
+                    </a:lnR>
+                    <a:lnT w="9525" cap="flat" cmpd="sng" algn="ctr">
+                      <a:solidFill>
+                        <a:schemeClr val="bg1"/>
+                      </a:solidFill>
+                      <a:prstDash val="solid"/>
+                      <a:round/>
+                      <a:headEnd type="none" w="med" len="med"/>
+                      <a:tailEnd type="none" w="med" len="med"/>
+                    </a:lnT>
+                    <a:lnB w="12700" cmpd="sng">
+                      <a:noFill/>
+                    </a:lnB>
+                    <a:lnTlToBr w="12700" cmpd="sng">
+                      <a:noFill/>
+                      <a:prstDash val="solid"/>
+                    </a:lnTlToBr>
+                    <a:lnBlToTr w="12700" cmpd="sng">
+                      <a:noFill/>
+                      <a:prstDash val="solid"/>
+                    </a:lnBlToTr>
+                  </a:tcPr>
+                </a:tc>
+                <a:tc>
+                  <a:txBody>
+                    <a:bodyPr/>
+                    <a:lstStyle/>
+                    <a:p>
+                      <a:pPr algn="ctr"/>
+                      <a:r>
+                        <a:rPr lang="en-US" sz="2000" dirty="0"/>
+                        <a:t>237.311</a:t>
+                      </a:r>
+                    </a:p>
+                  </a:txBody>
+                  <a:tcPr>
+                    <a:lnL w="9525" cap="flat" cmpd="sng" algn="ctr">
+                      <a:solidFill>
+                        <a:schemeClr val="bg1"/>
+                      </a:solidFill>
+                      <a:prstDash val="solid"/>
+                      <a:round/>
+                      <a:headEnd type="none" w="med" len="med"/>
+                      <a:tailEnd type="none" w="med" len="med"/>
+                    </a:lnL>
+                    <a:lnR w="9525" cap="flat" cmpd="sng" algn="ctr">
+                      <a:solidFill>
+                        <a:schemeClr val="bg1"/>
+                      </a:solidFill>
+                      <a:prstDash val="solid"/>
+                      <a:round/>
+                      <a:headEnd type="none" w="med" len="med"/>
+                      <a:tailEnd type="none" w="med" len="med"/>
+                    </a:lnR>
+                    <a:lnT w="9525" cap="flat" cmpd="sng" algn="ctr">
+                      <a:solidFill>
+                        <a:schemeClr val="bg1"/>
+                      </a:solidFill>
+                      <a:prstDash val="solid"/>
+                      <a:round/>
+                      <a:headEnd type="none" w="med" len="med"/>
+                      <a:tailEnd type="none" w="med" len="med"/>
+                    </a:lnT>
+                    <a:lnB w="12700" cmpd="sng">
+                      <a:noFill/>
+                    </a:lnB>
+                    <a:lnTlToBr w="12700" cmpd="sng">
+                      <a:noFill/>
+                      <a:prstDash val="solid"/>
+                    </a:lnTlToBr>
+                    <a:lnBlToTr w="12700" cmpd="sng">
+                      <a:noFill/>
+                      <a:prstDash val="solid"/>
+                    </a:lnBlToTr>
+                  </a:tcPr>
+                </a:tc>
+                <a:tc>
+                  <a:txBody>
+                    <a:bodyPr/>
+                    <a:lstStyle/>
+                    <a:p>
+                      <a:pPr algn="ctr"/>
+                      <a:r>
+                        <a:rPr lang="en-US" sz="2000" dirty="0"/>
+                        <a:t>9.1%</a:t>
+                      </a:r>
+                    </a:p>
+                  </a:txBody>
+                  <a:tcPr>
+                    <a:lnL w="9525" cap="flat" cmpd="sng" algn="ctr">
+                      <a:solidFill>
+                        <a:schemeClr val="bg1"/>
+                      </a:solidFill>
+                      <a:prstDash val="solid"/>
+                      <a:round/>
+                      <a:headEnd type="none" w="med" len="med"/>
+                      <a:tailEnd type="none" w="med" len="med"/>
+                    </a:lnL>
+                    <a:lnR w="9525" cap="flat" cmpd="sng" algn="ctr">
+                      <a:solidFill>
+                        <a:schemeClr val="bg1"/>
+                      </a:solidFill>
+                      <a:prstDash val="solid"/>
+                      <a:round/>
+                      <a:headEnd type="none" w="med" len="med"/>
+                      <a:tailEnd type="none" w="med" len="med"/>
+                    </a:lnR>
+                    <a:lnT w="9525" cap="flat" cmpd="sng" algn="ctr">
+                      <a:solidFill>
+                        <a:schemeClr val="bg1"/>
+                      </a:solidFill>
+                      <a:prstDash val="solid"/>
+                      <a:round/>
+                      <a:headEnd type="none" w="med" len="med"/>
+                      <a:tailEnd type="none" w="med" len="med"/>
+                    </a:lnT>
+                    <a:lnB w="12700" cmpd="sng">
+                      <a:noFill/>
+                    </a:lnB>
+                    <a:lnTlToBr w="12700" cmpd="sng">
+                      <a:noFill/>
+                      <a:prstDash val="solid"/>
+                    </a:lnTlToBr>
+                    <a:lnBlToTr w="12700" cmpd="sng">
+                      <a:noFill/>
+                      <a:prstDash val="solid"/>
+                    </a:lnBlToTr>
+                  </a:tcPr>
+                </a:tc>
+                <a:tc>
+                  <a:txBody>
+                    <a:bodyPr/>
+                    <a:lstStyle/>
+                    <a:p>
+                      <a:pPr algn="ctr"/>
+                      <a:r>
+                        <a:rPr lang="en-US" sz="2000" dirty="0">
+                          <a:solidFill>
+                            <a:srgbClr val="FF0000"/>
+                          </a:solidFill>
+                        </a:rPr>
+                        <a:t>68.9%</a:t>
+                      </a:r>
+                    </a:p>
+                  </a:txBody>
+                  <a:tcPr>
+                    <a:lnL w="9525" cap="flat" cmpd="sng" algn="ctr">
+                      <a:solidFill>
+                        <a:schemeClr val="bg1"/>
+                      </a:solidFill>
+                      <a:prstDash val="solid"/>
+                      <a:round/>
+                      <a:headEnd type="none" w="med" len="med"/>
+                      <a:tailEnd type="none" w="med" len="med"/>
+                    </a:lnL>
+                    <a:lnR w="12700" cmpd="sng">
+                      <a:noFill/>
+                    </a:lnR>
+                    <a:lnT w="9525" cap="flat" cmpd="sng" algn="ctr">
+                      <a:solidFill>
+                        <a:schemeClr val="bg1"/>
+                      </a:solidFill>
+                      <a:prstDash val="solid"/>
+                      <a:round/>
+                      <a:headEnd type="none" w="med" len="med"/>
+                      <a:tailEnd type="none" w="med" len="med"/>
+                    </a:lnT>
+                    <a:lnB w="12700" cmpd="sng">
+                      <a:noFill/>
+                    </a:lnB>
+                    <a:lnTlToBr w="12700" cmpd="sng">
+                      <a:noFill/>
+                      <a:prstDash val="solid"/>
+                    </a:lnTlToBr>
+                    <a:lnBlToTr w="12700" cmpd="sng">
+                      <a:noFill/>
+                      <a:prstDash val="solid"/>
+                    </a:lnBlToTr>
+                  </a:tcPr>
+                </a:tc>
+                <a:extLst>
+                  <a:ext uri="{0D108BD9-81ED-4DB2-BD59-A6C34878D82A}">
+                    <a16:rowId xmlns:a16="http://schemas.microsoft.com/office/drawing/2014/main" val="2309075761"/>
+                  </a:ext>
+                </a:extLst>
+              </a:tr>
+            </a:tbl>
+          </a:graphicData>
+        </a:graphic>
+      </p:graphicFrame>
     </p:spTree>
     <p:extLst>
       <p:ext uri="{BB962C8B-B14F-4D97-AF65-F5344CB8AC3E}">
@@ -5923,238 +8993,6 @@
           <p:cNvPr id="2" name="Title 1">
             <a:extLst>
               <a:ext uri="{FF2B5EF4-FFF2-40B4-BE49-F238E27FC236}">
-                <a16:creationId xmlns:a16="http://schemas.microsoft.com/office/drawing/2014/main" id="{5C507DC5-1A9D-D0F8-9793-3A6A7F52CF8C}"/>
-              </a:ext>
-            </a:extLst>
-          </p:cNvPr>
-          <p:cNvSpPr>
-            <a:spLocks noGrp="1"/>
-          </p:cNvSpPr>
-          <p:nvPr>
-            <p:ph type="title"/>
-          </p:nvPr>
-        </p:nvSpPr>
-        <p:spPr/>
-        <p:txBody>
-          <a:bodyPr/>
-          <a:lstStyle/>
-          <a:p>
-            <a:r>
-              <a:rPr lang="en-US" dirty="0"/>
-              <a:t>Power Simulation: Sample Size Requirements</a:t>
-            </a:r>
-          </a:p>
-        </p:txBody>
-      </p:sp>
-      <p:sp>
-        <p:nvSpPr>
-          <p:cNvPr id="3" name="Content Placeholder 2">
-            <a:extLst>
-              <a:ext uri="{FF2B5EF4-FFF2-40B4-BE49-F238E27FC236}">
-                <a16:creationId xmlns:a16="http://schemas.microsoft.com/office/drawing/2014/main" id="{C91E951C-529D-29F5-330C-3E565DD54B69}"/>
-              </a:ext>
-            </a:extLst>
-          </p:cNvPr>
-          <p:cNvSpPr>
-            <a:spLocks noGrp="1"/>
-          </p:cNvSpPr>
-          <p:nvPr>
-            <p:ph idx="1"/>
-          </p:nvPr>
-        </p:nvSpPr>
-        <p:spPr>
-          <a:xfrm>
-            <a:off x="838200" y="1472699"/>
-            <a:ext cx="10515600" cy="4351338"/>
-          </a:xfrm>
-        </p:spPr>
-        <p:txBody>
-          <a:bodyPr>
-            <a:noAutofit/>
-          </a:bodyPr>
-          <a:lstStyle/>
-          <a:p>
-            <a:pPr marL="0" indent="0">
-              <a:buNone/>
-            </a:pPr>
-            <a:r>
-              <a:rPr lang="en-US" sz="2400" b="1" dirty="0"/>
-              <a:t>Hispanic subgroup:</a:t>
-            </a:r>
-          </a:p>
-          <a:p>
-            <a:pPr lvl="1"/>
-            <a:r>
-              <a:rPr lang="en-US" dirty="0"/>
-              <a:t>Original study enrolled 203 enrolled with 20 events, 11.5% power</a:t>
-            </a:r>
-          </a:p>
-          <a:p>
-            <a:pPr lvl="1"/>
-            <a:r>
-              <a:rPr lang="en-US" dirty="0"/>
-              <a:t>Future study needs ~447 participants (~44 events) to reach 80% power</a:t>
-            </a:r>
-          </a:p>
-          <a:p>
-            <a:pPr marL="0" indent="0">
-              <a:buNone/>
-            </a:pPr>
-            <a:endParaRPr lang="en-US" sz="2400" dirty="0"/>
-          </a:p>
-          <a:p>
-            <a:pPr marL="0" indent="0">
-              <a:buNone/>
-            </a:pPr>
-            <a:r>
-              <a:rPr lang="en-US" sz="2400" b="1" dirty="0"/>
-              <a:t>Assumed effect size and related sample size</a:t>
-            </a:r>
-          </a:p>
-          <a:p>
-            <a:pPr marL="457200" lvl="1" indent="0">
-              <a:buNone/>
-            </a:pPr>
-            <a:r>
-              <a:rPr lang="en-US" dirty="0">
-                <a:solidFill>
-                  <a:srgbClr val="922B21"/>
-                </a:solidFill>
-              </a:rPr>
-              <a:t>Male 	HR=0.5:   267</a:t>
-            </a:r>
-          </a:p>
-          <a:p>
-            <a:pPr marL="457200" lvl="1" indent="0">
-              <a:buNone/>
-            </a:pPr>
-            <a:r>
-              <a:rPr lang="en-US" dirty="0">
-                <a:solidFill>
-                  <a:srgbClr val="922B21"/>
-                </a:solidFill>
-              </a:rPr>
-              <a:t>		HR=0.7: 1,000 </a:t>
-            </a:r>
-          </a:p>
-          <a:p>
-            <a:pPr marL="457200" lvl="1" indent="0">
-              <a:buNone/>
-            </a:pPr>
-            <a:r>
-              <a:rPr lang="en-US" dirty="0">
-                <a:solidFill>
-                  <a:srgbClr val="922B21"/>
-                </a:solidFill>
-              </a:rPr>
-              <a:t>		HR=0.9: 11,427</a:t>
-            </a:r>
-          </a:p>
-          <a:p>
-            <a:pPr marL="457200" lvl="1" indent="0">
-              <a:buNone/>
-            </a:pPr>
-            <a:r>
-              <a:rPr lang="en-US" dirty="0">
-                <a:solidFill>
-                  <a:srgbClr val="922B21"/>
-                </a:solidFill>
-              </a:rPr>
-              <a:t>Asian/PI 	HR=0.5: 94 </a:t>
-            </a:r>
-          </a:p>
-          <a:p>
-            <a:pPr marL="457200" lvl="1" indent="0">
-              <a:buNone/>
-            </a:pPr>
-            <a:r>
-              <a:rPr lang="en-US" dirty="0">
-                <a:solidFill>
-                  <a:srgbClr val="922B21"/>
-                </a:solidFill>
-              </a:rPr>
-              <a:t>		HR=0.7: 350</a:t>
-            </a:r>
-          </a:p>
-          <a:p>
-            <a:pPr marL="457200" lvl="1" indent="0">
-              <a:buNone/>
-            </a:pPr>
-            <a:r>
-              <a:rPr lang="en-US" dirty="0">
-                <a:solidFill>
-                  <a:srgbClr val="922B21"/>
-                </a:solidFill>
-              </a:rPr>
-              <a:t>		HR=0.9: 4,000</a:t>
-            </a:r>
-          </a:p>
-        </p:txBody>
-      </p:sp>
-      <p:sp>
-        <p:nvSpPr>
-          <p:cNvPr id="4" name="Slide Number Placeholder 3">
-            <a:extLst>
-              <a:ext uri="{FF2B5EF4-FFF2-40B4-BE49-F238E27FC236}">
-                <a16:creationId xmlns:a16="http://schemas.microsoft.com/office/drawing/2014/main" id="{FA33EADA-15E5-186D-78A3-6C43FC0A91CE}"/>
-              </a:ext>
-            </a:extLst>
-          </p:cNvPr>
-          <p:cNvSpPr>
-            <a:spLocks noGrp="1"/>
-          </p:cNvSpPr>
-          <p:nvPr>
-            <p:ph type="sldNum" sz="quarter" idx="12"/>
-          </p:nvPr>
-        </p:nvSpPr>
-        <p:spPr/>
-        <p:txBody>
-          <a:bodyPr/>
-          <a:lstStyle/>
-          <a:p>
-            <a:fld id="{EE78427E-3D83-4E05-BBD0-5A5577BF92C2}" type="slidenum">
-              <a:rPr lang="en-US" smtClean="0"/>
-              <a:t>12</a:t>
-            </a:fld>
-            <a:endParaRPr lang="en-US"/>
-          </a:p>
-        </p:txBody>
-      </p:sp>
-    </p:spTree>
-    <p:extLst>
-      <p:ext uri="{BB962C8B-B14F-4D97-AF65-F5344CB8AC3E}">
-        <p14:creationId xmlns:p14="http://schemas.microsoft.com/office/powerpoint/2010/main" val="2400702810"/>
-      </p:ext>
-    </p:extLst>
-  </p:cSld>
-  <p:clrMapOvr>
-    <a:masterClrMapping/>
-  </p:clrMapOvr>
-</p:sld>
-</file>
-
-<file path=ppt/slides/slide13.xml><?xml version="1.0" encoding="utf-8"?>
-<p:sld xmlns:a="http://schemas.openxmlformats.org/drawingml/2006/main" xmlns:r="http://schemas.openxmlformats.org/officeDocument/2006/relationships" xmlns:p="http://schemas.openxmlformats.org/presentationml/2006/main">
-  <p:cSld>
-    <p:spTree>
-      <p:nvGrpSpPr>
-        <p:cNvPr id="1" name=""/>
-        <p:cNvGrpSpPr/>
-        <p:nvPr/>
-      </p:nvGrpSpPr>
-      <p:grpSpPr>
-        <a:xfrm>
-          <a:off x="0" y="0"/>
-          <a:ext cx="0" cy="0"/>
-          <a:chOff x="0" y="0"/>
-          <a:chExt cx="0" cy="0"/>
-        </a:xfrm>
-      </p:grpSpPr>
-      <p:sp>
-        <p:nvSpPr>
-          <p:cNvPr id="2" name="Title 1">
-            <a:extLst>
-              <a:ext uri="{FF2B5EF4-FFF2-40B4-BE49-F238E27FC236}">
                 <a16:creationId xmlns:a16="http://schemas.microsoft.com/office/drawing/2014/main" id="{282C640C-6D05-17CF-4359-F3DA3765AA22}"/>
               </a:ext>
             </a:extLst>
@@ -6210,7 +9048,7 @@
           <a:p>
             <a:fld id="{EE78427E-3D83-4E05-BBD0-5A5577BF92C2}" type="slidenum">
               <a:rPr lang="en-US" smtClean="0"/>
-              <a:t>13</a:t>
+              <a:t>12</a:t>
             </a:fld>
             <a:endParaRPr lang="en-US"/>
           </a:p>
@@ -6231,14 +9069,14 @@
           <p:nvPr>
             <p:extLst>
               <p:ext uri="{D42A27DB-BD31-4B8C-83A1-F6EECF244321}">
-                <p14:modId xmlns:p14="http://schemas.microsoft.com/office/powerpoint/2010/main" val="3832213620"/>
+                <p14:modId xmlns:p14="http://schemas.microsoft.com/office/powerpoint/2010/main" val="3717859489"/>
               </p:ext>
             </p:extLst>
           </p:nvPr>
         </p:nvGraphicFramePr>
         <p:xfrm>
-          <a:off x="1143441" y="1410176"/>
-          <a:ext cx="9619368" cy="4480560"/>
+          <a:off x="1031119" y="1125538"/>
+          <a:ext cx="10322681" cy="3870960"/>
         </p:xfrm>
         <a:graphic>
           <a:graphicData uri="http://schemas.openxmlformats.org/drawingml/2006/table">
@@ -6247,35 +9085,35 @@
                 <a:tableStyleId>{5C22544A-7EE6-4342-B048-85BDC9FD1C3A}</a:tableStyleId>
               </a:tblPr>
               <a:tblGrid>
-                <a:gridCol w="1649389">
+                <a:gridCol w="1750724">
                   <a:extLst>
                     <a:ext uri="{9D8B030D-6E8A-4147-A177-3AD203B41FA5}">
                       <a16:colId xmlns:a16="http://schemas.microsoft.com/office/drawing/2014/main" val="772587959"/>
                     </a:ext>
                   </a:extLst>
                 </a:gridCol>
-                <a:gridCol w="1877123">
+                <a:gridCol w="2104771">
                   <a:extLst>
                     <a:ext uri="{9D8B030D-6E8A-4147-A177-3AD203B41FA5}">
                       <a16:colId xmlns:a16="http://schemas.microsoft.com/office/drawing/2014/main" val="1333839601"/>
                     </a:ext>
                   </a:extLst>
                 </a:gridCol>
-                <a:gridCol w="1671309">
+                <a:gridCol w="1773990">
                   <a:extLst>
                     <a:ext uri="{9D8B030D-6E8A-4147-A177-3AD203B41FA5}">
                       <a16:colId xmlns:a16="http://schemas.microsoft.com/office/drawing/2014/main" val="2467871587"/>
                     </a:ext>
                   </a:extLst>
                 </a:gridCol>
-                <a:gridCol w="2018179">
+                <a:gridCol w="2142171">
                   <a:extLst>
                     <a:ext uri="{9D8B030D-6E8A-4147-A177-3AD203B41FA5}">
                       <a16:colId xmlns:a16="http://schemas.microsoft.com/office/drawing/2014/main" val="1879297196"/>
                     </a:ext>
                   </a:extLst>
                 </a:gridCol>
-                <a:gridCol w="2403368">
+                <a:gridCol w="2551025">
                   <a:extLst>
                     <a:ext uri="{9D8B030D-6E8A-4147-A177-3AD203B41FA5}">
                       <a16:colId xmlns:a16="http://schemas.microsoft.com/office/drawing/2014/main" val="2117588414"/>
@@ -6290,7 +9128,7 @@
                     <a:lstStyle/>
                     <a:p>
                       <a:r>
-                        <a:rPr lang="en-US" sz="2400" dirty="0"/>
+                        <a:rPr lang="en-US" sz="2000" dirty="0"/>
                         <a:t>Subgroup</a:t>
                       </a:r>
                     </a:p>
@@ -6328,6 +9166,11 @@
                       <a:noFill/>
                       <a:prstDash val="solid"/>
                     </a:lnBlToTr>
+                    <a:solidFill>
+                      <a:schemeClr val="accent1">
+                        <a:lumMod val="75000"/>
+                      </a:schemeClr>
+                    </a:solidFill>
                   </a:tcPr>
                 </a:tc>
                 <a:tc>
@@ -6337,7 +9180,7 @@
                     <a:p>
                       <a:pPr algn="ctr"/>
                       <a:r>
-                        <a:rPr lang="en-US" sz="2400" dirty="0"/>
+                        <a:rPr lang="en-US" sz="2000" dirty="0"/>
                         <a:t>Observations</a:t>
                       </a:r>
                     </a:p>
@@ -6381,6 +9224,11 @@
                       <a:noFill/>
                       <a:prstDash val="solid"/>
                     </a:lnBlToTr>
+                    <a:solidFill>
+                      <a:schemeClr val="accent1">
+                        <a:lumMod val="75000"/>
+                      </a:schemeClr>
+                    </a:solidFill>
                   </a:tcPr>
                 </a:tc>
                 <a:tc>
@@ -6390,7 +9238,7 @@
                     <a:p>
                       <a:pPr algn="ctr"/>
                       <a:r>
-                        <a:rPr lang="en-US" sz="2400" dirty="0"/>
+                        <a:rPr lang="en-US" sz="2000" dirty="0"/>
                         <a:t>Events</a:t>
                       </a:r>
                     </a:p>
@@ -6434,6 +9282,11 @@
                       <a:noFill/>
                       <a:prstDash val="solid"/>
                     </a:lnBlToTr>
+                    <a:solidFill>
+                      <a:schemeClr val="accent1">
+                        <a:lumMod val="75000"/>
+                      </a:schemeClr>
+                    </a:solidFill>
                   </a:tcPr>
                 </a:tc>
                 <a:tc>
@@ -6443,7 +9296,7 @@
                     <a:p>
                       <a:pPr algn="ctr"/>
                       <a:r>
-                        <a:rPr lang="en-US" sz="2400" dirty="0"/>
+                        <a:rPr lang="en-US" sz="2000" dirty="0"/>
                         <a:t>HR: Observed / (Assumed)</a:t>
                       </a:r>
                     </a:p>
@@ -6487,6 +9340,11 @@
                       <a:noFill/>
                       <a:prstDash val="solid"/>
                     </a:lnBlToTr>
+                    <a:solidFill>
+                      <a:schemeClr val="accent1">
+                        <a:lumMod val="75000"/>
+                      </a:schemeClr>
+                    </a:solidFill>
                   </a:tcPr>
                 </a:tc>
                 <a:tc>
@@ -6496,10 +9354,9 @@
                     <a:p>
                       <a:pPr algn="ctr"/>
                       <a:r>
-                        <a:rPr lang="en-US" sz="2400"/>
+                        <a:rPr lang="en-US" sz="2000" dirty="0"/>
                         <a:t>Sample Needed for 80% Power</a:t>
                       </a:r>
-                      <a:endParaRPr lang="en-US" sz="2400" dirty="0"/>
                     </a:p>
                   </a:txBody>
                   <a:tcPr>
@@ -6541,6 +9398,11 @@
                       <a:noFill/>
                       <a:prstDash val="solid"/>
                     </a:lnBlToTr>
+                    <a:solidFill>
+                      <a:schemeClr val="accent1">
+                        <a:lumMod val="75000"/>
+                      </a:schemeClr>
+                    </a:solidFill>
                   </a:tcPr>
                 </a:tc>
                 <a:extLst>
@@ -6556,7 +9418,7 @@
                     <a:lstStyle/>
                     <a:p>
                       <a:r>
-                        <a:rPr lang="en-US" sz="2400" dirty="0"/>
+                        <a:rPr lang="en-US" sz="2000" dirty="0"/>
                         <a:t>Overall</a:t>
                       </a:r>
                     </a:p>
@@ -6609,7 +9471,7 @@
                     <a:p>
                       <a:pPr algn="ctr"/>
                       <a:r>
-                        <a:rPr lang="en-US" sz="2400" dirty="0"/>
+                        <a:rPr lang="en-US" sz="2000" dirty="0"/>
                         <a:t>1151</a:t>
                       </a:r>
                     </a:p>
@@ -6668,7 +9530,7 @@
                     <a:p>
                       <a:pPr algn="ctr"/>
                       <a:r>
-                        <a:rPr lang="en-US" sz="2400" dirty="0"/>
+                        <a:rPr lang="en-US" sz="2000" dirty="0"/>
                         <a:t>96</a:t>
                       </a:r>
                     </a:p>
@@ -6727,7 +9589,7 @@
                     <a:p>
                       <a:pPr algn="ctr"/>
                       <a:r>
-                        <a:rPr lang="en-US" sz="2400" dirty="0"/>
+                        <a:rPr lang="en-US" sz="2000" dirty="0"/>
                         <a:t>0.517</a:t>
                       </a:r>
                     </a:p>
@@ -6786,7 +9648,7 @@
                     <a:p>
                       <a:pPr algn="ctr"/>
                       <a:r>
-                        <a:rPr lang="en-US" sz="2400" dirty="0"/>
+                        <a:rPr lang="en-US" sz="2000" dirty="0"/>
                         <a:t>264</a:t>
                       </a:r>
                     </a:p>
@@ -6851,7 +9713,7 @@
                     <a:lstStyle/>
                     <a:p>
                       <a:r>
-                        <a:rPr lang="en-US" sz="2400" dirty="0"/>
+                        <a:rPr lang="en-US" sz="2000" dirty="0"/>
                         <a:t>Female</a:t>
                       </a:r>
                     </a:p>
@@ -6904,7 +9766,7 @@
                     <a:p>
                       <a:pPr algn="ctr"/>
                       <a:r>
-                        <a:rPr lang="en-US" sz="2400" dirty="0"/>
+                        <a:rPr lang="en-US" sz="2000" dirty="0"/>
                         <a:t>951</a:t>
                       </a:r>
                     </a:p>
@@ -6963,7 +9825,7 @@
                     <a:p>
                       <a:pPr algn="ctr"/>
                       <a:r>
-                        <a:rPr lang="en-US" sz="2400" dirty="0"/>
+                        <a:rPr lang="en-US" sz="2000" dirty="0"/>
                         <a:t>81</a:t>
                       </a:r>
                     </a:p>
@@ -7022,7 +9884,7 @@
                     <a:p>
                       <a:pPr algn="ctr"/>
                       <a:r>
-                        <a:rPr lang="en-US" sz="2400" dirty="0"/>
+                        <a:rPr lang="en-US" sz="2000" dirty="0"/>
                         <a:t>0.459</a:t>
                       </a:r>
                     </a:p>
@@ -7081,7 +9943,7 @@
                     <a:p>
                       <a:pPr algn="ctr"/>
                       <a:r>
-                        <a:rPr lang="en-US" sz="2400" dirty="0"/>
+                        <a:rPr lang="en-US" sz="2000" dirty="0"/>
                         <a:t>188</a:t>
                       </a:r>
                     </a:p>
@@ -7146,7 +10008,7 @@
                     <a:lstStyle/>
                     <a:p>
                       <a:r>
-                        <a:rPr lang="en-US" sz="2400" dirty="0"/>
+                        <a:rPr lang="en-US" sz="2000" dirty="0"/>
                         <a:t>Male</a:t>
                       </a:r>
                     </a:p>
@@ -7199,7 +10061,7 @@
                     <a:p>
                       <a:pPr algn="ctr"/>
                       <a:r>
-                        <a:rPr lang="en-US" sz="2400" dirty="0"/>
+                        <a:rPr lang="en-US" sz="2000" dirty="0"/>
                         <a:t>200</a:t>
                       </a:r>
                     </a:p>
@@ -7258,7 +10120,7 @@
                     <a:p>
                       <a:pPr algn="ctr"/>
                       <a:r>
-                        <a:rPr lang="en-US" sz="2400" dirty="0"/>
+                        <a:rPr lang="en-US" sz="2000" dirty="0"/>
                         <a:t>15</a:t>
                       </a:r>
                     </a:p>
@@ -7317,11 +10179,11 @@
                     <a:p>
                       <a:pPr algn="ctr"/>
                       <a:r>
-                        <a:rPr lang="en-US" sz="2400"/>
+                        <a:rPr lang="en-US" sz="2000"/>
                         <a:t>(0.9 – 1.1</a:t>
                       </a:r>
                       <a:r>
-                        <a:rPr lang="en-US" sz="2400" dirty="0"/>
+                        <a:rPr lang="en-US" sz="2000" dirty="0"/>
                         <a:t>)</a:t>
                       </a:r>
                     </a:p>
@@ -7380,10 +10242,10 @@
                     <a:p>
                       <a:pPr algn="ctr"/>
                       <a:r>
-                        <a:rPr lang="en-US" sz="2400"/>
+                        <a:rPr lang="en-US" sz="2000"/>
                         <a:t>2,547 – 13,960</a:t>
                       </a:r>
-                      <a:endParaRPr lang="en-US" sz="2400" dirty="0"/>
+                      <a:endParaRPr lang="en-US" sz="2000" dirty="0"/>
                     </a:p>
                   </a:txBody>
                   <a:tcPr>
@@ -7446,7 +10308,7 @@
                     <a:lstStyle/>
                     <a:p>
                       <a:r>
-                        <a:rPr lang="en-US" sz="2400" dirty="0"/>
+                        <a:rPr lang="en-US" sz="2000" dirty="0"/>
                         <a:t>White</a:t>
                       </a:r>
                     </a:p>
@@ -7499,7 +10361,7 @@
                     <a:p>
                       <a:pPr algn="ctr"/>
                       <a:r>
-                        <a:rPr lang="en-US" sz="2400" dirty="0"/>
+                        <a:rPr lang="en-US" sz="2000" dirty="0"/>
                         <a:t>596</a:t>
                       </a:r>
                     </a:p>
@@ -7558,7 +10420,7 @@
                     <a:p>
                       <a:pPr algn="ctr"/>
                       <a:r>
-                        <a:rPr lang="en-US" sz="2400" dirty="0"/>
+                        <a:rPr lang="en-US" sz="2000" dirty="0"/>
                         <a:t>51</a:t>
                       </a:r>
                     </a:p>
@@ -7617,7 +10479,7 @@
                     <a:p>
                       <a:pPr algn="ctr"/>
                       <a:r>
-                        <a:rPr lang="en-US" sz="2400" dirty="0"/>
+                        <a:rPr lang="en-US" sz="2000" dirty="0"/>
                         <a:t>0.539</a:t>
                       </a:r>
                     </a:p>
@@ -7676,7 +10538,7 @@
                     <a:p>
                       <a:pPr algn="ctr"/>
                       <a:r>
-                        <a:rPr lang="en-US" sz="2400" dirty="0"/>
+                        <a:rPr lang="en-US" sz="2000" dirty="0"/>
                         <a:t>293</a:t>
                       </a:r>
                     </a:p>
@@ -7741,7 +10603,7 @@
                     <a:lstStyle/>
                     <a:p>
                       <a:r>
-                        <a:rPr lang="en-US" sz="2400" dirty="0"/>
+                        <a:rPr lang="en-US" sz="2000" dirty="0"/>
                         <a:t>Black</a:t>
                       </a:r>
                     </a:p>
@@ -7794,7 +10656,7 @@
                     <a:p>
                       <a:pPr algn="ctr"/>
                       <a:r>
-                        <a:rPr lang="en-US" sz="2400" dirty="0"/>
+                        <a:rPr lang="en-US" sz="2000" dirty="0"/>
                         <a:t>327</a:t>
                       </a:r>
                     </a:p>
@@ -7853,7 +10715,7 @@
                     <a:p>
                       <a:pPr algn="ctr"/>
                       <a:r>
-                        <a:rPr lang="en-US" sz="2400" dirty="0"/>
+                        <a:rPr lang="en-US" sz="2000" dirty="0"/>
                         <a:t>21</a:t>
                       </a:r>
                     </a:p>
@@ -7912,7 +10774,7 @@
                     <a:p>
                       <a:pPr algn="ctr"/>
                       <a:r>
-                        <a:rPr lang="en-US" sz="2400" dirty="0"/>
+                        <a:rPr lang="en-US" sz="2000" dirty="0"/>
                         <a:t>0.287</a:t>
                       </a:r>
                     </a:p>
@@ -7971,7 +10833,7 @@
                     <a:p>
                       <a:pPr algn="ctr"/>
                       <a:r>
-                        <a:rPr lang="en-US" sz="2400" dirty="0"/>
+                        <a:rPr lang="en-US" sz="2000" dirty="0"/>
                         <a:t>109</a:t>
                       </a:r>
                     </a:p>
@@ -8036,7 +10898,7 @@
                     <a:lstStyle/>
                     <a:p>
                       <a:r>
-                        <a:rPr lang="en-US" sz="2400" dirty="0"/>
+                        <a:rPr lang="en-US" sz="2000" dirty="0"/>
                         <a:t>Hispanic</a:t>
                       </a:r>
                     </a:p>
@@ -8089,7 +10951,7 @@
                     <a:p>
                       <a:pPr algn="ctr"/>
                       <a:r>
-                        <a:rPr lang="en-US" sz="2400" dirty="0"/>
+                        <a:rPr lang="en-US" sz="2000" dirty="0"/>
                         <a:t>203</a:t>
                       </a:r>
                     </a:p>
@@ -8148,7 +11010,7 @@
                     <a:p>
                       <a:pPr algn="ctr"/>
                       <a:r>
-                        <a:rPr lang="en-US" sz="2400" dirty="0"/>
+                        <a:rPr lang="en-US" sz="2000" dirty="0"/>
                         <a:t>20</a:t>
                       </a:r>
                     </a:p>
@@ -8207,7 +11069,7 @@
                     <a:p>
                       <a:pPr algn="ctr"/>
                       <a:r>
-                        <a:rPr lang="en-US" sz="2400" dirty="0"/>
+                        <a:rPr lang="en-US" sz="2000" dirty="0"/>
                         <a:t>0.628</a:t>
                       </a:r>
                     </a:p>
@@ -8266,7 +11128,7 @@
                     <a:p>
                       <a:pPr algn="ctr"/>
                       <a:r>
-                        <a:rPr lang="en-US" sz="2400" dirty="0"/>
+                        <a:rPr lang="en-US" sz="2000" dirty="0"/>
                         <a:t>447</a:t>
                       </a:r>
                     </a:p>
@@ -8331,7 +11193,7 @@
                     <a:lstStyle/>
                     <a:p>
                       <a:r>
-                        <a:rPr lang="en-US" sz="2400" dirty="0"/>
+                        <a:rPr lang="en-US" sz="2000" dirty="0"/>
                         <a:t>Asian/PI</a:t>
                       </a:r>
                     </a:p>
@@ -8384,7 +11246,7 @@
                     <a:p>
                       <a:pPr algn="ctr"/>
                       <a:r>
-                        <a:rPr lang="en-US" sz="2400" dirty="0"/>
+                        <a:rPr lang="en-US" sz="2000" dirty="0"/>
                         <a:t>14</a:t>
                       </a:r>
                     </a:p>
@@ -8443,7 +11305,7 @@
                     <a:p>
                       <a:pPr algn="ctr"/>
                       <a:r>
-                        <a:rPr lang="en-US" sz="2400" dirty="0"/>
+                        <a:rPr lang="en-US" sz="2000" dirty="0"/>
                         <a:t>3</a:t>
                       </a:r>
                     </a:p>
@@ -8502,11 +11364,11 @@
                     <a:p>
                       <a:pPr algn="ctr"/>
                       <a:r>
-                        <a:rPr lang="en-US" sz="2400"/>
+                        <a:rPr lang="en-US" sz="2000"/>
                         <a:t>(0.9 – 1.1</a:t>
                       </a:r>
                       <a:r>
-                        <a:rPr lang="en-US" sz="2400" dirty="0"/>
+                        <a:rPr lang="en-US" sz="2000" dirty="0"/>
                         <a:t>)</a:t>
                       </a:r>
                     </a:p>
@@ -8565,10 +11427,10 @@
                     <a:p>
                       <a:pPr algn="ctr"/>
                       <a:r>
-                        <a:rPr lang="en-US" sz="2400"/>
+                        <a:rPr lang="en-US" sz="2000"/>
                         <a:t>892 – 4,886</a:t>
                       </a:r>
-                      <a:endParaRPr lang="en-US" sz="2400" dirty="0"/>
+                      <a:endParaRPr lang="en-US" sz="2000" dirty="0"/>
                     </a:p>
                   </a:txBody>
                   <a:tcPr>
@@ -8631,7 +11493,7 @@
                     <a:lstStyle/>
                     <a:p>
                       <a:r>
-                        <a:rPr lang="en-US" sz="2400" dirty="0"/>
+                        <a:rPr lang="en-US" sz="2000" dirty="0"/>
                         <a:t>Other</a:t>
                       </a:r>
                     </a:p>
@@ -8678,7 +11540,7 @@
                     <a:p>
                       <a:pPr algn="ctr"/>
                       <a:r>
-                        <a:rPr lang="en-US" sz="2400" dirty="0"/>
+                        <a:rPr lang="en-US" sz="2000" dirty="0"/>
                         <a:t>11</a:t>
                       </a:r>
                     </a:p>
@@ -8731,7 +11593,7 @@
                     <a:p>
                       <a:pPr algn="ctr"/>
                       <a:r>
-                        <a:rPr lang="en-US" sz="2400" dirty="0"/>
+                        <a:rPr lang="en-US" sz="2000" dirty="0"/>
                         <a:t>1</a:t>
                       </a:r>
                     </a:p>
@@ -8784,11 +11646,11 @@
                     <a:p>
                       <a:pPr algn="ctr"/>
                       <a:r>
-                        <a:rPr lang="en-US" sz="2400"/>
+                        <a:rPr lang="en-US" sz="2000"/>
                         <a:t>(0.9 – 1.1</a:t>
                       </a:r>
                       <a:r>
-                        <a:rPr lang="en-US" sz="2400" dirty="0"/>
+                        <a:rPr lang="en-US" sz="2000" dirty="0"/>
                         <a:t>)</a:t>
                       </a:r>
                     </a:p>
@@ -8841,7 +11703,7 @@
                     <a:p>
                       <a:pPr algn="ctr"/>
                       <a:r>
-                        <a:rPr lang="en-US" sz="2400" dirty="0"/>
+                        <a:rPr lang="en-US" sz="2000" dirty="0"/>
                         <a:t>9,427 – 11,517</a:t>
                       </a:r>
                     </a:p>
@@ -8910,7 +11772,7 @@
 </p:sld>
 </file>
 
-<file path=ppt/slides/slide14.xml><?xml version="1.0" encoding="utf-8"?>
+<file path=ppt/slides/slide13.xml><?xml version="1.0" encoding="utf-8"?>
 <p:sld xmlns:a="http://schemas.openxmlformats.org/drawingml/2006/main" xmlns:r="http://schemas.openxmlformats.org/officeDocument/2006/relationships" xmlns:p="http://schemas.openxmlformats.org/presentationml/2006/main">
   <p:cSld>
     <p:spTree>
@@ -9043,7 +11905,7 @@
           <a:p>
             <a:fld id="{EE78427E-3D83-4E05-BBD0-5A5577BF92C2}" type="slidenum">
               <a:rPr lang="en-US" smtClean="0"/>
-              <a:t>14</a:t>
+              <a:t>13</a:t>
             </a:fld>
             <a:endParaRPr lang="en-US" dirty="0"/>
           </a:p>
@@ -9108,10 +11970,9 @@
           <a:lstStyle/>
           <a:p>
             <a:r>
-              <a:rPr lang="en-US"/>
+              <a:rPr lang="en-US" dirty="0"/>
               <a:t>Today’s topics</a:t>
             </a:r>
-            <a:endParaRPr lang="en-US" dirty="0"/>
           </a:p>
         </p:txBody>
       </p:sp>
@@ -9137,45 +11998,39 @@
           <a:lstStyle/>
           <a:p>
             <a:r>
-              <a:rPr lang="en-US"/>
+              <a:rPr lang="en-US" dirty="0"/>
               <a:t>Research Questions and Study Design</a:t>
             </a:r>
-            <a:endParaRPr lang="en-US" dirty="0"/>
-          </a:p>
-          <a:p>
-            <a:r>
-              <a:rPr lang="en-US"/>
+          </a:p>
+          <a:p>
+            <a:r>
+              <a:rPr lang="en-US" dirty="0"/>
               <a:t>Participant Descriptive Statistics</a:t>
             </a:r>
-            <a:endParaRPr lang="en-US" dirty="0"/>
-          </a:p>
-          <a:p>
-            <a:r>
-              <a:rPr lang="en-US"/>
+          </a:p>
+          <a:p>
+            <a:r>
+              <a:rPr lang="en-US" dirty="0"/>
               <a:t>Survival Analysis Methods</a:t>
             </a:r>
-            <a:endParaRPr lang="en-US" dirty="0"/>
-          </a:p>
-          <a:p>
-            <a:r>
-              <a:rPr lang="en-US"/>
+          </a:p>
+          <a:p>
+            <a:r>
+              <a:rPr lang="en-US" dirty="0"/>
               <a:t>Full Group and Subgroup Results</a:t>
             </a:r>
-            <a:endParaRPr lang="en-US" dirty="0"/>
-          </a:p>
-          <a:p>
-            <a:r>
-              <a:rPr lang="en-US"/>
+          </a:p>
+          <a:p>
+            <a:r>
+              <a:rPr lang="en-US" dirty="0"/>
               <a:t>Power Analysis and Sample Size Requirements</a:t>
             </a:r>
-            <a:endParaRPr lang="en-US" dirty="0"/>
-          </a:p>
-          <a:p>
-            <a:r>
-              <a:rPr lang="en-US"/>
+          </a:p>
+          <a:p>
+            <a:r>
+              <a:rPr lang="en-US" dirty="0"/>
               <a:t>Conclusions </a:t>
             </a:r>
-            <a:endParaRPr lang="en-US" dirty="0"/>
           </a:p>
         </p:txBody>
       </p:sp>
@@ -9290,75 +12145,59 @@
         </p:nvSpPr>
         <p:spPr>
           <a:xfrm>
-            <a:off x="695325" y="1125537"/>
-            <a:ext cx="10515600" cy="4332287"/>
+            <a:off x="695324" y="1125537"/>
+            <a:ext cx="10658475" cy="4332287"/>
           </a:xfrm>
         </p:spPr>
         <p:txBody>
           <a:bodyPr>
-            <a:normAutofit lnSpcReduction="10000"/>
+            <a:normAutofit/>
           </a:bodyPr>
           <a:lstStyle/>
+          <a:p>
+            <a:pPr marL="514350" lvl="1" indent="-514350">
+              <a:buFont typeface="+mj-lt"/>
+              <a:buAutoNum type="arabicPeriod"/>
+            </a:pPr>
+            <a:r>
+              <a:rPr lang="en-US" sz="2800" dirty="0"/>
+              <a:t>Were sex and race/ethnicity subgroups adequately powered to detect treatment effects?</a:t>
+            </a:r>
+          </a:p>
+          <a:p>
+            <a:pPr marL="514350" lvl="1" indent="-514350">
+              <a:buFont typeface="+mj-lt"/>
+              <a:buAutoNum type="arabicPeriod"/>
+            </a:pPr>
+            <a:r>
+              <a:rPr lang="en-US" sz="2800" dirty="0"/>
+              <a:t>Was indinavir’s benefit consistent across subgroups?</a:t>
+            </a:r>
+          </a:p>
+          <a:p>
+            <a:pPr marL="514350" lvl="1" indent="-514350">
+              <a:buFont typeface="+mj-lt"/>
+              <a:buAutoNum type="arabicPeriod"/>
+            </a:pPr>
+            <a:r>
+              <a:rPr lang="en-US" sz="2800" dirty="0"/>
+              <a:t>What enrollment would be required in a future study to achieve adequate power for all subgroups?</a:t>
+            </a:r>
+          </a:p>
           <a:p>
             <a:pPr marL="971550" lvl="1" indent="-514350">
               <a:buFont typeface="+mj-lt"/>
               <a:buAutoNum type="arabicParenR"/>
             </a:pPr>
-            <a:r>
-              <a:rPr lang="en-US" sz="3200"/>
-              <a:t>Were sex and race/ethnicity subgroups adequately powered to detect treatment effects</a:t>
-            </a:r>
-            <a:r>
-              <a:rPr lang="en-US" sz="3200" dirty="0"/>
-              <a:t>?</a:t>
-            </a:r>
-          </a:p>
-          <a:p>
-            <a:pPr marL="971550" lvl="1" indent="-514350">
-              <a:buFont typeface="+mj-lt"/>
-              <a:buAutoNum type="arabicParenR"/>
-            </a:pPr>
-            <a:r>
-              <a:rPr lang="en-US" sz="3200"/>
-              <a:t>Was indinavir’s benefit consistent across subgroups</a:t>
-            </a:r>
-            <a:r>
-              <a:rPr lang="en-US" sz="3200" dirty="0"/>
-              <a:t>?</a:t>
-            </a:r>
-          </a:p>
-          <a:p>
-            <a:pPr marL="971550" lvl="1" indent="-514350">
-              <a:buFont typeface="+mj-lt"/>
-              <a:buAutoNum type="arabicParenR"/>
-            </a:pPr>
-            <a:r>
-              <a:rPr lang="en-US" sz="3200"/>
-              <a:t>What enrollment would be required in a future study to achieve adequate power for all subgroups</a:t>
-            </a:r>
-            <a:r>
-              <a:rPr lang="en-US" sz="3200" dirty="0"/>
-              <a:t>?</a:t>
-            </a:r>
-          </a:p>
-          <a:p>
-            <a:pPr marL="971550" lvl="1" indent="-514350">
-              <a:buFont typeface="+mj-lt"/>
-              <a:buAutoNum type="arabicParenR"/>
-            </a:pPr>
-            <a:endParaRPr lang="en-US" sz="3200" dirty="0"/>
+            <a:endParaRPr lang="en-US" sz="2800" dirty="0"/>
           </a:p>
           <a:p>
             <a:pPr marL="457200" lvl="1" indent="0">
               <a:buNone/>
             </a:pPr>
             <a:r>
-              <a:rPr lang="en-US" sz="3200" b="1"/>
-              <a:t>Key challenge</a:t>
-            </a:r>
-            <a:r>
-              <a:rPr lang="en-US" sz="3200" b="1" dirty="0"/>
-              <a:t>:</a:t>
+              <a:rPr lang="en-US" sz="2800" b="1" dirty="0"/>
+              <a:t>Key challenge:</a:t>
             </a:r>
           </a:p>
           <a:p>
@@ -9366,10 +12205,9 @@
               <a:buNone/>
             </a:pPr>
             <a:r>
-              <a:rPr lang="en-US" sz="3200"/>
+              <a:rPr lang="en-US" sz="2800" dirty="0"/>
               <a:t>In survival analyses, statistical power is driven by number of observed events, not sample size alone</a:t>
             </a:r>
-            <a:endParaRPr lang="en-US" sz="3200" dirty="0"/>
           </a:p>
         </p:txBody>
       </p:sp>
@@ -9465,12 +12303,8 @@
           <a:lstStyle/>
           <a:p>
             <a:r>
-              <a:rPr lang="en-US"/>
-              <a:t>ACTG 320 Study Design (Hammer et al. 1997</a:t>
-            </a:r>
-            <a:r>
               <a:rPr lang="en-US" dirty="0"/>
-              <a:t>)</a:t>
+              <a:t>ACTG 320 Study Design (Hammer et al. 1997)</a:t>
             </a:r>
           </a:p>
         </p:txBody>
@@ -9493,9 +12327,15 @@
         </p:nvSpPr>
         <p:spPr>
           <a:xfrm>
-            <a:off x="695325" y="1050000"/>
-            <a:ext cx="5200000" cy="5500000"/>
+            <a:off x="695325" y="1125538"/>
+            <a:ext cx="5105502" cy="5452719"/>
           </a:xfrm>
+          <a:solidFill>
+            <a:schemeClr val="tx2">
+              <a:lumMod val="10000"/>
+              <a:lumOff val="90000"/>
+            </a:schemeClr>
+          </a:solidFill>
         </p:spPr>
         <p:txBody>
           <a:bodyPr>
@@ -9503,55 +12343,63 @@
           </a:bodyPr>
           <a:lstStyle/>
           <a:p>
-            <a:r>
-              <a:rPr lang="en-US" sz="2600"/>
-              <a:t>Multi-center, randomized, double-blind, placebo-controlled trial</a:t>
-            </a:r>
-            <a:endParaRPr lang="en-US" sz="2600" dirty="0"/>
-          </a:p>
-          <a:p>
-            <a:r>
-              <a:rPr lang="en-US" sz="2600"/>
-              <a:t>1,151 adults with advanced HIV (CD4 ≤ 200 cells</a:t>
-            </a:r>
-            <a:r>
-              <a:rPr lang="en-US" sz="2600" dirty="0"/>
-              <a:t>/mm³)</a:t>
-            </a:r>
-          </a:p>
-          <a:p>
-            <a:r>
-              <a:rPr lang="en-US" sz="2600"/>
-              <a:t>Participants randomized within two CD4 count blocks</a:t>
-            </a:r>
-            <a:endParaRPr lang="en-US" sz="2600" dirty="0"/>
-          </a:p>
-          <a:p>
-            <a:endParaRPr lang="en-US" sz="2200" dirty="0"/>
-          </a:p>
-          <a:p>
             <a:pPr marL="0" indent="0">
               <a:buNone/>
             </a:pPr>
             <a:r>
-              <a:rPr lang="en-US" sz="2400" b="1"/>
+              <a:rPr lang="en-US" sz="2400" b="1" dirty="0"/>
+              <a:t>Structure</a:t>
+            </a:r>
+          </a:p>
+          <a:p>
+            <a:r>
+              <a:rPr lang="en-US" sz="2400" dirty="0"/>
+              <a:t>Multi-center, randomized, double-blind, placebo-controlled trial</a:t>
+            </a:r>
+          </a:p>
+          <a:p>
+            <a:r>
+              <a:rPr lang="en-US" sz="2400" dirty="0"/>
+              <a:t>1,151 adults with advanced HIV (CD4 ≤ 200 cells/mm³)</a:t>
+            </a:r>
+          </a:p>
+          <a:p>
+            <a:r>
+              <a:rPr lang="en-US" sz="2400" dirty="0"/>
+              <a:t>Participants randomized within two CD4 count blocks</a:t>
+            </a:r>
+          </a:p>
+          <a:p>
+            <a:endParaRPr lang="en-US" sz="2400" dirty="0"/>
+          </a:p>
+          <a:p>
+            <a:pPr marL="0" indent="0">
+              <a:buNone/>
+            </a:pPr>
+            <a:r>
+              <a:rPr lang="en-US" sz="2400" b="1" dirty="0"/>
               <a:t>Treatment Groups</a:t>
             </a:r>
-            <a:endParaRPr lang="en-US" sz="2400" b="1" dirty="0"/>
-          </a:p>
-          <a:p>
-            <a:r>
-              <a:rPr lang="en-US" sz="2600"/>
-              <a:t>Control: standard two-drug regimen</a:t>
-            </a:r>
-            <a:endParaRPr lang="en-US" sz="2600" dirty="0"/>
-          </a:p>
-          <a:p>
-            <a:r>
-              <a:rPr lang="en-US" sz="2600"/>
-              <a:t>Treatment: same regimen + protease inhibitor indinavir</a:t>
-            </a:r>
-            <a:endParaRPr lang="en-US" sz="2600" dirty="0"/>
+          </a:p>
+          <a:p>
+            <a:r>
+              <a:rPr lang="en-US" sz="2400" b="1" dirty="0"/>
+              <a:t>Control: </a:t>
+            </a:r>
+            <a:r>
+              <a:rPr lang="en-US" sz="2400" dirty="0"/>
+              <a:t>standard two-drug regimen</a:t>
+            </a:r>
+          </a:p>
+          <a:p>
+            <a:r>
+              <a:rPr lang="en-US" sz="2400" b="1" dirty="0"/>
+              <a:t>Treatment: </a:t>
+            </a:r>
+            <a:r>
+              <a:rPr lang="en-US" sz="2400" dirty="0"/>
+              <a:t>same regimen + protease inhibitor indinavir</a:t>
+            </a:r>
           </a:p>
         </p:txBody>
       </p:sp>
@@ -9569,34 +12417,38 @@
         </p:nvSpPr>
         <p:spPr>
           <a:xfrm>
-            <a:off x="6100000" y="1050000"/>
-            <a:ext cx="5800000" cy="4893647"/>
+            <a:off x="6275672" y="1125538"/>
+            <a:ext cx="5508825" cy="5424461"/>
           </a:xfrm>
           <a:prstGeom prst="rect">
             <a:avLst/>
           </a:prstGeom>
+          <a:solidFill>
+            <a:schemeClr val="tx2">
+              <a:lumMod val="10000"/>
+              <a:lumOff val="90000"/>
+            </a:schemeClr>
+          </a:solidFill>
         </p:spPr>
         <p:txBody>
           <a:bodyPr wrap="square" rtlCol="0">
-            <a:spAutoFit/>
+            <a:noAutofit/>
           </a:bodyPr>
           <a:lstStyle/>
           <a:p>
             <a:r>
-              <a:rPr lang="en-US" sz="2400" b="1"/>
+              <a:rPr lang="en-US" sz="2400" b="1" dirty="0"/>
               <a:t>Primary Outcome</a:t>
             </a:r>
-            <a:endParaRPr lang="en-US" sz="2400" b="1" dirty="0"/>
-          </a:p>
-          <a:p>
-            <a:pPr lvl="1"/>
-            <a:r>
-              <a:rPr lang="en-US" sz="2400"/>
-              <a:t>Days to AIDS-defining illness or death (</a:t>
-            </a:r>
+          </a:p>
+          <a:p>
+            <a:pPr marL="342900" lvl="1" indent="-342900">
+              <a:buFont typeface="Arial" panose="020B0604020202020204" pitchFamily="34" charset="0"/>
+              <a:buChar char="•"/>
+            </a:pPr>
             <a:r>
               <a:rPr lang="en-US" sz="2400" dirty="0"/>
-              <a:t>time-to-event)</a:t>
+              <a:t>Days to AIDS-defining illness or death (time-to-event)</a:t>
             </a:r>
           </a:p>
           <a:p>
@@ -9604,54 +12456,56 @@
           </a:p>
           <a:p>
             <a:r>
-              <a:rPr lang="en-US" sz="2400" b="1"/>
+              <a:rPr lang="en-US" sz="2400" b="1" dirty="0"/>
               <a:t>Subgroups Analyzed</a:t>
             </a:r>
-            <a:endParaRPr lang="en-US" sz="2400" b="1" dirty="0"/>
-          </a:p>
-          <a:p>
-            <a:pPr lvl="1"/>
-            <a:r>
-              <a:rPr lang="en-US" sz="2400"/>
-              <a:t>Sex: Female (83%), Male (</a:t>
+          </a:p>
+          <a:p>
+            <a:pPr marL="342900" lvl="1" indent="-342900">
+              <a:buFont typeface="Arial" panose="020B0604020202020204" pitchFamily="34" charset="0"/>
+              <a:buChar char="•"/>
+            </a:pPr>
+            <a:r>
+              <a:rPr lang="en-US" sz="2400" b="1" dirty="0"/>
+              <a:t>Sex: </a:t>
             </a:r>
             <a:r>
               <a:rPr lang="en-US" sz="2400" dirty="0"/>
-              <a:t>17%)</a:t>
-            </a:r>
-          </a:p>
-          <a:p>
-            <a:pPr lvl="1"/>
+              <a:t>Female (83%), Male (17%)</a:t>
+            </a:r>
+          </a:p>
+          <a:p>
+            <a:pPr marL="342900" lvl="1" indent="-342900">
+              <a:buFont typeface="Arial" panose="020B0604020202020204" pitchFamily="34" charset="0"/>
+              <a:buChar char="•"/>
+            </a:pPr>
+            <a:r>
+              <a:rPr lang="en-US" sz="2400" b="1" dirty="0"/>
+              <a:t>Race/Ethnicity: </a:t>
+            </a:r>
             <a:r>
               <a:rPr lang="en-US" sz="2400" dirty="0"/>
-              <a:t>Race/</a:t>
-            </a:r>
-            <a:r>
-              <a:rPr lang="en-US" sz="2400"/>
-              <a:t>Ethnicity: White (52%), Black (28%), Hispanic (18%), Asian/PI (1%), Other (</a:t>
-            </a:r>
+              <a:t>White (52%), Black (28%), Hispanic (18%), Asian/PI (1%), Other (1%)</a:t>
+            </a:r>
+          </a:p>
+          <a:p>
+            <a:endParaRPr lang="en-US" sz="2400" dirty="0"/>
+          </a:p>
+          <a:p>
+            <a:r>
+              <a:rPr lang="en-US" sz="2400" b="1" dirty="0"/>
+              <a:t>Other Covariates</a:t>
+            </a:r>
+          </a:p>
+          <a:p>
+            <a:pPr marL="342900" lvl="1" indent="-342900">
+              <a:buFont typeface="Arial" panose="020B0604020202020204" pitchFamily="34" charset="0"/>
+              <a:buChar char="•"/>
+            </a:pPr>
             <a:r>
               <a:rPr lang="en-US" sz="2400" dirty="0"/>
-              <a:t>1%)</a:t>
-            </a:r>
-          </a:p>
-          <a:p>
-            <a:endParaRPr lang="en-US" sz="2400" dirty="0"/>
-          </a:p>
-          <a:p>
-            <a:r>
-              <a:rPr lang="en-US" sz="2400" b="1"/>
-              <a:t>Covariates Adjusted</a:t>
-            </a:r>
-            <a:endParaRPr lang="en-US" sz="2400" b="1" dirty="0"/>
-          </a:p>
-          <a:p>
-            <a:pPr lvl="1"/>
-            <a:r>
-              <a:rPr lang="en-US" sz="2400"/>
               <a:t>Age, baseline CD4 count, Karnofsky score, prior ZDV use, CD4 stratum</a:t>
             </a:r>
-            <a:endParaRPr lang="en-US" sz="2400" dirty="0"/>
           </a:p>
         </p:txBody>
       </p:sp>
@@ -9763,14 +12617,14 @@
           <p:nvPr>
             <p:extLst>
               <p:ext uri="{D42A27DB-BD31-4B8C-83A1-F6EECF244321}">
-                <p14:modId xmlns:p14="http://schemas.microsoft.com/office/powerpoint/2010/main" val="955465446"/>
+                <p14:modId xmlns:p14="http://schemas.microsoft.com/office/powerpoint/2010/main" val="321888817"/>
               </p:ext>
             </p:extLst>
           </p:nvPr>
         </p:nvGraphicFramePr>
         <p:xfrm>
-          <a:off x="3270522" y="944563"/>
-          <a:ext cx="5650955" cy="1438719"/>
+          <a:off x="3270522" y="1125538"/>
+          <a:ext cx="5650955" cy="1188720"/>
         </p:xfrm>
         <a:graphic>
           <a:graphicData uri="http://schemas.openxmlformats.org/drawingml/2006/table">
@@ -9801,17 +12655,16 @@
                   </a:extLst>
                 </a:gridCol>
               </a:tblGrid>
-              <a:tr h="479573">
+              <a:tr h="201701">
                 <a:tc>
                   <a:txBody>
                     <a:bodyPr/>
                     <a:lstStyle/>
                     <a:p>
                       <a:r>
-                        <a:rPr lang="en-US" sz="2000"/>
+                        <a:rPr lang="en-US" sz="2000" dirty="0"/>
                         <a:t>Treatment Group</a:t>
                       </a:r>
-                      <a:endParaRPr lang="en-US" sz="2000" dirty="0"/>
                     </a:p>
                   </a:txBody>
                   <a:tcPr>
@@ -9847,6 +12700,11 @@
                       <a:noFill/>
                       <a:prstDash val="solid"/>
                     </a:lnBlToTr>
+                    <a:solidFill>
+                      <a:schemeClr val="accent1">
+                        <a:lumMod val="75000"/>
+                      </a:schemeClr>
+                    </a:solidFill>
                   </a:tcPr>
                 </a:tc>
                 <a:tc>
@@ -9900,6 +12758,11 @@
                       <a:noFill/>
                       <a:prstDash val="solid"/>
                     </a:lnBlToTr>
+                    <a:solidFill>
+                      <a:schemeClr val="accent1">
+                        <a:lumMod val="75000"/>
+                      </a:schemeClr>
+                    </a:solidFill>
                   </a:tcPr>
                 </a:tc>
                 <a:tc>
@@ -9947,6 +12810,11 @@
                       <a:noFill/>
                       <a:prstDash val="solid"/>
                     </a:lnBlToTr>
+                    <a:solidFill>
+                      <a:schemeClr val="accent1">
+                        <a:lumMod val="75000"/>
+                      </a:schemeClr>
+                    </a:solidFill>
                   </a:tcPr>
                 </a:tc>
                 <a:extLst>
@@ -9955,7 +12823,7 @@
                   </a:ext>
                 </a:extLst>
               </a:tr>
-              <a:tr h="479573">
+              <a:tr h="201701">
                 <a:tc>
                   <a:txBody>
                     <a:bodyPr/>
@@ -10130,7 +12998,7 @@
                   </a:ext>
                 </a:extLst>
               </a:tr>
-              <a:tr h="479573">
+              <a:tr h="201701">
                 <a:tc>
                   <a:txBody>
                     <a:bodyPr/>
@@ -10306,14 +13174,14 @@
           <p:nvPr>
             <p:extLst>
               <p:ext uri="{D42A27DB-BD31-4B8C-83A1-F6EECF244321}">
-                <p14:modId xmlns:p14="http://schemas.microsoft.com/office/powerpoint/2010/main" val="2797068068"/>
+                <p14:modId xmlns:p14="http://schemas.microsoft.com/office/powerpoint/2010/main" val="3118696515"/>
               </p:ext>
             </p:extLst>
           </p:nvPr>
         </p:nvGraphicFramePr>
         <p:xfrm>
-          <a:off x="2255420" y="2705646"/>
-          <a:ext cx="7395410" cy="3650704"/>
+          <a:off x="1674796" y="2705646"/>
+          <a:ext cx="8835989" cy="3650704"/>
         </p:xfrm>
         <a:graphic>
           <a:graphicData uri="http://schemas.openxmlformats.org/drawingml/2006/table">
@@ -10322,35 +13190,35 @@
                 <a:tableStyleId>{5C22544A-7EE6-4342-B048-85BDC9FD1C3A}</a:tableStyleId>
               </a:tblPr>
               <a:tblGrid>
-                <a:gridCol w="1223263">
+                <a:gridCol w="1461547">
                   <a:extLst>
                     <a:ext uri="{9D8B030D-6E8A-4147-A177-3AD203B41FA5}">
                       <a16:colId xmlns:a16="http://schemas.microsoft.com/office/drawing/2014/main" val="772587959"/>
                     </a:ext>
                   </a:extLst>
                 </a:gridCol>
-                <a:gridCol w="1609948">
+                <a:gridCol w="1923556">
                   <a:extLst>
                     <a:ext uri="{9D8B030D-6E8A-4147-A177-3AD203B41FA5}">
                       <a16:colId xmlns:a16="http://schemas.microsoft.com/office/drawing/2014/main" val="1333839601"/>
                     </a:ext>
                   </a:extLst>
                 </a:gridCol>
-                <a:gridCol w="1439489">
+                <a:gridCol w="1719892">
                   <a:extLst>
                     <a:ext uri="{9D8B030D-6E8A-4147-A177-3AD203B41FA5}">
                       <a16:colId xmlns:a16="http://schemas.microsoft.com/office/drawing/2014/main" val="2467871587"/>
                     </a:ext>
                   </a:extLst>
                 </a:gridCol>
-                <a:gridCol w="1561355">
+                <a:gridCol w="1865497">
                   <a:extLst>
                     <a:ext uri="{9D8B030D-6E8A-4147-A177-3AD203B41FA5}">
                       <a16:colId xmlns:a16="http://schemas.microsoft.com/office/drawing/2014/main" val="1879297196"/>
                     </a:ext>
                   </a:extLst>
                 </a:gridCol>
-                <a:gridCol w="1561355">
+                <a:gridCol w="1865497">
                   <a:extLst>
                     <a:ext uri="{9D8B030D-6E8A-4147-A177-3AD203B41FA5}">
                       <a16:colId xmlns:a16="http://schemas.microsoft.com/office/drawing/2014/main" val="2117588414"/>
@@ -10403,6 +13271,11 @@
                       <a:noFill/>
                       <a:prstDash val="solid"/>
                     </a:lnBlToTr>
+                    <a:solidFill>
+                      <a:schemeClr val="accent1">
+                        <a:lumMod val="75000"/>
+                      </a:schemeClr>
+                    </a:solidFill>
                   </a:tcPr>
                 </a:tc>
                 <a:tc>
@@ -10456,6 +13329,11 @@
                       <a:noFill/>
                       <a:prstDash val="solid"/>
                     </a:lnBlToTr>
+                    <a:solidFill>
+                      <a:schemeClr val="accent1">
+                        <a:lumMod val="75000"/>
+                      </a:schemeClr>
+                    </a:solidFill>
                   </a:tcPr>
                 </a:tc>
                 <a:tc>
@@ -10509,6 +13387,11 @@
                       <a:noFill/>
                       <a:prstDash val="solid"/>
                     </a:lnBlToTr>
+                    <a:solidFill>
+                      <a:schemeClr val="accent1">
+                        <a:lumMod val="75000"/>
+                      </a:schemeClr>
+                    </a:solidFill>
                   </a:tcPr>
                 </a:tc>
                 <a:tc>
@@ -10563,6 +13446,11 @@
                       <a:noFill/>
                       <a:prstDash val="solid"/>
                     </a:lnBlToTr>
+                    <a:solidFill>
+                      <a:schemeClr val="accent1">
+                        <a:lumMod val="75000"/>
+                      </a:schemeClr>
+                    </a:solidFill>
                   </a:tcPr>
                 </a:tc>
                 <a:tc>
@@ -10572,10 +13460,9 @@
                     <a:p>
                       <a:pPr algn="ctr"/>
                       <a:r>
-                        <a:rPr lang="en-US" sz="2000"/>
+                        <a:rPr lang="en-US" sz="2000" dirty="0"/>
                         <a:t>Event Rate %</a:t>
                       </a:r>
-                      <a:endParaRPr lang="en-US" sz="2000" dirty="0"/>
                     </a:p>
                   </a:txBody>
                   <a:tcPr>
@@ -10617,6 +13504,11 @@
                       <a:noFill/>
                       <a:prstDash val="solid"/>
                     </a:lnBlToTr>
+                    <a:solidFill>
+                      <a:schemeClr val="accent1">
+                        <a:lumMod val="75000"/>
+                      </a:schemeClr>
+                    </a:solidFill>
                   </a:tcPr>
                 </a:tc>
                 <a:extLst>
@@ -13005,16 +15897,22 @@
             <p:ph type="title"/>
           </p:nvPr>
         </p:nvSpPr>
-        <p:spPr/>
+        <p:spPr>
+          <a:xfrm>
+            <a:off x="695325" y="152400"/>
+            <a:ext cx="10515600" cy="1325563"/>
+          </a:xfrm>
+        </p:spPr>
         <p:txBody>
-          <a:bodyPr/>
+          <a:bodyPr>
+            <a:normAutofit/>
+          </a:bodyPr>
           <a:lstStyle/>
           <a:p>
             <a:r>
-              <a:rPr lang="en-US"/>
-              <a:t>Cox Proportional Hazard Models</a:t>
-            </a:r>
-            <a:endParaRPr lang="en-US" dirty="0"/>
+              <a:rPr lang="en-US" sz="4000" dirty="0"/>
+              <a:t>Survival Analysis Methods: Cox Proportional Hazard Models</a:t>
+            </a:r>
           </a:p>
         </p:txBody>
       </p:sp>
@@ -13036,13 +15934,16 @@
         </p:nvSpPr>
         <p:spPr>
           <a:xfrm>
-            <a:off x="838200" y="5609557"/>
-            <a:ext cx="10515600" cy="818900"/>
+            <a:off x="1553678" y="5852158"/>
+            <a:ext cx="9257898" cy="706003"/>
           </a:xfrm>
+          <a:solidFill>
+            <a:schemeClr val="bg2"/>
+          </a:solidFill>
         </p:spPr>
         <p:txBody>
           <a:bodyPr>
-            <a:normAutofit lnSpcReduction="10000"/>
+            <a:normAutofit/>
           </a:bodyPr>
           <a:lstStyle/>
           <a:p>
@@ -13050,10 +15951,13 @@
               <a:buNone/>
             </a:pPr>
             <a:r>
-              <a:rPr lang="en-US"/>
-              <a:t>Hazard Ratio (HR) compares the risk of an event occurring between two groups or individuals</a:t>
-            </a:r>
-            <a:endParaRPr lang="en-US" dirty="0"/>
+              <a:rPr lang="en-US" sz="2000" b="1" dirty="0"/>
+              <a:t>Hazard Ratio (HR) </a:t>
+            </a:r>
+            <a:r>
+              <a:rPr lang="en-US" sz="2000" dirty="0"/>
+              <a:t>compares the risk of an event occurring between two groups or individuals</a:t>
+            </a:r>
           </a:p>
         </p:txBody>
       </p:sp>
@@ -13114,8 +16018,8 @@
         </p:blipFill>
         <p:spPr>
           <a:xfrm>
-            <a:off x="1717638" y="1248443"/>
-            <a:ext cx="8756724" cy="4361114"/>
+            <a:off x="1553678" y="1327730"/>
+            <a:ext cx="9084644" cy="4524428"/>
           </a:xfrm>
           <a:prstGeom prst="rect">
             <a:avLst/>
@@ -13505,24 +16409,21 @@
                 </a:endParaRPr>
               </a:p>
               <a:p>
-                <a:pPr/>
                 <a:endParaRPr lang="en-US" sz="2400" dirty="0"/>
               </a:p>
               <a:p>
                 <a:pPr lvl="1"/>
                 <a:r>
-                  <a:rPr lang="en-US" sz="2400"/>
-                  <a:t>T is binary treatment</a:t>
+                  <a:rPr lang="en-US" sz="2400" dirty="0"/>
+                  <a:t>T = binary treatment</a:t>
                 </a:r>
-                <a:endParaRPr lang="en-US" sz="2400" dirty="0"/>
               </a:p>
               <a:p>
                 <a:pPr lvl="1"/>
                 <a:r>
-                  <a:rPr lang="en-US" sz="2400"/>
-                  <a:t>Z is covariate vector</a:t>
+                  <a:rPr lang="en-US" sz="2400" dirty="0"/>
+                  <a:t>Z = covariate vector</a:t>
                 </a:r>
-                <a:endParaRPr lang="en-US" sz="2400" dirty="0"/>
               </a:p>
             </p:txBody>
           </p:sp>
@@ -13615,8 +16516,8 @@
         </p:nvSpPr>
         <p:spPr>
           <a:xfrm>
-            <a:off x="1808245" y="1264761"/>
-            <a:ext cx="8432633" cy="1938992"/>
+            <a:off x="695325" y="1125538"/>
+            <a:ext cx="9471750" cy="1200329"/>
           </a:xfrm>
           <a:prstGeom prst="rect">
             <a:avLst/>
@@ -13634,12 +16535,8 @@
               <a:buChar char="•"/>
             </a:pPr>
             <a:r>
-              <a:rPr lang="en-US" sz="2400"/>
-              <a:t>Treatment HR = 0.517 [0.339, 0.788] (p-value = 0.002</a:t>
-            </a:r>
-            <a:r>
               <a:rPr lang="en-US" sz="2400" dirty="0"/>
-              <a:t>)</a:t>
+              <a:t>Treatment HR = 0.517 [0.339, 0.788] (p-value = 0.002)</a:t>
             </a:r>
           </a:p>
           <a:p>
@@ -13648,12 +16545,8 @@
               <a:buChar char="•"/>
             </a:pPr>
             <a:r>
-              <a:rPr lang="en-US" sz="2400"/>
-              <a:t>Indinavir therapy reduced hazard of AIDS or death by ~</a:t>
-            </a:r>
-            <a:r>
               <a:rPr lang="en-US" sz="2400" dirty="0"/>
-              <a:t>48%</a:t>
+              <a:t>Indinavir therapy reduced hazard of AIDS or death by ~48%</a:t>
             </a:r>
           </a:p>
           <a:p>
@@ -13662,27 +16555,9 @@
               <a:buChar char="•"/>
             </a:pPr>
             <a:r>
-              <a:rPr lang="en-US" sz="2400"/>
-              <a:t>Consistent with original finding Hammer et al. (</a:t>
-            </a:r>
-            <a:r>
               <a:rPr lang="en-US" sz="2400" dirty="0"/>
-              <a:t>1997)</a:t>
-            </a:r>
-          </a:p>
-          <a:p>
-            <a:pPr marL="342900" indent="-342900">
-              <a:buFont typeface="Arial" panose="020B0604020202020204" pitchFamily="34" charset="0"/>
-              <a:buChar char="•"/>
-            </a:pPr>
-            <a:endParaRPr lang="en-US" sz="2400" dirty="0"/>
-          </a:p>
-          <a:p>
-            <a:pPr marL="342900" indent="-342900">
-              <a:buFont typeface="Arial" panose="020B0604020202020204" pitchFamily="34" charset="0"/>
-              <a:buChar char="•"/>
-            </a:pPr>
-            <a:endParaRPr lang="en-US" sz="2400" dirty="0"/>
+              <a:t>Consistent with original finding Hammer et al. (1997)</a:t>
+            </a:r>
           </a:p>
         </p:txBody>
       </p:sp>
@@ -13714,7 +16589,7 @@
         </p:blipFill>
         <p:spPr>
           <a:xfrm>
-            <a:off x="5126096" y="2576802"/>
+            <a:off x="4951859" y="2391535"/>
             <a:ext cx="7028724" cy="4281198"/>
           </a:xfrm>
           <a:prstGeom prst="rect">
@@ -13810,8 +16685,8 @@
             </p:nvSpPr>
             <p:spPr>
               <a:xfrm>
-                <a:off x="2922086" y="1130074"/>
-                <a:ext cx="6347828" cy="1115049"/>
+                <a:off x="2891212" y="1073201"/>
+                <a:ext cx="6409575" cy="467720"/>
               </a:xfrm>
               <a:prstGeom prst="rect">
                 <a:avLst/>
@@ -13820,7 +16695,7 @@
             </p:spPr>
             <p:txBody>
               <a:bodyPr wrap="none" lIns="0" tIns="0" rIns="0" bIns="0" rtlCol="0">
-                <a:spAutoFit/>
+                <a:noAutofit/>
               </a:bodyPr>
               <a:lstStyle/>
               <a:p>
@@ -14179,19 +17054,7 @@
                                       <a:latin typeface="Cambria Math" panose="02040503050406030204" pitchFamily="18" charset="0"/>
                                       <a:ea typeface="Cambria Math" panose="02040503050406030204" pitchFamily="18" charset="0"/>
                                     </a:rPr>
-                                    <m:t>𝐺𝑖</m:t>
-                                  </m:r>
-                                  <m:r>
-                                    <a:rPr lang="en-US" sz="2400" b="0" i="1" smtClean="0">
-                                      <a:solidFill>
-                                        <a:schemeClr val="accent6">
-                                          <a:lumMod val="75000"/>
-                                        </a:schemeClr>
-                                      </a:solidFill>
-                                      <a:latin typeface="Cambria Math" panose="02040503050406030204" pitchFamily="18" charset="0"/>
-                                      <a:ea typeface="Cambria Math" panose="02040503050406030204" pitchFamily="18" charset="0"/>
-                                    </a:rPr>
-                                    <m:t>𝑇</m:t>
+                                    <m:t>𝐺𝑖𝑇</m:t>
                                   </m:r>
                                 </m:e>
                                 <m:sub>
@@ -14314,11 +17177,6 @@
                 </a:endParaRPr>
               </a:p>
               <a:p>
-                <a:pPr/>
-                <a:endParaRPr lang="en-US" sz="2400" dirty="0"/>
-              </a:p>
-              <a:p>
-                <a:pPr/>
                 <a:endParaRPr lang="en-US" sz="2400" dirty="0"/>
               </a:p>
             </p:txBody>
@@ -14341,8 +17199,8 @@
             </p:nvSpPr>
             <p:spPr>
               <a:xfrm>
-                <a:off x="2922086" y="1130074"/>
-                <a:ext cx="6347828" cy="1115049"/>
+                <a:off x="2891212" y="1073201"/>
+                <a:ext cx="6409575" cy="467720"/>
               </a:xfrm>
               <a:prstGeom prst="rect">
                 <a:avLst/>
@@ -14350,7 +17208,7 @@
               <a:blipFill>
                 <a:blip r:embed="rId3"/>
                 <a:stretch>
-                  <a:fillRect l="-768"/>
+                  <a:fillRect l="-285" b="-7792"/>
                 </a:stretch>
               </a:blipFill>
             </p:spPr>
@@ -14403,6 +17261,627 @@
           </a:p>
         </p:txBody>
       </p:sp>
+      <p:graphicFrame>
+        <p:nvGraphicFramePr>
+          <p:cNvPr id="3" name="Table 2">
+            <a:extLst>
+              <a:ext uri="{FF2B5EF4-FFF2-40B4-BE49-F238E27FC236}">
+                <a16:creationId xmlns:a16="http://schemas.microsoft.com/office/drawing/2014/main" id="{F58A661E-9AE4-122A-F84F-F18CDDD9C68B}"/>
+              </a:ext>
+            </a:extLst>
+          </p:cNvPr>
+          <p:cNvGraphicFramePr>
+            <a:graphicFrameLocks noGrp="1"/>
+          </p:cNvGraphicFramePr>
+          <p:nvPr>
+            <p:extLst>
+              <p:ext uri="{D42A27DB-BD31-4B8C-83A1-F6EECF244321}">
+                <p14:modId xmlns:p14="http://schemas.microsoft.com/office/powerpoint/2010/main" val="90297758"/>
+              </p:ext>
+            </p:extLst>
+          </p:nvPr>
+        </p:nvGraphicFramePr>
+        <p:xfrm>
+          <a:off x="864751" y="1811001"/>
+          <a:ext cx="4481097" cy="1981200"/>
+        </p:xfrm>
+        <a:graphic>
+          <a:graphicData uri="http://schemas.openxmlformats.org/drawingml/2006/table">
+            <a:tbl>
+              <a:tblPr bandRow="1">
+                <a:tableStyleId>{5C22544A-7EE6-4342-B048-85BDC9FD1C3A}</a:tableStyleId>
+              </a:tblPr>
+              <a:tblGrid>
+                <a:gridCol w="1509422">
+                  <a:extLst>
+                    <a:ext uri="{9D8B030D-6E8A-4147-A177-3AD203B41FA5}">
+                      <a16:colId xmlns:a16="http://schemas.microsoft.com/office/drawing/2014/main" val="1446377154"/>
+                    </a:ext>
+                  </a:extLst>
+                </a:gridCol>
+                <a:gridCol w="1469510">
+                  <a:extLst>
+                    <a:ext uri="{9D8B030D-6E8A-4147-A177-3AD203B41FA5}">
+                      <a16:colId xmlns:a16="http://schemas.microsoft.com/office/drawing/2014/main" val="82357440"/>
+                    </a:ext>
+                  </a:extLst>
+                </a:gridCol>
+                <a:gridCol w="1502165">
+                  <a:extLst>
+                    <a:ext uri="{9D8B030D-6E8A-4147-A177-3AD203B41FA5}">
+                      <a16:colId xmlns:a16="http://schemas.microsoft.com/office/drawing/2014/main" val="3632508132"/>
+                    </a:ext>
+                  </a:extLst>
+                </a:gridCol>
+              </a:tblGrid>
+              <a:tr h="370840">
+                <a:tc gridSpan="3">
+                  <a:txBody>
+                    <a:bodyPr/>
+                    <a:lstStyle/>
+                    <a:p>
+                      <a:pPr algn="ctr"/>
+                      <a:r>
+                        <a:rPr lang="en-US" sz="2000" b="1" dirty="0">
+                          <a:solidFill>
+                            <a:schemeClr val="bg1"/>
+                          </a:solidFill>
+                        </a:rPr>
+                        <a:t>Key Interaction Terms</a:t>
+                      </a:r>
+                    </a:p>
+                  </a:txBody>
+                  <a:tcPr>
+                    <a:solidFill>
+                      <a:schemeClr val="accent1">
+                        <a:lumMod val="75000"/>
+                      </a:schemeClr>
+                    </a:solidFill>
+                  </a:tcPr>
+                </a:tc>
+                <a:tc hMerge="1">
+                  <a:txBody>
+                    <a:bodyPr/>
+                    <a:lstStyle/>
+                    <a:p>
+                      <a:pPr algn="ctr"/>
+                      <a:endParaRPr lang="en-US" dirty="0"/>
+                    </a:p>
+                  </a:txBody>
+                  <a:tcPr/>
+                </a:tc>
+                <a:tc hMerge="1">
+                  <a:txBody>
+                    <a:bodyPr/>
+                    <a:lstStyle/>
+                    <a:p>
+                      <a:pPr algn="ctr"/>
+                      <a:endParaRPr lang="en-US" dirty="0"/>
+                    </a:p>
+                  </a:txBody>
+                  <a:tcPr/>
+                </a:tc>
+                <a:extLst>
+                  <a:ext uri="{0D108BD9-81ED-4DB2-BD59-A6C34878D82A}">
+                    <a16:rowId xmlns:a16="http://schemas.microsoft.com/office/drawing/2014/main" val="3058177909"/>
+                  </a:ext>
+                </a:extLst>
+              </a:tr>
+              <a:tr h="370840">
+                <a:tc>
+                  <a:txBody>
+                    <a:bodyPr/>
+                    <a:lstStyle/>
+                    <a:p>
+                      <a:endParaRPr lang="en-US" sz="2000" b="1" dirty="0">
+                        <a:solidFill>
+                          <a:schemeClr val="bg1"/>
+                        </a:solidFill>
+                      </a:endParaRPr>
+                    </a:p>
+                  </a:txBody>
+                  <a:tcPr>
+                    <a:solidFill>
+                      <a:schemeClr val="accent1">
+                        <a:lumMod val="75000"/>
+                      </a:schemeClr>
+                    </a:solidFill>
+                  </a:tcPr>
+                </a:tc>
+                <a:tc>
+                  <a:txBody>
+                    <a:bodyPr/>
+                    <a:lstStyle/>
+                    <a:p>
+                      <a:pPr algn="ctr"/>
+                      <a:r>
+                        <a:rPr lang="en-US" sz="2000" b="1" dirty="0">
+                          <a:solidFill>
+                            <a:schemeClr val="bg1"/>
+                          </a:solidFill>
+                        </a:rPr>
+                        <a:t>HR</a:t>
+                      </a:r>
+                    </a:p>
+                  </a:txBody>
+                  <a:tcPr>
+                    <a:solidFill>
+                      <a:schemeClr val="accent1">
+                        <a:lumMod val="75000"/>
+                      </a:schemeClr>
+                    </a:solidFill>
+                  </a:tcPr>
+                </a:tc>
+                <a:tc>
+                  <a:txBody>
+                    <a:bodyPr/>
+                    <a:lstStyle/>
+                    <a:p>
+                      <a:pPr algn="ctr"/>
+                      <a:r>
+                        <a:rPr lang="en-US" sz="2000" b="1" dirty="0">
+                          <a:solidFill>
+                            <a:schemeClr val="bg1"/>
+                          </a:solidFill>
+                        </a:rPr>
+                        <a:t>p-value</a:t>
+                      </a:r>
+                    </a:p>
+                  </a:txBody>
+                  <a:tcPr>
+                    <a:solidFill>
+                      <a:schemeClr val="accent1">
+                        <a:lumMod val="75000"/>
+                      </a:schemeClr>
+                    </a:solidFill>
+                  </a:tcPr>
+                </a:tc>
+                <a:extLst>
+                  <a:ext uri="{0D108BD9-81ED-4DB2-BD59-A6C34878D82A}">
+                    <a16:rowId xmlns:a16="http://schemas.microsoft.com/office/drawing/2014/main" val="1906295794"/>
+                  </a:ext>
+                </a:extLst>
+              </a:tr>
+              <a:tr h="370840">
+                <a:tc>
+                  <a:txBody>
+                    <a:bodyPr/>
+                    <a:lstStyle/>
+                    <a:p>
+                      <a:r>
+                        <a:rPr lang="en-US" sz="2000" dirty="0"/>
+                        <a:t>Treatment</a:t>
+                      </a:r>
+                    </a:p>
+                  </a:txBody>
+                  <a:tcPr/>
+                </a:tc>
+                <a:tc>
+                  <a:txBody>
+                    <a:bodyPr/>
+                    <a:lstStyle/>
+                    <a:p>
+                      <a:pPr algn="ctr"/>
+                      <a:r>
+                        <a:rPr lang="en-US" sz="2000" dirty="0"/>
+                        <a:t>0.460</a:t>
+                      </a:r>
+                    </a:p>
+                  </a:txBody>
+                  <a:tcPr/>
+                </a:tc>
+                <a:tc>
+                  <a:txBody>
+                    <a:bodyPr/>
+                    <a:lstStyle/>
+                    <a:p>
+                      <a:pPr algn="ctr"/>
+                      <a:r>
+                        <a:rPr lang="en-US" sz="2000" dirty="0"/>
+                        <a:t>0.001</a:t>
+                      </a:r>
+                    </a:p>
+                  </a:txBody>
+                  <a:tcPr/>
+                </a:tc>
+                <a:extLst>
+                  <a:ext uri="{0D108BD9-81ED-4DB2-BD59-A6C34878D82A}">
+                    <a16:rowId xmlns:a16="http://schemas.microsoft.com/office/drawing/2014/main" val="982728065"/>
+                  </a:ext>
+                </a:extLst>
+              </a:tr>
+              <a:tr h="370840">
+                <a:tc>
+                  <a:txBody>
+                    <a:bodyPr/>
+                    <a:lstStyle/>
+                    <a:p>
+                      <a:r>
+                        <a:rPr lang="en-US" sz="2000" dirty="0"/>
+                        <a:t>Sex</a:t>
+                      </a:r>
+                    </a:p>
+                  </a:txBody>
+                  <a:tcPr/>
+                </a:tc>
+                <a:tc>
+                  <a:txBody>
+                    <a:bodyPr/>
+                    <a:lstStyle/>
+                    <a:p>
+                      <a:pPr algn="ctr"/>
+                      <a:r>
+                        <a:rPr lang="en-US" sz="2000" dirty="0"/>
+                        <a:t>0.854</a:t>
+                      </a:r>
+                    </a:p>
+                  </a:txBody>
+                  <a:tcPr/>
+                </a:tc>
+                <a:tc>
+                  <a:txBody>
+                    <a:bodyPr/>
+                    <a:lstStyle/>
+                    <a:p>
+                      <a:pPr algn="ctr"/>
+                      <a:r>
+                        <a:rPr lang="en-US" sz="2000" dirty="0"/>
+                        <a:t>0.679</a:t>
+                      </a:r>
+                    </a:p>
+                  </a:txBody>
+                  <a:tcPr/>
+                </a:tc>
+                <a:extLst>
+                  <a:ext uri="{0D108BD9-81ED-4DB2-BD59-A6C34878D82A}">
+                    <a16:rowId xmlns:a16="http://schemas.microsoft.com/office/drawing/2014/main" val="1174974162"/>
+                  </a:ext>
+                </a:extLst>
+              </a:tr>
+              <a:tr h="370840">
+                <a:tc>
+                  <a:txBody>
+                    <a:bodyPr/>
+                    <a:lstStyle/>
+                    <a:p>
+                      <a:r>
+                        <a:rPr lang="en-US" sz="2000" dirty="0">
+                          <a:solidFill>
+                            <a:srgbClr val="FF0000"/>
+                          </a:solidFill>
+                        </a:rPr>
+                        <a:t>Interaction</a:t>
+                      </a:r>
+                    </a:p>
+                  </a:txBody>
+                  <a:tcPr/>
+                </a:tc>
+                <a:tc>
+                  <a:txBody>
+                    <a:bodyPr/>
+                    <a:lstStyle/>
+                    <a:p>
+                      <a:pPr algn="ctr"/>
+                      <a:r>
+                        <a:rPr lang="en-US" sz="2000" dirty="0">
+                          <a:solidFill>
+                            <a:srgbClr val="FF0000"/>
+                          </a:solidFill>
+                        </a:rPr>
+                        <a:t>2.034</a:t>
+                      </a:r>
+                    </a:p>
+                  </a:txBody>
+                  <a:tcPr/>
+                </a:tc>
+                <a:tc>
+                  <a:txBody>
+                    <a:bodyPr/>
+                    <a:lstStyle/>
+                    <a:p>
+                      <a:pPr algn="ctr"/>
+                      <a:r>
+                        <a:rPr lang="en-US" sz="2000" dirty="0">
+                          <a:solidFill>
+                            <a:srgbClr val="FF0000"/>
+                          </a:solidFill>
+                        </a:rPr>
+                        <a:t>0.214</a:t>
+                      </a:r>
+                    </a:p>
+                  </a:txBody>
+                  <a:tcPr/>
+                </a:tc>
+                <a:extLst>
+                  <a:ext uri="{0D108BD9-81ED-4DB2-BD59-A6C34878D82A}">
+                    <a16:rowId xmlns:a16="http://schemas.microsoft.com/office/drawing/2014/main" val="4195658078"/>
+                  </a:ext>
+                </a:extLst>
+              </a:tr>
+            </a:tbl>
+          </a:graphicData>
+        </a:graphic>
+      </p:graphicFrame>
+      <p:graphicFrame>
+        <p:nvGraphicFramePr>
+          <p:cNvPr id="5" name="Table 4">
+            <a:extLst>
+              <a:ext uri="{FF2B5EF4-FFF2-40B4-BE49-F238E27FC236}">
+                <a16:creationId xmlns:a16="http://schemas.microsoft.com/office/drawing/2014/main" id="{98F204BF-A6CA-AC9A-D6DF-83AF81F04286}"/>
+              </a:ext>
+            </a:extLst>
+          </p:cNvPr>
+          <p:cNvGraphicFramePr>
+            <a:graphicFrameLocks noGrp="1"/>
+          </p:cNvGraphicFramePr>
+          <p:nvPr>
+            <p:extLst>
+              <p:ext uri="{D42A27DB-BD31-4B8C-83A1-F6EECF244321}">
+                <p14:modId xmlns:p14="http://schemas.microsoft.com/office/powerpoint/2010/main" val="2197250404"/>
+              </p:ext>
+            </p:extLst>
+          </p:nvPr>
+        </p:nvGraphicFramePr>
+        <p:xfrm>
+          <a:off x="864750" y="4062281"/>
+          <a:ext cx="4481097" cy="1584960"/>
+        </p:xfrm>
+        <a:graphic>
+          <a:graphicData uri="http://schemas.openxmlformats.org/drawingml/2006/table">
+            <a:tbl>
+              <a:tblPr bandRow="1">
+                <a:tableStyleId>{5C22544A-7EE6-4342-B048-85BDC9FD1C3A}</a:tableStyleId>
+              </a:tblPr>
+              <a:tblGrid>
+                <a:gridCol w="1493699">
+                  <a:extLst>
+                    <a:ext uri="{9D8B030D-6E8A-4147-A177-3AD203B41FA5}">
+                      <a16:colId xmlns:a16="http://schemas.microsoft.com/office/drawing/2014/main" val="193391568"/>
+                    </a:ext>
+                  </a:extLst>
+                </a:gridCol>
+                <a:gridCol w="1493699">
+                  <a:extLst>
+                    <a:ext uri="{9D8B030D-6E8A-4147-A177-3AD203B41FA5}">
+                      <a16:colId xmlns:a16="http://schemas.microsoft.com/office/drawing/2014/main" val="3093339358"/>
+                    </a:ext>
+                  </a:extLst>
+                </a:gridCol>
+                <a:gridCol w="1493699">
+                  <a:extLst>
+                    <a:ext uri="{9D8B030D-6E8A-4147-A177-3AD203B41FA5}">
+                      <a16:colId xmlns:a16="http://schemas.microsoft.com/office/drawing/2014/main" val="4180537643"/>
+                    </a:ext>
+                  </a:extLst>
+                </a:gridCol>
+              </a:tblGrid>
+              <a:tr h="370840">
+                <a:tc gridSpan="3">
+                  <a:txBody>
+                    <a:bodyPr/>
+                    <a:lstStyle/>
+                    <a:p>
+                      <a:pPr algn="ctr"/>
+                      <a:r>
+                        <a:rPr lang="en-US" sz="2000" b="1" dirty="0">
+                          <a:solidFill>
+                            <a:schemeClr val="bg1"/>
+                          </a:solidFill>
+                        </a:rPr>
+                        <a:t>Group Counts</a:t>
+                      </a:r>
+                    </a:p>
+                  </a:txBody>
+                  <a:tcPr>
+                    <a:solidFill>
+                      <a:schemeClr val="accent1">
+                        <a:lumMod val="75000"/>
+                      </a:schemeClr>
+                    </a:solidFill>
+                  </a:tcPr>
+                </a:tc>
+                <a:tc hMerge="1">
+                  <a:txBody>
+                    <a:bodyPr/>
+                    <a:lstStyle/>
+                    <a:p>
+                      <a:endParaRPr lang="en-US" dirty="0"/>
+                    </a:p>
+                  </a:txBody>
+                  <a:tcPr/>
+                </a:tc>
+                <a:tc hMerge="1">
+                  <a:txBody>
+                    <a:bodyPr/>
+                    <a:lstStyle/>
+                    <a:p>
+                      <a:endParaRPr lang="en-US" dirty="0"/>
+                    </a:p>
+                  </a:txBody>
+                  <a:tcPr/>
+                </a:tc>
+                <a:extLst>
+                  <a:ext uri="{0D108BD9-81ED-4DB2-BD59-A6C34878D82A}">
+                    <a16:rowId xmlns:a16="http://schemas.microsoft.com/office/drawing/2014/main" val="3388447168"/>
+                  </a:ext>
+                </a:extLst>
+              </a:tr>
+              <a:tr h="370840">
+                <a:tc>
+                  <a:txBody>
+                    <a:bodyPr/>
+                    <a:lstStyle/>
+                    <a:p>
+                      <a:pPr algn="ctr"/>
+                      <a:endParaRPr lang="en-US" sz="2000" b="1" dirty="0">
+                        <a:solidFill>
+                          <a:schemeClr val="bg1"/>
+                        </a:solidFill>
+                      </a:endParaRPr>
+                    </a:p>
+                  </a:txBody>
+                  <a:tcPr>
+                    <a:solidFill>
+                      <a:schemeClr val="accent1">
+                        <a:lumMod val="75000"/>
+                      </a:schemeClr>
+                    </a:solidFill>
+                  </a:tcPr>
+                </a:tc>
+                <a:tc>
+                  <a:txBody>
+                    <a:bodyPr/>
+                    <a:lstStyle/>
+                    <a:p>
+                      <a:pPr algn="ctr"/>
+                      <a:r>
+                        <a:rPr lang="en-US" sz="2000" b="1" dirty="0">
+                          <a:solidFill>
+                            <a:schemeClr val="bg1"/>
+                          </a:solidFill>
+                        </a:rPr>
+                        <a:t>Sample</a:t>
+                      </a:r>
+                    </a:p>
+                  </a:txBody>
+                  <a:tcPr>
+                    <a:solidFill>
+                      <a:schemeClr val="accent1">
+                        <a:lumMod val="75000"/>
+                      </a:schemeClr>
+                    </a:solidFill>
+                  </a:tcPr>
+                </a:tc>
+                <a:tc>
+                  <a:txBody>
+                    <a:bodyPr/>
+                    <a:lstStyle/>
+                    <a:p>
+                      <a:pPr algn="ctr"/>
+                      <a:r>
+                        <a:rPr lang="en-US" sz="2000" b="1" dirty="0">
+                          <a:solidFill>
+                            <a:schemeClr val="bg1"/>
+                          </a:solidFill>
+                        </a:rPr>
+                        <a:t>Events</a:t>
+                      </a:r>
+                    </a:p>
+                  </a:txBody>
+                  <a:tcPr>
+                    <a:solidFill>
+                      <a:schemeClr val="accent1">
+                        <a:lumMod val="75000"/>
+                      </a:schemeClr>
+                    </a:solidFill>
+                  </a:tcPr>
+                </a:tc>
+                <a:extLst>
+                  <a:ext uri="{0D108BD9-81ED-4DB2-BD59-A6C34878D82A}">
+                    <a16:rowId xmlns:a16="http://schemas.microsoft.com/office/drawing/2014/main" val="3808736945"/>
+                  </a:ext>
+                </a:extLst>
+              </a:tr>
+              <a:tr h="370840">
+                <a:tc>
+                  <a:txBody>
+                    <a:bodyPr/>
+                    <a:lstStyle/>
+                    <a:p>
+                      <a:r>
+                        <a:rPr lang="en-US" sz="2000" dirty="0"/>
+                        <a:t>Female</a:t>
+                      </a:r>
+                    </a:p>
+                  </a:txBody>
+                  <a:tcPr/>
+                </a:tc>
+                <a:tc>
+                  <a:txBody>
+                    <a:bodyPr/>
+                    <a:lstStyle/>
+                    <a:p>
+                      <a:pPr algn="ctr"/>
+                      <a:r>
+                        <a:rPr lang="en-US" sz="2000" dirty="0"/>
+                        <a:t>951</a:t>
+                      </a:r>
+                    </a:p>
+                  </a:txBody>
+                  <a:tcPr/>
+                </a:tc>
+                <a:tc>
+                  <a:txBody>
+                    <a:bodyPr/>
+                    <a:lstStyle/>
+                    <a:p>
+                      <a:pPr algn="ctr"/>
+                      <a:r>
+                        <a:rPr lang="en-US" sz="2000" dirty="0"/>
+                        <a:t>81</a:t>
+                      </a:r>
+                    </a:p>
+                  </a:txBody>
+                  <a:tcPr/>
+                </a:tc>
+                <a:extLst>
+                  <a:ext uri="{0D108BD9-81ED-4DB2-BD59-A6C34878D82A}">
+                    <a16:rowId xmlns:a16="http://schemas.microsoft.com/office/drawing/2014/main" val="3041809135"/>
+                  </a:ext>
+                </a:extLst>
+              </a:tr>
+              <a:tr h="370840">
+                <a:tc>
+                  <a:txBody>
+                    <a:bodyPr/>
+                    <a:lstStyle/>
+                    <a:p>
+                      <a:r>
+                        <a:rPr lang="en-US" sz="2000" dirty="0"/>
+                        <a:t>Male</a:t>
+                      </a:r>
+                    </a:p>
+                  </a:txBody>
+                  <a:tcPr/>
+                </a:tc>
+                <a:tc>
+                  <a:txBody>
+                    <a:bodyPr/>
+                    <a:lstStyle/>
+                    <a:p>
+                      <a:pPr algn="ctr"/>
+                      <a:r>
+                        <a:rPr lang="en-US" sz="2000" dirty="0"/>
+                        <a:t>200</a:t>
+                      </a:r>
+                    </a:p>
+                  </a:txBody>
+                  <a:tcPr/>
+                </a:tc>
+                <a:tc>
+                  <a:txBody>
+                    <a:bodyPr/>
+                    <a:lstStyle/>
+                    <a:p>
+                      <a:pPr algn="ctr"/>
+                      <a:r>
+                        <a:rPr lang="en-US" sz="2000" dirty="0"/>
+                        <a:t>15</a:t>
+                      </a:r>
+                    </a:p>
+                  </a:txBody>
+                  <a:tcPr/>
+                </a:tc>
+                <a:extLst>
+                  <a:ext uri="{0D108BD9-81ED-4DB2-BD59-A6C34878D82A}">
+                    <a16:rowId xmlns:a16="http://schemas.microsoft.com/office/drawing/2014/main" val="833687040"/>
+                  </a:ext>
+                </a:extLst>
+              </a:tr>
+            </a:tbl>
+          </a:graphicData>
+        </a:graphic>
+      </p:graphicFrame>
       <p:sp>
         <p:nvSpPr>
           <p:cNvPr id="4" name="TextBox 3">
@@ -14417,268 +17896,245 @@
         </p:nvSpPr>
         <p:spPr>
           <a:xfrm>
-            <a:off x="5848045" y="1942274"/>
-            <a:ext cx="6096000" cy="4524315"/>
+            <a:off x="6096000" y="3675514"/>
+            <a:ext cx="5114925" cy="1981201"/>
           </a:xfrm>
           <a:prstGeom prst="rect">
             <a:avLst/>
           </a:prstGeom>
-          <a:noFill/>
+          <a:solidFill>
+            <a:schemeClr val="bg1">
+              <a:lumMod val="95000"/>
+            </a:schemeClr>
+          </a:solidFill>
         </p:spPr>
         <p:txBody>
           <a:bodyPr wrap="square">
-            <a:spAutoFit/>
+            <a:noAutofit/>
           </a:bodyPr>
           <a:lstStyle/>
           <a:p>
-            <a:r>
-              <a:rPr lang="en-US" sz="2400" b="1"/>
-              <a:t>Sex Interaction Model</a:t>
-            </a:r>
-            <a:endParaRPr lang="en-US" sz="2400" b="1" dirty="0"/>
-          </a:p>
-          <a:p>
-            <a:pPr lvl="1"/>
-            <a:r>
-              <a:rPr lang="en-US" sz="2400"/>
-              <a:t>LRT p = 0.2187</a:t>
-            </a:r>
-            <a:endParaRPr lang="en-US" sz="2400" dirty="0"/>
-          </a:p>
-          <a:p>
-            <a:endParaRPr lang="en-US" sz="2400" dirty="0"/>
-          </a:p>
-          <a:p>
-            <a:r>
-              <a:rPr lang="en-US" sz="2400" b="1"/>
-              <a:t>Subgroup-Specific Hazard Ratios</a:t>
-            </a:r>
-            <a:endParaRPr lang="en-US" sz="2400" b="1" dirty="0"/>
-          </a:p>
-          <a:p>
-            <a:pPr lvl="1"/>
-            <a:r>
-              <a:rPr lang="en-US" sz="2400" dirty="0">
-                <a:solidFill>
-                  <a:srgbClr val="1A5276"/>
-                </a:solidFill>
-              </a:rPr>
-              <a:t>Female:</a:t>
-            </a:r>
-            <a:r>
-              <a:rPr lang="en-US" sz="2400">
-                <a:solidFill>
-                  <a:srgbClr val="1A5276"/>
-                </a:solidFill>
-              </a:rPr>
-              <a:t>	HR = 0.459 [0.288, 0.732</a:t>
-            </a:r>
-            <a:r>
-              <a:rPr lang="en-US" sz="2400" dirty="0">
-                <a:solidFill>
-                  <a:srgbClr val="1A5276"/>
-                </a:solidFill>
-              </a:rPr>
-              <a:t>]</a:t>
-            </a:r>
-          </a:p>
-          <a:p>
-            <a:pPr lvl="1"/>
-            <a:r>
-              <a:rPr lang="en-US" sz="2400">
-                <a:solidFill>
-                  <a:srgbClr val="922B21"/>
-                </a:solidFill>
-              </a:rPr>
-              <a:t>Male: 	HR = 1.101 [0.393, 3.087</a:t>
-            </a:r>
-            <a:r>
-              <a:rPr lang="en-US" sz="2400" dirty="0">
-                <a:solidFill>
-                  <a:srgbClr val="922B21"/>
-                </a:solidFill>
-              </a:rPr>
-              <a:t>]</a:t>
-            </a:r>
-          </a:p>
-          <a:p>
-            <a:endParaRPr lang="en-US" sz="2400" dirty="0">
-              <a:solidFill>
-                <a:srgbClr val="922B21"/>
-              </a:solidFill>
-            </a:endParaRPr>
-          </a:p>
-          <a:p>
-            <a:r>
-              <a:rPr lang="en-US" sz="2400" b="1" dirty="0"/>
+            <a:pPr algn="ctr"/>
+            <a:r>
+              <a:rPr lang="en-US" sz="2000" b="1" dirty="0"/>
               <a:t>Interpretation</a:t>
             </a:r>
           </a:p>
           <a:p>
-            <a:pPr lvl="1"/>
-            <a:r>
-              <a:rPr lang="en-US" sz="2400"/>
-              <a:t>Male subgroup is severely underpowered. Wide CI and unstable HR mean we cannot draw conclusions about male-specific treatment benefit</a:t>
-            </a:r>
-            <a:r>
-              <a:rPr lang="en-US" sz="2400" dirty="0"/>
-              <a:t>.</a:t>
+            <a:pPr marL="355600" lvl="1" indent="-342900">
+              <a:buFont typeface="Arial" panose="020B0604020202020204" pitchFamily="34" charset="0"/>
+              <a:buChar char="•"/>
+            </a:pPr>
+            <a:r>
+              <a:rPr lang="en-US" sz="2000" dirty="0"/>
+              <a:t>Male subgroup is severely underpowered</a:t>
+            </a:r>
+          </a:p>
+          <a:p>
+            <a:pPr marL="355600" lvl="1" indent="-342900">
+              <a:buFont typeface="Arial" panose="020B0604020202020204" pitchFamily="34" charset="0"/>
+              <a:buChar char="•"/>
+            </a:pPr>
+            <a:r>
+              <a:rPr lang="en-US" sz="2000" dirty="0"/>
+              <a:t> Wide CI and unstable HR mean we cannot draw conclusions about male-specific treatment benefit</a:t>
             </a:r>
           </a:p>
         </p:txBody>
       </p:sp>
-      <p:sp>
-        <p:nvSpPr>
-          <p:cNvPr id="9" name="TextBox 8">
+      <p:graphicFrame>
+        <p:nvGraphicFramePr>
+          <p:cNvPr id="7" name="Table 6">
             <a:extLst>
               <a:ext uri="{FF2B5EF4-FFF2-40B4-BE49-F238E27FC236}">
-                <a16:creationId xmlns:a16="http://schemas.microsoft.com/office/drawing/2014/main" id="{9108902E-204D-6030-B930-7BDA2E5B642F}"/>
+                <a16:creationId xmlns:a16="http://schemas.microsoft.com/office/drawing/2014/main" id="{951289DF-6CC2-991D-D3C8-2A4D9C3C58FE}"/>
               </a:ext>
             </a:extLst>
           </p:cNvPr>
-          <p:cNvSpPr txBox="1"/>
-          <p:nvPr/>
-        </p:nvSpPr>
-        <p:spPr>
-          <a:xfrm>
-            <a:off x="247955" y="1942274"/>
-            <a:ext cx="6096000" cy="3416320"/>
-          </a:xfrm>
-          <a:prstGeom prst="rect">
-            <a:avLst/>
-          </a:prstGeom>
-          <a:noFill/>
-        </p:spPr>
-        <p:txBody>
-          <a:bodyPr wrap="square">
-            <a:spAutoFit/>
-          </a:bodyPr>
-          <a:lstStyle/>
-          <a:p>
-            <a:r>
-              <a:rPr lang="en-US" sz="2400" b="1"/>
-              <a:t>Key Interaction Terms</a:t>
-            </a:r>
-            <a:endParaRPr lang="en-US" sz="2400" b="1" dirty="0"/>
-          </a:p>
-          <a:p>
-            <a:r>
-              <a:rPr lang="en-US" sz="2400" b="1" dirty="0"/>
-              <a:t>		</a:t>
-            </a:r>
-            <a:r>
-              <a:rPr lang="en-US" sz="2400" b="1"/>
-              <a:t>	HR  p-value</a:t>
-            </a:r>
-            <a:endParaRPr lang="en-US" sz="2400" b="1" dirty="0"/>
-          </a:p>
-          <a:p>
-            <a:pPr lvl="1"/>
-            <a:r>
-              <a:rPr lang="en-US" sz="2400" dirty="0"/>
-              <a:t>Treatment	</a:t>
-            </a:r>
-            <a:r>
-              <a:rPr lang="en-US" sz="2400"/>
-              <a:t>	0.460  0.001</a:t>
-            </a:r>
-            <a:endParaRPr lang="en-US" sz="2400" dirty="0"/>
-          </a:p>
-          <a:p>
-            <a:pPr lvl="1"/>
-            <a:r>
-              <a:rPr lang="en-US" sz="2400"/>
-              <a:t>Sex </a:t>
-            </a:r>
-            <a:r>
-              <a:rPr lang="en-US" sz="2400" dirty="0"/>
-              <a:t>	</a:t>
-            </a:r>
-            <a:r>
-              <a:rPr lang="en-US" sz="2400"/>
-              <a:t>	0.854  0.679</a:t>
-            </a:r>
-            <a:endParaRPr lang="en-US" sz="2400" dirty="0"/>
-          </a:p>
-          <a:p>
-            <a:pPr lvl="1"/>
-            <a:r>
-              <a:rPr lang="en-US" sz="2400" dirty="0">
-                <a:solidFill>
-                  <a:srgbClr val="922B21"/>
-                </a:solidFill>
-              </a:rPr>
-              <a:t>Interaction</a:t>
-            </a:r>
-            <a:r>
-              <a:rPr lang="en-US" sz="2400">
-                <a:solidFill>
-                  <a:srgbClr val="922B21"/>
-                </a:solidFill>
-              </a:rPr>
-              <a:t>	2.034  0.214</a:t>
-            </a:r>
-            <a:endParaRPr lang="en-US" sz="2400" dirty="0">
-              <a:solidFill>
-                <a:srgbClr val="922B21"/>
-              </a:solidFill>
-            </a:endParaRPr>
-          </a:p>
-          <a:p>
-            <a:pPr lvl="1"/>
-            <a:endParaRPr lang="en-US" sz="2400" dirty="0"/>
-          </a:p>
-          <a:p>
-            <a:r>
-              <a:rPr lang="en-US" sz="2400" b="1"/>
-              <a:t>Group Counts</a:t>
-            </a:r>
-            <a:endParaRPr lang="en-US" sz="2400" b="1" dirty="0"/>
-          </a:p>
-          <a:p>
-            <a:pPr lvl="1"/>
-            <a:r>
-              <a:rPr lang="en-US" sz="2400" dirty="0"/>
-              <a:t>Female:	n=</a:t>
-            </a:r>
-            <a:r>
-              <a:rPr lang="en-US" sz="2400"/>
-              <a:t>951, events</a:t>
-            </a:r>
-            <a:r>
-              <a:rPr lang="en-US" sz="2400" dirty="0"/>
-              <a:t>=81</a:t>
-            </a:r>
-          </a:p>
-          <a:p>
-            <a:pPr lvl="1"/>
-            <a:r>
-              <a:rPr lang="en-US" sz="2400" dirty="0">
-                <a:solidFill>
-                  <a:srgbClr val="922B21"/>
-                </a:solidFill>
-              </a:rPr>
-              <a:t>Male:	n=</a:t>
-            </a:r>
-            <a:r>
-              <a:rPr lang="en-US" sz="2400">
-                <a:solidFill>
-                  <a:srgbClr val="922B21"/>
-                </a:solidFill>
-              </a:rPr>
-              <a:t>200, events</a:t>
-            </a:r>
-            <a:r>
-              <a:rPr lang="en-US" sz="2400" dirty="0">
-                <a:solidFill>
-                  <a:srgbClr val="922B21"/>
-                </a:solidFill>
-              </a:rPr>
-              <a:t>=15</a:t>
-            </a:r>
-          </a:p>
-        </p:txBody>
-      </p:sp>
+          <p:cNvGraphicFramePr>
+            <a:graphicFrameLocks noGrp="1"/>
+          </p:cNvGraphicFramePr>
+          <p:nvPr>
+            <p:extLst>
+              <p:ext uri="{D42A27DB-BD31-4B8C-83A1-F6EECF244321}">
+                <p14:modId xmlns:p14="http://schemas.microsoft.com/office/powerpoint/2010/main" val="3432233822"/>
+              </p:ext>
+            </p:extLst>
+          </p:nvPr>
+        </p:nvGraphicFramePr>
+        <p:xfrm>
+          <a:off x="6096000" y="1811001"/>
+          <a:ext cx="5114926" cy="1584960"/>
+        </p:xfrm>
+        <a:graphic>
+          <a:graphicData uri="http://schemas.openxmlformats.org/drawingml/2006/table">
+            <a:tbl>
+              <a:tblPr bandRow="1">
+                <a:tableStyleId>{5C22544A-7EE6-4342-B048-85BDC9FD1C3A}</a:tableStyleId>
+              </a:tblPr>
+              <a:tblGrid>
+                <a:gridCol w="2557463">
+                  <a:extLst>
+                    <a:ext uri="{9D8B030D-6E8A-4147-A177-3AD203B41FA5}">
+                      <a16:colId xmlns:a16="http://schemas.microsoft.com/office/drawing/2014/main" val="1779458928"/>
+                    </a:ext>
+                  </a:extLst>
+                </a:gridCol>
+                <a:gridCol w="2557463">
+                  <a:extLst>
+                    <a:ext uri="{9D8B030D-6E8A-4147-A177-3AD203B41FA5}">
+                      <a16:colId xmlns:a16="http://schemas.microsoft.com/office/drawing/2014/main" val="2869337161"/>
+                    </a:ext>
+                  </a:extLst>
+                </a:gridCol>
+              </a:tblGrid>
+              <a:tr h="370840">
+                <a:tc gridSpan="2">
+                  <a:txBody>
+                    <a:bodyPr/>
+                    <a:lstStyle/>
+                    <a:p>
+                      <a:pPr algn="ctr"/>
+                      <a:r>
+                        <a:rPr lang="en-US" sz="2000" b="1" dirty="0">
+                          <a:solidFill>
+                            <a:schemeClr val="bg1"/>
+                          </a:solidFill>
+                        </a:rPr>
+                        <a:t>Sex Interaction Model</a:t>
+                      </a:r>
+                    </a:p>
+                  </a:txBody>
+                  <a:tcPr>
+                    <a:solidFill>
+                      <a:schemeClr val="accent1">
+                        <a:lumMod val="75000"/>
+                      </a:schemeClr>
+                    </a:solidFill>
+                  </a:tcPr>
+                </a:tc>
+                <a:tc hMerge="1">
+                  <a:txBody>
+                    <a:bodyPr/>
+                    <a:lstStyle/>
+                    <a:p>
+                      <a:endParaRPr lang="en-US" dirty="0"/>
+                    </a:p>
+                  </a:txBody>
+                  <a:tcPr/>
+                </a:tc>
+                <a:extLst>
+                  <a:ext uri="{0D108BD9-81ED-4DB2-BD59-A6C34878D82A}">
+                    <a16:rowId xmlns:a16="http://schemas.microsoft.com/office/drawing/2014/main" val="1397225430"/>
+                  </a:ext>
+                </a:extLst>
+              </a:tr>
+              <a:tr h="370840">
+                <a:tc>
+                  <a:txBody>
+                    <a:bodyPr/>
+                    <a:lstStyle/>
+                    <a:p>
+                      <a:r>
+                        <a:rPr lang="en-US" sz="2000" dirty="0"/>
+                        <a:t>LRT p-value</a:t>
+                      </a:r>
+                    </a:p>
+                  </a:txBody>
+                  <a:tcPr/>
+                </a:tc>
+                <a:tc>
+                  <a:txBody>
+                    <a:bodyPr/>
+                    <a:lstStyle/>
+                    <a:p>
+                      <a:pPr algn="ctr"/>
+                      <a:r>
+                        <a:rPr lang="en-US" sz="2000" dirty="0"/>
+                        <a:t>0.2187</a:t>
+                      </a:r>
+                    </a:p>
+                  </a:txBody>
+                  <a:tcPr/>
+                </a:tc>
+                <a:extLst>
+                  <a:ext uri="{0D108BD9-81ED-4DB2-BD59-A6C34878D82A}">
+                    <a16:rowId xmlns:a16="http://schemas.microsoft.com/office/drawing/2014/main" val="402482031"/>
+                  </a:ext>
+                </a:extLst>
+              </a:tr>
+              <a:tr h="370840">
+                <a:tc>
+                  <a:txBody>
+                    <a:bodyPr/>
+                    <a:lstStyle/>
+                    <a:p>
+                      <a:r>
+                        <a:rPr lang="en-US" sz="2000" dirty="0"/>
+                        <a:t>Female HR [95% CI]</a:t>
+                      </a:r>
+                    </a:p>
+                  </a:txBody>
+                  <a:tcPr/>
+                </a:tc>
+                <a:tc>
+                  <a:txBody>
+                    <a:bodyPr/>
+                    <a:lstStyle/>
+                    <a:p>
+                      <a:pPr algn="ctr"/>
+                      <a:r>
+                        <a:rPr lang="en-US" sz="2000" dirty="0"/>
+                        <a:t>0.459 [0.288, 0.732]</a:t>
+                      </a:r>
+                    </a:p>
+                  </a:txBody>
+                  <a:tcPr/>
+                </a:tc>
+                <a:extLst>
+                  <a:ext uri="{0D108BD9-81ED-4DB2-BD59-A6C34878D82A}">
+                    <a16:rowId xmlns:a16="http://schemas.microsoft.com/office/drawing/2014/main" val="706777896"/>
+                  </a:ext>
+                </a:extLst>
+              </a:tr>
+              <a:tr h="370840">
+                <a:tc>
+                  <a:txBody>
+                    <a:bodyPr/>
+                    <a:lstStyle/>
+                    <a:p>
+                      <a:r>
+                        <a:rPr lang="en-US" sz="2000" dirty="0"/>
+                        <a:t>Male HR [95% CI]</a:t>
+                      </a:r>
+                    </a:p>
+                  </a:txBody>
+                  <a:tcPr/>
+                </a:tc>
+                <a:tc>
+                  <a:txBody>
+                    <a:bodyPr/>
+                    <a:lstStyle/>
+                    <a:p>
+                      <a:pPr algn="ctr"/>
+                      <a:r>
+                        <a:rPr lang="en-US" sz="2000" dirty="0"/>
+                        <a:t>1.101 [0.393, 3.087]</a:t>
+                      </a:r>
+                    </a:p>
+                  </a:txBody>
+                  <a:tcPr/>
+                </a:tc>
+                <a:extLst>
+                  <a:ext uri="{0D108BD9-81ED-4DB2-BD59-A6C34878D82A}">
+                    <a16:rowId xmlns:a16="http://schemas.microsoft.com/office/drawing/2014/main" val="2952573247"/>
+                  </a:ext>
+                </a:extLst>
+              </a:tr>
+            </a:tbl>
+          </a:graphicData>
+        </a:graphic>
+      </p:graphicFrame>
     </p:spTree>
     <p:extLst>
       <p:ext uri="{BB962C8B-B14F-4D97-AF65-F5344CB8AC3E}">
@@ -14744,10 +18200,9 @@
           <a:lstStyle/>
           <a:p>
             <a:r>
-              <a:rPr lang="en-US"/>
+              <a:rPr lang="en-US" dirty="0"/>
               <a:t>Race Subgroup Interaction Effects</a:t>
             </a:r>
-            <a:endParaRPr lang="en-US" dirty="0"/>
           </a:p>
         </p:txBody>
       </p:sp>
@@ -14769,9 +18224,12 @@
         </p:nvSpPr>
         <p:spPr>
           <a:xfrm>
-            <a:off x="6096000" y="2317540"/>
-            <a:ext cx="5941343" cy="1921108"/>
+            <a:off x="6933399" y="2103737"/>
+            <a:ext cx="4799798" cy="3169919"/>
           </a:xfrm>
+          <a:solidFill>
+            <a:schemeClr val="bg2"/>
+          </a:solidFill>
         </p:spPr>
         <p:txBody>
           <a:bodyPr>
@@ -14779,27 +18237,39 @@
           </a:bodyPr>
           <a:lstStyle/>
           <a:p>
-            <a:r>
-              <a:rPr lang="en-US" sz="2000"/>
-              <a:t>Only the Asian/PI subgroup interaction term is significant but high HR = 15.514 and large CI bounds suggest this is an unstable result</a:t>
-            </a:r>
-            <a:endParaRPr lang="en-US" sz="2000" dirty="0"/>
-          </a:p>
-          <a:p>
-            <a:endParaRPr lang="en-US" sz="2000" b="1" dirty="0"/>
-          </a:p>
-          <a:p>
-            <a:r>
-              <a:rPr lang="en-US" sz="2000" b="1"/>
-              <a:t>THIS SLIDE NEED SOMETHING</a:t>
-            </a:r>
-            <a:endParaRPr lang="en-US" sz="2000" b="1" dirty="0"/>
-          </a:p>
-          <a:p>
-            <a:pPr marL="0" indent="0">
+            <a:pPr marL="0" indent="0" algn="ctr">
               <a:buNone/>
             </a:pPr>
-            <a:endParaRPr lang="en-US" sz="2000" b="1" dirty="0"/>
+            <a:r>
+              <a:rPr lang="en-US" sz="2000" b="1" dirty="0"/>
+              <a:t>Interpretation</a:t>
+            </a:r>
+          </a:p>
+          <a:p>
+            <a:r>
+              <a:rPr lang="en-US" sz="2000" dirty="0"/>
+              <a:t>Marginal significant at </a:t>
+            </a:r>
+            <a:r>
+              <a:rPr lang="el-GR" sz="2000" dirty="0"/>
+              <a:t>α</a:t>
+            </a:r>
+            <a:r>
+              <a:rPr lang="en-US" sz="2000" dirty="0"/>
+              <a:t> = 0.10</a:t>
+            </a:r>
+          </a:p>
+          <a:p>
+            <a:r>
+              <a:rPr lang="en-US" sz="2000" dirty="0"/>
+              <a:t>Asian/PI subgroup interaction term is significant but high HR = 15.514 and large CI bounds suggest this is an unstable result</a:t>
+            </a:r>
+          </a:p>
+          <a:p>
+            <a:r>
+              <a:rPr lang="en-US" sz="2000" dirty="0"/>
+              <a:t>Removal would increase p-value</a:t>
+            </a:r>
           </a:p>
           <a:p>
             <a:endParaRPr lang="en-US" sz="2000" dirty="0"/>
@@ -14822,8 +18292,8 @@
             </p:nvSpPr>
             <p:spPr>
               <a:xfrm>
-                <a:off x="413933" y="1044285"/>
-                <a:ext cx="11116971" cy="621773"/>
+                <a:off x="695325" y="1125538"/>
+                <a:ext cx="10835579" cy="621773"/>
               </a:xfrm>
               <a:prstGeom prst="rect">
                 <a:avLst/>
@@ -15450,6 +18920,13 @@
                         </a:rPr>
                         <m:t>+</m:t>
                       </m:r>
+                      <m:r>
+                        <a:rPr lang="en-US" sz="2000" b="0" i="1" smtClean="0">
+                          <a:latin typeface="Cambria Math" panose="02040503050406030204" pitchFamily="18" charset="0"/>
+                          <a:ea typeface="Cambria Math" panose="02040503050406030204" pitchFamily="18" charset="0"/>
+                        </a:rPr>
+                        <m:t> </m:t>
+                      </m:r>
                       <m:sSub>
                         <m:sSubPr>
                           <m:ctrlPr>
@@ -15817,17 +19294,7 @@
                               <a:latin typeface="Cambria Math" panose="02040503050406030204" pitchFamily="18" charset="0"/>
                               <a:ea typeface="Cambria Math" panose="02040503050406030204" pitchFamily="18" charset="0"/>
                             </a:rPr>
-                            <m:t>𝑃</m:t>
-                          </m:r>
-                          <m:r>
-                            <a:rPr lang="en-US" sz="2000" b="0" i="1" smtClean="0">
-                              <a:solidFill>
-                                <a:srgbClr val="00B050"/>
-                              </a:solidFill>
-                              <a:latin typeface="Cambria Math" panose="02040503050406030204" pitchFamily="18" charset="0"/>
-                              <a:ea typeface="Cambria Math" panose="02040503050406030204" pitchFamily="18" charset="0"/>
-                            </a:rPr>
-                            <m:t>𝐼</m:t>
+                            <m:t>𝑃𝐼</m:t>
                           </m:r>
                         </m:e>
                         <m:sub>
@@ -16099,8 +19566,8 @@
             </p:nvSpPr>
             <p:spPr>
               <a:xfrm>
-                <a:off x="413933" y="1044285"/>
-                <a:ext cx="11116971" cy="621773"/>
+                <a:off x="695325" y="1125538"/>
+                <a:ext cx="10835579" cy="621773"/>
               </a:xfrm>
               <a:prstGeom prst="rect">
                 <a:avLst/>
@@ -16127,145 +19594,476 @@
           </p:sp>
         </mc:Fallback>
       </mc:AlternateContent>
-      <p:sp>
-        <p:nvSpPr>
-          <p:cNvPr id="9" name="TextBox 8">
+      <p:graphicFrame>
+        <p:nvGraphicFramePr>
+          <p:cNvPr id="3" name="Table 2">
             <a:extLst>
               <a:ext uri="{FF2B5EF4-FFF2-40B4-BE49-F238E27FC236}">
-                <a16:creationId xmlns:a16="http://schemas.microsoft.com/office/drawing/2014/main" id="{79A2D7F6-AFB8-F83C-6E48-AF813648F420}"/>
+                <a16:creationId xmlns:a16="http://schemas.microsoft.com/office/drawing/2014/main" id="{97BF2EBB-9A27-2520-31BD-E5BB29CFB241}"/>
               </a:ext>
             </a:extLst>
           </p:cNvPr>
-          <p:cNvSpPr txBox="1"/>
-          <p:nvPr/>
-        </p:nvSpPr>
-        <p:spPr>
-          <a:xfrm>
-            <a:off x="78578" y="1988184"/>
-            <a:ext cx="7475621" cy="3416320"/>
-          </a:xfrm>
-          <a:prstGeom prst="rect">
-            <a:avLst/>
-          </a:prstGeom>
-          <a:noFill/>
-        </p:spPr>
-        <p:txBody>
-          <a:bodyPr wrap="square">
-            <a:spAutoFit/>
-          </a:bodyPr>
-          <a:lstStyle/>
-          <a:p>
-            <a:r>
-              <a:rPr lang="en-US" sz="2400" b="1" dirty="0"/>
-              <a:t>Race</a:t>
-            </a:r>
-            <a:r>
-              <a:rPr lang="en-US" sz="2400" b="1"/>
-              <a:t>/Ethnicity Interaction Model</a:t>
-            </a:r>
-            <a:endParaRPr lang="en-US" sz="2400" b="1" dirty="0"/>
-          </a:p>
-          <a:p>
-            <a:pPr lvl="1"/>
-            <a:r>
-              <a:rPr lang="en-US" sz="2400"/>
-              <a:t>LRT p = 0.0803</a:t>
-            </a:r>
-            <a:endParaRPr lang="en-US" sz="2400" dirty="0"/>
-          </a:p>
-          <a:p>
-            <a:pPr lvl="1"/>
-            <a:endParaRPr lang="en-US" sz="2400" dirty="0"/>
-          </a:p>
-          <a:p>
-            <a:r>
-              <a:rPr lang="en-US" sz="2400" b="1"/>
-              <a:t>Subgroup-Specific Hazard Ratios</a:t>
-            </a:r>
-            <a:endParaRPr lang="en-US" sz="2400" b="1" dirty="0"/>
-          </a:p>
-          <a:p>
-            <a:pPr lvl="1"/>
-            <a:r>
-              <a:rPr lang="en-US" sz="2400"/>
-              <a:t>White:  	HR = 0.539 [0.303, 0.960] 	51 events</a:t>
-            </a:r>
-            <a:endParaRPr lang="en-US" sz="2400" dirty="0"/>
-          </a:p>
-          <a:p>
-            <a:pPr lvl="1"/>
-            <a:r>
-              <a:rPr lang="en-US" sz="2400"/>
-              <a:t>Black:  	HR = 0.287 [0.104, 0.794] 	21 events</a:t>
-            </a:r>
-            <a:endParaRPr lang="en-US" sz="2400" dirty="0"/>
-          </a:p>
-          <a:p>
-            <a:pPr lvl="1"/>
-            <a:r>
-              <a:rPr lang="en-US" sz="2400" dirty="0">
-                <a:solidFill>
-                  <a:srgbClr val="922B21"/>
-                </a:solidFill>
-              </a:rPr>
-              <a:t>Hispanic:</a:t>
-            </a:r>
-            <a:r>
-              <a:rPr lang="en-US" sz="2400">
-                <a:solidFill>
-                  <a:srgbClr val="922B21"/>
-                </a:solidFill>
-              </a:rPr>
-              <a:t>	HR = 0.628 [0.246, 1.602] 	20 events </a:t>
-            </a:r>
-            <a:endParaRPr lang="en-US" sz="2400" dirty="0">
-              <a:solidFill>
-                <a:srgbClr val="922B21"/>
-              </a:solidFill>
-            </a:endParaRPr>
-          </a:p>
-          <a:p>
-            <a:pPr lvl="1"/>
-            <a:r>
-              <a:rPr lang="en-US" sz="2400" dirty="0">
-                <a:solidFill>
-                  <a:srgbClr val="922B21"/>
-                </a:solidFill>
-              </a:rPr>
-              <a:t>Asian/</a:t>
-            </a:r>
-            <a:r>
-              <a:rPr lang="en-US" sz="2400">
-                <a:solidFill>
-                  <a:srgbClr val="922B21"/>
-                </a:solidFill>
-              </a:rPr>
-              <a:t>PI: 	HR = 0.068 [0.000, Inf]  	3 events </a:t>
-            </a:r>
-            <a:endParaRPr lang="en-US" sz="2400" dirty="0">
-              <a:solidFill>
-                <a:srgbClr val="922B21"/>
-              </a:solidFill>
-            </a:endParaRPr>
-          </a:p>
-          <a:p>
-            <a:pPr lvl="1"/>
-            <a:r>
-              <a:rPr lang="en-US" sz="2400">
-                <a:solidFill>
-                  <a:srgbClr val="922B21"/>
-                </a:solidFill>
-              </a:rPr>
-              <a:t>Other:  	HR = 237.3 [0.000, Inf]  	1 event </a:t>
-            </a:r>
-            <a:endParaRPr lang="en-US" sz="2400" dirty="0">
-              <a:solidFill>
-                <a:srgbClr val="922B21"/>
-              </a:solidFill>
-            </a:endParaRPr>
-          </a:p>
-        </p:txBody>
-      </p:sp>
+          <p:cNvGraphicFramePr>
+            <a:graphicFrameLocks noGrp="1"/>
+          </p:cNvGraphicFramePr>
+          <p:nvPr>
+            <p:extLst>
+              <p:ext uri="{D42A27DB-BD31-4B8C-83A1-F6EECF244321}">
+                <p14:modId xmlns:p14="http://schemas.microsoft.com/office/powerpoint/2010/main" val="796884917"/>
+              </p:ext>
+            </p:extLst>
+          </p:nvPr>
+        </p:nvGraphicFramePr>
+        <p:xfrm>
+          <a:off x="714619" y="2103738"/>
+          <a:ext cx="5810570" cy="3169920"/>
+        </p:xfrm>
+        <a:graphic>
+          <a:graphicData uri="http://schemas.openxmlformats.org/drawingml/2006/table">
+            <a:tbl>
+              <a:tblPr bandRow="1">
+                <a:tableStyleId>{5C22544A-7EE6-4342-B048-85BDC9FD1C3A}</a:tableStyleId>
+              </a:tblPr>
+              <a:tblGrid>
+                <a:gridCol w="1704976">
+                  <a:extLst>
+                    <a:ext uri="{9D8B030D-6E8A-4147-A177-3AD203B41FA5}">
+                      <a16:colId xmlns:a16="http://schemas.microsoft.com/office/drawing/2014/main" val="1779458928"/>
+                    </a:ext>
+                  </a:extLst>
+                </a:gridCol>
+                <a:gridCol w="2400618">
+                  <a:extLst>
+                    <a:ext uri="{9D8B030D-6E8A-4147-A177-3AD203B41FA5}">
+                      <a16:colId xmlns:a16="http://schemas.microsoft.com/office/drawing/2014/main" val="2869337161"/>
+                    </a:ext>
+                  </a:extLst>
+                </a:gridCol>
+                <a:gridCol w="1704976">
+                  <a:extLst>
+                    <a:ext uri="{9D8B030D-6E8A-4147-A177-3AD203B41FA5}">
+                      <a16:colId xmlns:a16="http://schemas.microsoft.com/office/drawing/2014/main" val="4102276423"/>
+                    </a:ext>
+                  </a:extLst>
+                </a:gridCol>
+              </a:tblGrid>
+              <a:tr h="370840">
+                <a:tc gridSpan="3">
+                  <a:txBody>
+                    <a:bodyPr/>
+                    <a:lstStyle/>
+                    <a:p>
+                      <a:pPr algn="ctr"/>
+                      <a:r>
+                        <a:rPr lang="en-US" sz="2000" b="1" dirty="0">
+                          <a:solidFill>
+                            <a:schemeClr val="bg1"/>
+                          </a:solidFill>
+                        </a:rPr>
+                        <a:t>Race/Ethnicity Interaction Model</a:t>
+                      </a:r>
+                    </a:p>
+                  </a:txBody>
+                  <a:tcPr>
+                    <a:solidFill>
+                      <a:schemeClr val="accent1">
+                        <a:lumMod val="75000"/>
+                      </a:schemeClr>
+                    </a:solidFill>
+                  </a:tcPr>
+                </a:tc>
+                <a:tc hMerge="1">
+                  <a:txBody>
+                    <a:bodyPr/>
+                    <a:lstStyle/>
+                    <a:p>
+                      <a:endParaRPr lang="en-US" dirty="0"/>
+                    </a:p>
+                  </a:txBody>
+                  <a:tcPr/>
+                </a:tc>
+                <a:tc hMerge="1">
+                  <a:txBody>
+                    <a:bodyPr/>
+                    <a:lstStyle/>
+                    <a:p>
+                      <a:endParaRPr lang="en-US"/>
+                    </a:p>
+                  </a:txBody>
+                  <a:tcPr/>
+                </a:tc>
+                <a:extLst>
+                  <a:ext uri="{0D108BD9-81ED-4DB2-BD59-A6C34878D82A}">
+                    <a16:rowId xmlns:a16="http://schemas.microsoft.com/office/drawing/2014/main" val="1397225430"/>
+                  </a:ext>
+                </a:extLst>
+              </a:tr>
+              <a:tr h="370840">
+                <a:tc>
+                  <a:txBody>
+                    <a:bodyPr/>
+                    <a:lstStyle/>
+                    <a:p>
+                      <a:r>
+                        <a:rPr lang="en-US" sz="2000" dirty="0"/>
+                        <a:t>LRT p-value</a:t>
+                      </a:r>
+                    </a:p>
+                  </a:txBody>
+                  <a:tcPr/>
+                </a:tc>
+                <a:tc gridSpan="2">
+                  <a:txBody>
+                    <a:bodyPr/>
+                    <a:lstStyle/>
+                    <a:p>
+                      <a:pPr algn="ctr"/>
+                      <a:r>
+                        <a:rPr lang="en-US" sz="2000" dirty="0"/>
+                        <a:t>0.0803</a:t>
+                      </a:r>
+                    </a:p>
+                  </a:txBody>
+                  <a:tcPr/>
+                </a:tc>
+                <a:tc hMerge="1">
+                  <a:txBody>
+                    <a:bodyPr/>
+                    <a:lstStyle/>
+                    <a:p>
+                      <a:endParaRPr lang="en-US"/>
+                    </a:p>
+                  </a:txBody>
+                  <a:tcPr/>
+                </a:tc>
+                <a:extLst>
+                  <a:ext uri="{0D108BD9-81ED-4DB2-BD59-A6C34878D82A}">
+                    <a16:rowId xmlns:a16="http://schemas.microsoft.com/office/drawing/2014/main" val="402482031"/>
+                  </a:ext>
+                </a:extLst>
+              </a:tr>
+              <a:tr h="370840">
+                <a:tc>
+                  <a:txBody>
+                    <a:bodyPr/>
+                    <a:lstStyle/>
+                    <a:p>
+                      <a:r>
+                        <a:rPr lang="en-US" sz="2000" b="1" dirty="0">
+                          <a:solidFill>
+                            <a:schemeClr val="bg1"/>
+                          </a:solidFill>
+                        </a:rPr>
+                        <a:t>Variable</a:t>
+                      </a:r>
+                    </a:p>
+                  </a:txBody>
+                  <a:tcPr>
+                    <a:solidFill>
+                      <a:schemeClr val="accent1">
+                        <a:lumMod val="75000"/>
+                      </a:schemeClr>
+                    </a:solidFill>
+                  </a:tcPr>
+                </a:tc>
+                <a:tc>
+                  <a:txBody>
+                    <a:bodyPr/>
+                    <a:lstStyle/>
+                    <a:p>
+                      <a:pPr algn="ctr"/>
+                      <a:r>
+                        <a:rPr lang="en-US" sz="2000" b="1" dirty="0">
+                          <a:solidFill>
+                            <a:schemeClr val="bg1"/>
+                          </a:solidFill>
+                        </a:rPr>
+                        <a:t>HR [95% CI]</a:t>
+                      </a:r>
+                    </a:p>
+                  </a:txBody>
+                  <a:tcPr>
+                    <a:solidFill>
+                      <a:schemeClr val="accent1">
+                        <a:lumMod val="75000"/>
+                      </a:schemeClr>
+                    </a:solidFill>
+                  </a:tcPr>
+                </a:tc>
+                <a:tc>
+                  <a:txBody>
+                    <a:bodyPr/>
+                    <a:lstStyle/>
+                    <a:p>
+                      <a:pPr algn="ctr"/>
+                      <a:r>
+                        <a:rPr lang="en-US" sz="2000" b="1" dirty="0">
+                          <a:solidFill>
+                            <a:schemeClr val="bg1"/>
+                          </a:solidFill>
+                        </a:rPr>
+                        <a:t>Event Count</a:t>
+                      </a:r>
+                    </a:p>
+                  </a:txBody>
+                  <a:tcPr>
+                    <a:solidFill>
+                      <a:schemeClr val="accent1">
+                        <a:lumMod val="75000"/>
+                      </a:schemeClr>
+                    </a:solidFill>
+                  </a:tcPr>
+                </a:tc>
+                <a:extLst>
+                  <a:ext uri="{0D108BD9-81ED-4DB2-BD59-A6C34878D82A}">
+                    <a16:rowId xmlns:a16="http://schemas.microsoft.com/office/drawing/2014/main" val="292657601"/>
+                  </a:ext>
+                </a:extLst>
+              </a:tr>
+              <a:tr h="370840">
+                <a:tc>
+                  <a:txBody>
+                    <a:bodyPr/>
+                    <a:lstStyle/>
+                    <a:p>
+                      <a:r>
+                        <a:rPr lang="en-US" sz="2000" dirty="0"/>
+                        <a:t>White</a:t>
+                      </a:r>
+                    </a:p>
+                  </a:txBody>
+                  <a:tcPr/>
+                </a:tc>
+                <a:tc>
+                  <a:txBody>
+                    <a:bodyPr/>
+                    <a:lstStyle/>
+                    <a:p>
+                      <a:pPr algn="ctr"/>
+                      <a:r>
+                        <a:rPr lang="en-US" sz="2000" dirty="0"/>
+                        <a:t>0.539 [0.303, 0.960]</a:t>
+                      </a:r>
+                    </a:p>
+                  </a:txBody>
+                  <a:tcPr/>
+                </a:tc>
+                <a:tc>
+                  <a:txBody>
+                    <a:bodyPr/>
+                    <a:lstStyle/>
+                    <a:p>
+                      <a:pPr algn="ctr"/>
+                      <a:r>
+                        <a:rPr lang="en-US" sz="2000" dirty="0"/>
+                        <a:t>51</a:t>
+                      </a:r>
+                    </a:p>
+                  </a:txBody>
+                  <a:tcPr/>
+                </a:tc>
+                <a:extLst>
+                  <a:ext uri="{0D108BD9-81ED-4DB2-BD59-A6C34878D82A}">
+                    <a16:rowId xmlns:a16="http://schemas.microsoft.com/office/drawing/2014/main" val="4202147545"/>
+                  </a:ext>
+                </a:extLst>
+              </a:tr>
+              <a:tr h="370840">
+                <a:tc>
+                  <a:txBody>
+                    <a:bodyPr/>
+                    <a:lstStyle/>
+                    <a:p>
+                      <a:r>
+                        <a:rPr lang="en-US" sz="2000" dirty="0"/>
+                        <a:t>Black</a:t>
+                      </a:r>
+                    </a:p>
+                  </a:txBody>
+                  <a:tcPr/>
+                </a:tc>
+                <a:tc>
+                  <a:txBody>
+                    <a:bodyPr/>
+                    <a:lstStyle/>
+                    <a:p>
+                      <a:pPr algn="ctr"/>
+                      <a:r>
+                        <a:rPr lang="en-US" sz="2000" dirty="0"/>
+                        <a:t>0.287 [0.104, 0.794]</a:t>
+                      </a:r>
+                    </a:p>
+                  </a:txBody>
+                  <a:tcPr/>
+                </a:tc>
+                <a:tc>
+                  <a:txBody>
+                    <a:bodyPr/>
+                    <a:lstStyle/>
+                    <a:p>
+                      <a:pPr algn="ctr"/>
+                      <a:r>
+                        <a:rPr lang="en-US" sz="2000" dirty="0"/>
+                        <a:t>21</a:t>
+                      </a:r>
+                    </a:p>
+                  </a:txBody>
+                  <a:tcPr/>
+                </a:tc>
+                <a:extLst>
+                  <a:ext uri="{0D108BD9-81ED-4DB2-BD59-A6C34878D82A}">
+                    <a16:rowId xmlns:a16="http://schemas.microsoft.com/office/drawing/2014/main" val="3499168990"/>
+                  </a:ext>
+                </a:extLst>
+              </a:tr>
+              <a:tr h="370840">
+                <a:tc>
+                  <a:txBody>
+                    <a:bodyPr/>
+                    <a:lstStyle/>
+                    <a:p>
+                      <a:r>
+                        <a:rPr lang="en-US" sz="2000" dirty="0"/>
+                        <a:t>Hispanic</a:t>
+                      </a:r>
+                    </a:p>
+                  </a:txBody>
+                  <a:tcPr/>
+                </a:tc>
+                <a:tc>
+                  <a:txBody>
+                    <a:bodyPr/>
+                    <a:lstStyle/>
+                    <a:p>
+                      <a:pPr algn="ctr"/>
+                      <a:r>
+                        <a:rPr lang="en-US" sz="2000" dirty="0"/>
+                        <a:t>0.628 [0.246, 1.602]</a:t>
+                      </a:r>
+                    </a:p>
+                  </a:txBody>
+                  <a:tcPr/>
+                </a:tc>
+                <a:tc>
+                  <a:txBody>
+                    <a:bodyPr/>
+                    <a:lstStyle/>
+                    <a:p>
+                      <a:pPr algn="ctr"/>
+                      <a:r>
+                        <a:rPr lang="en-US" sz="2000" dirty="0"/>
+                        <a:t>20</a:t>
+                      </a:r>
+                    </a:p>
+                  </a:txBody>
+                  <a:tcPr/>
+                </a:tc>
+                <a:extLst>
+                  <a:ext uri="{0D108BD9-81ED-4DB2-BD59-A6C34878D82A}">
+                    <a16:rowId xmlns:a16="http://schemas.microsoft.com/office/drawing/2014/main" val="2481086426"/>
+                  </a:ext>
+                </a:extLst>
+              </a:tr>
+              <a:tr h="370840">
+                <a:tc>
+                  <a:txBody>
+                    <a:bodyPr/>
+                    <a:lstStyle/>
+                    <a:p>
+                      <a:r>
+                        <a:rPr lang="en-US" sz="2000" dirty="0"/>
+                        <a:t>Asian/PI</a:t>
+                      </a:r>
+                    </a:p>
+                  </a:txBody>
+                  <a:tcPr/>
+                </a:tc>
+                <a:tc>
+                  <a:txBody>
+                    <a:bodyPr/>
+                    <a:lstStyle/>
+                    <a:p>
+                      <a:pPr algn="ctr"/>
+                      <a:r>
+                        <a:rPr lang="en-US" sz="2000" dirty="0"/>
+                        <a:t>0.068 [0, Inf]</a:t>
+                      </a:r>
+                    </a:p>
+                  </a:txBody>
+                  <a:tcPr/>
+                </a:tc>
+                <a:tc>
+                  <a:txBody>
+                    <a:bodyPr/>
+                    <a:lstStyle/>
+                    <a:p>
+                      <a:pPr algn="ctr"/>
+                      <a:r>
+                        <a:rPr lang="en-US" sz="2000" dirty="0"/>
+                        <a:t>3</a:t>
+                      </a:r>
+                    </a:p>
+                  </a:txBody>
+                  <a:tcPr/>
+                </a:tc>
+                <a:extLst>
+                  <a:ext uri="{0D108BD9-81ED-4DB2-BD59-A6C34878D82A}">
+                    <a16:rowId xmlns:a16="http://schemas.microsoft.com/office/drawing/2014/main" val="2034761336"/>
+                  </a:ext>
+                </a:extLst>
+              </a:tr>
+              <a:tr h="370840">
+                <a:tc>
+                  <a:txBody>
+                    <a:bodyPr/>
+                    <a:lstStyle/>
+                    <a:p>
+                      <a:r>
+                        <a:rPr lang="en-US" sz="2000" dirty="0"/>
+                        <a:t>Other</a:t>
+                      </a:r>
+                    </a:p>
+                  </a:txBody>
+                  <a:tcPr/>
+                </a:tc>
+                <a:tc>
+                  <a:txBody>
+                    <a:bodyPr/>
+                    <a:lstStyle/>
+                    <a:p>
+                      <a:pPr algn="ctr"/>
+                      <a:r>
+                        <a:rPr lang="en-US" sz="2000" dirty="0"/>
+                        <a:t>237.3 [0, Inf]</a:t>
+                      </a:r>
+                    </a:p>
+                  </a:txBody>
+                  <a:tcPr/>
+                </a:tc>
+                <a:tc>
+                  <a:txBody>
+                    <a:bodyPr/>
+                    <a:lstStyle/>
+                    <a:p>
+                      <a:pPr algn="ctr"/>
+                      <a:r>
+                        <a:rPr lang="en-US" sz="2000" dirty="0"/>
+                        <a:t>1</a:t>
+                      </a:r>
+                    </a:p>
+                  </a:txBody>
+                  <a:tcPr/>
+                </a:tc>
+                <a:extLst>
+                  <a:ext uri="{0D108BD9-81ED-4DB2-BD59-A6C34878D82A}">
+                    <a16:rowId xmlns:a16="http://schemas.microsoft.com/office/drawing/2014/main" val="654242305"/>
+                  </a:ext>
+                </a:extLst>
+              </a:tr>
+            </a:tbl>
+          </a:graphicData>
+        </a:graphic>
+      </p:graphicFrame>
     </p:spTree>
     <p:extLst>
       <p:ext uri="{BB962C8B-B14F-4D97-AF65-F5344CB8AC3E}">
